--- a/profiles/community/tosca/abstract/platform/sources/platforms.pptx
+++ b/profiles/community/tosca/abstract/platform/sources/platforms.pptx
@@ -9,9 +9,11 @@
     <p:sldId id="274" r:id="rId3"/>
     <p:sldId id="275" r:id="rId4"/>
     <p:sldId id="278" r:id="rId5"/>
-    <p:sldId id="277" r:id="rId6"/>
-    <p:sldId id="279" r:id="rId7"/>
-    <p:sldId id="276" r:id="rId8"/>
+    <p:sldId id="279" r:id="rId6"/>
+    <p:sldId id="280" r:id="rId7"/>
+    <p:sldId id="282" r:id="rId8"/>
+    <p:sldId id="281" r:id="rId9"/>
+    <p:sldId id="277" r:id="rId10"/>
   </p:sldIdLst>
   <p:sldSz cx="12192000" cy="6858000"/>
   <p:notesSz cx="6858000" cy="9144000"/>
@@ -265,7 +267,7 @@
           <a:p>
             <a:fld id="{5BAF7096-B8B4-4A3B-8A26-165AAEF12400}" type="datetimeFigureOut">
               <a:rPr lang="en-US" smtClean="0"/>
-              <a:t>1/14/2026</a:t>
+              <a:t>3/31/2026</a:t>
             </a:fld>
             <a:endParaRPr lang="en-US"/>
           </a:p>
@@ -463,7 +465,7 @@
           <a:p>
             <a:fld id="{5BAF7096-B8B4-4A3B-8A26-165AAEF12400}" type="datetimeFigureOut">
               <a:rPr lang="en-US" smtClean="0"/>
-              <a:t>1/14/2026</a:t>
+              <a:t>3/31/2026</a:t>
             </a:fld>
             <a:endParaRPr lang="en-US"/>
           </a:p>
@@ -671,7 +673,7 @@
           <a:p>
             <a:fld id="{5BAF7096-B8B4-4A3B-8A26-165AAEF12400}" type="datetimeFigureOut">
               <a:rPr lang="en-US" smtClean="0"/>
-              <a:t>1/14/2026</a:t>
+              <a:t>3/31/2026</a:t>
             </a:fld>
             <a:endParaRPr lang="en-US"/>
           </a:p>
@@ -869,7 +871,7 @@
           <a:p>
             <a:fld id="{5BAF7096-B8B4-4A3B-8A26-165AAEF12400}" type="datetimeFigureOut">
               <a:rPr lang="en-US" smtClean="0"/>
-              <a:t>1/14/2026</a:t>
+              <a:t>3/31/2026</a:t>
             </a:fld>
             <a:endParaRPr lang="en-US"/>
           </a:p>
@@ -1144,7 +1146,7 @@
           <a:p>
             <a:fld id="{5BAF7096-B8B4-4A3B-8A26-165AAEF12400}" type="datetimeFigureOut">
               <a:rPr lang="en-US" smtClean="0"/>
-              <a:t>1/14/2026</a:t>
+              <a:t>3/31/2026</a:t>
             </a:fld>
             <a:endParaRPr lang="en-US"/>
           </a:p>
@@ -1409,7 +1411,7 @@
           <a:p>
             <a:fld id="{5BAF7096-B8B4-4A3B-8A26-165AAEF12400}" type="datetimeFigureOut">
               <a:rPr lang="en-US" smtClean="0"/>
-              <a:t>1/14/2026</a:t>
+              <a:t>3/31/2026</a:t>
             </a:fld>
             <a:endParaRPr lang="en-US"/>
           </a:p>
@@ -1821,7 +1823,7 @@
           <a:p>
             <a:fld id="{5BAF7096-B8B4-4A3B-8A26-165AAEF12400}" type="datetimeFigureOut">
               <a:rPr lang="en-US" smtClean="0"/>
-              <a:t>1/14/2026</a:t>
+              <a:t>3/31/2026</a:t>
             </a:fld>
             <a:endParaRPr lang="en-US"/>
           </a:p>
@@ -1962,7 +1964,7 @@
           <a:p>
             <a:fld id="{5BAF7096-B8B4-4A3B-8A26-165AAEF12400}" type="datetimeFigureOut">
               <a:rPr lang="en-US" smtClean="0"/>
-              <a:t>1/14/2026</a:t>
+              <a:t>3/31/2026</a:t>
             </a:fld>
             <a:endParaRPr lang="en-US"/>
           </a:p>
@@ -2075,7 +2077,7 @@
           <a:p>
             <a:fld id="{5BAF7096-B8B4-4A3B-8A26-165AAEF12400}" type="datetimeFigureOut">
               <a:rPr lang="en-US" smtClean="0"/>
-              <a:t>1/14/2026</a:t>
+              <a:t>3/31/2026</a:t>
             </a:fld>
             <a:endParaRPr lang="en-US"/>
           </a:p>
@@ -2386,7 +2388,7 @@
           <a:p>
             <a:fld id="{5BAF7096-B8B4-4A3B-8A26-165AAEF12400}" type="datetimeFigureOut">
               <a:rPr lang="en-US" smtClean="0"/>
-              <a:t>1/14/2026</a:t>
+              <a:t>3/31/2026</a:t>
             </a:fld>
             <a:endParaRPr lang="en-US"/>
           </a:p>
@@ -2674,7 +2676,7 @@
           <a:p>
             <a:fld id="{5BAF7096-B8B4-4A3B-8A26-165AAEF12400}" type="datetimeFigureOut">
               <a:rPr lang="en-US" smtClean="0"/>
-              <a:t>1/14/2026</a:t>
+              <a:t>3/31/2026</a:t>
             </a:fld>
             <a:endParaRPr lang="en-US"/>
           </a:p>
@@ -2915,7 +2917,7 @@
           <a:p>
             <a:fld id="{5BAF7096-B8B4-4A3B-8A26-165AAEF12400}" type="datetimeFigureOut">
               <a:rPr lang="en-US" smtClean="0"/>
-              <a:t>1/14/2026</a:t>
+              <a:t>3/31/2026</a:t>
             </a:fld>
             <a:endParaRPr lang="en-US"/>
           </a:p>
@@ -3456,7 +3458,7 @@
                   <a:schemeClr val="tx1"/>
                 </a:solidFill>
               </a:rPr>
-              <a:t>Compute</a:t>
+              <a:t>Server</a:t>
             </a:r>
           </a:p>
           <a:p>
@@ -3891,7 +3893,7 @@
                   <a:defRPr/>
                 </a:pPr>
                 <a:r>
-                  <a:rPr kumimoji="0" lang="en-US" sz="900" b="0" i="0" u="none" strike="noStrike" kern="1200" cap="none" spc="0" normalizeH="0" baseline="0" noProof="0" dirty="0" err="1">
+                  <a:rPr kumimoji="0" lang="en-US" sz="900" b="0" i="0" u="none" strike="noStrike" kern="1200" cap="none" spc="0" normalizeH="0" baseline="0" noProof="0" dirty="0">
                     <a:ln>
                       <a:noFill/>
                     </a:ln>
@@ -3904,21 +3906,8 @@
                     <a:ea typeface="+mn-ea"/>
                     <a:cs typeface="+mn-cs"/>
                   </a:rPr>
-                  <a:t>AWSRegion</a:t>
+                  <a:t>Virtualization Platform</a:t>
                 </a:r>
-                <a:endParaRPr kumimoji="0" lang="en-US" sz="900" b="0" i="0" u="none" strike="noStrike" kern="1200" cap="none" spc="0" normalizeH="0" baseline="0" noProof="0" dirty="0">
-                  <a:ln>
-                    <a:noFill/>
-                  </a:ln>
-                  <a:solidFill>
-                    <a:prstClr val="black"/>
-                  </a:solidFill>
-                  <a:effectLst/>
-                  <a:uLnTx/>
-                  <a:uFillTx/>
-                  <a:ea typeface="+mn-ea"/>
-                  <a:cs typeface="+mn-cs"/>
-                </a:endParaRPr>
               </a:p>
             </p:txBody>
           </p:sp>
@@ -4261,7 +4250,7 @@
                     <a:ea typeface="+mn-ea"/>
                     <a:cs typeface="+mn-cs"/>
                   </a:rPr>
-                  <a:t>Compute</a:t>
+                  <a:t>Server</a:t>
                 </a:r>
               </a:p>
               <a:p>
@@ -4747,7 +4736,7 @@
                     <a:ea typeface="+mn-ea"/>
                     <a:cs typeface="+mn-cs"/>
                   </a:rPr>
-                  <a:t>Compute</a:t>
+                  <a:t>Server</a:t>
                 </a:r>
               </a:p>
               <a:p>
@@ -4843,7 +4832,7 @@
                       <a:prstClr val="black"/>
                     </a:solidFill>
                   </a:rPr>
-                  <a:t>server-1</a:t>
+                  <a:t>Server-1</a:t>
                 </a:r>
                 <a:endParaRPr kumimoji="0" lang="en-US" sz="800" b="0" i="0" u="none" strike="noStrike" kern="1200" cap="none" spc="0" normalizeH="0" baseline="0" noProof="0" dirty="0">
                   <a:ln>
@@ -5119,7 +5108,7 @@
                     <a:defRPr/>
                   </a:pPr>
                   <a:r>
-                    <a:rPr kumimoji="0" lang="en-US" sz="900" b="0" i="0" u="none" strike="noStrike" kern="1200" cap="none" spc="0" normalizeH="0" baseline="0" noProof="0" dirty="0" err="1">
+                    <a:rPr kumimoji="0" lang="en-US" sz="900" b="0" i="0" u="none" strike="noStrike" kern="1200" cap="none" spc="0" normalizeH="0" baseline="0" noProof="0" dirty="0">
                       <a:ln>
                         <a:noFill/>
                       </a:ln>
@@ -5132,21 +5121,8 @@
                       <a:ea typeface="+mn-ea"/>
                       <a:cs typeface="+mn-cs"/>
                     </a:rPr>
-                    <a:t>Proxmox</a:t>
+                    <a:t>Virtualization Platform</a:t>
                   </a:r>
-                  <a:endParaRPr kumimoji="0" lang="en-US" sz="900" b="0" i="0" u="none" strike="noStrike" kern="1200" cap="none" spc="0" normalizeH="0" baseline="0" noProof="0" dirty="0">
-                    <a:ln>
-                      <a:noFill/>
-                    </a:ln>
-                    <a:solidFill>
-                      <a:prstClr val="black"/>
-                    </a:solidFill>
-                    <a:effectLst/>
-                    <a:uLnTx/>
-                    <a:uFillTx/>
-                    <a:ea typeface="+mn-ea"/>
-                    <a:cs typeface="+mn-cs"/>
-                  </a:endParaRPr>
                 </a:p>
               </p:txBody>
             </p:sp>
@@ -5657,7 +5633,7 @@
                     <a:ea typeface="+mn-ea"/>
                     <a:cs typeface="+mn-cs"/>
                   </a:rPr>
-                  <a:t>Compute</a:t>
+                  <a:t>Server</a:t>
                 </a:r>
               </a:p>
               <a:p>
@@ -6189,7 +6165,7 @@
                     <a:ea typeface="+mn-ea"/>
                     <a:cs typeface="+mn-cs"/>
                   </a:rPr>
-                  <a:t>Compute</a:t>
+                  <a:t>Server</a:t>
                 </a:r>
               </a:p>
               <a:p>
@@ -6285,7 +6261,7 @@
                       <a:prstClr val="black"/>
                     </a:solidFill>
                   </a:rPr>
-                  <a:t>server-1</a:t>
+                  <a:t>Server-1</a:t>
                 </a:r>
                 <a:endParaRPr kumimoji="0" lang="en-US" sz="800" b="0" i="0" u="none" strike="noStrike" kern="1200" cap="none" spc="0" normalizeH="0" baseline="0" noProof="0" dirty="0">
                   <a:ln>
@@ -6574,7 +6550,7 @@
                       <a:ea typeface="+mn-ea"/>
                       <a:cs typeface="+mn-cs"/>
                     </a:rPr>
-                    <a:t>Kubernetes Cluster</a:t>
+                    <a:t>Container Platform</a:t>
                   </a:r>
                 </a:p>
               </p:txBody>
@@ -7060,1824 +7036,6 @@
           <a:chExt cx="0" cy="0"/>
         </a:xfrm>
       </p:grpSpPr>
-      <p:cxnSp>
-        <p:nvCxnSpPr>
-          <p:cNvPr id="17" name="Straight Arrow Connector 16">
-            <a:extLst>
-              <a:ext uri="{FF2B5EF4-FFF2-40B4-BE49-F238E27FC236}">
-                <a16:creationId xmlns:a16="http://schemas.microsoft.com/office/drawing/2014/main" id="{E58D11E9-E884-B98D-C7B8-50308964A9BB}"/>
-              </a:ext>
-            </a:extLst>
-          </p:cNvPr>
-          <p:cNvCxnSpPr>
-            <a:cxnSpLocks/>
-            <a:endCxn id="37" idx="2"/>
-          </p:cNvCxnSpPr>
-          <p:nvPr/>
-        </p:nvCxnSpPr>
-        <p:spPr>
-          <a:xfrm flipH="1" flipV="1">
-            <a:off x="6148358" y="3389850"/>
-            <a:ext cx="760" cy="278384"/>
-          </a:xfrm>
-          <a:prstGeom prst="straightConnector1">
-            <a:avLst/>
-          </a:prstGeom>
-          <a:ln w="12700">
-            <a:solidFill>
-              <a:schemeClr val="tx1"/>
-            </a:solidFill>
-            <a:headEnd type="triangle" w="med" len="med"/>
-            <a:tailEnd type="none" w="med" len="med"/>
-          </a:ln>
-        </p:spPr>
-        <p:style>
-          <a:lnRef idx="1">
-            <a:schemeClr val="accent1"/>
-          </a:lnRef>
-          <a:fillRef idx="0">
-            <a:schemeClr val="accent1"/>
-          </a:fillRef>
-          <a:effectRef idx="0">
-            <a:schemeClr val="accent1"/>
-          </a:effectRef>
-          <a:fontRef idx="minor">
-            <a:schemeClr val="tx1"/>
-          </a:fontRef>
-        </p:style>
-      </p:cxnSp>
-      <p:grpSp>
-        <p:nvGrpSpPr>
-          <p:cNvPr id="14" name="Group 13">
-            <a:extLst>
-              <a:ext uri="{FF2B5EF4-FFF2-40B4-BE49-F238E27FC236}">
-                <a16:creationId xmlns:a16="http://schemas.microsoft.com/office/drawing/2014/main" id="{6FDC8F7F-F5A3-B7A0-63DA-957D62F5E191}"/>
-              </a:ext>
-            </a:extLst>
-          </p:cNvPr>
-          <p:cNvGrpSpPr/>
-          <p:nvPr/>
-        </p:nvGrpSpPr>
-        <p:grpSpPr>
-          <a:xfrm>
-            <a:off x="4476934" y="3622050"/>
-            <a:ext cx="3342849" cy="991032"/>
-            <a:chOff x="4476934" y="3622050"/>
-            <a:chExt cx="3342849" cy="991032"/>
-          </a:xfrm>
-        </p:grpSpPr>
-        <p:grpSp>
-          <p:nvGrpSpPr>
-            <p:cNvPr id="18" name="Group 17">
-              <a:extLst>
-                <a:ext uri="{FF2B5EF4-FFF2-40B4-BE49-F238E27FC236}">
-                  <a16:creationId xmlns:a16="http://schemas.microsoft.com/office/drawing/2014/main" id="{0965E86A-1C94-A558-145A-CBC2E89E62AD}"/>
-                </a:ext>
-              </a:extLst>
-            </p:cNvPr>
-            <p:cNvGrpSpPr/>
-            <p:nvPr/>
-          </p:nvGrpSpPr>
-          <p:grpSpPr>
-            <a:xfrm>
-              <a:off x="5762648" y="3622050"/>
-              <a:ext cx="771421" cy="991032"/>
-              <a:chOff x="3816079" y="4223863"/>
-              <a:chExt cx="771421" cy="991032"/>
-            </a:xfrm>
-          </p:grpSpPr>
-          <p:sp>
-            <p:nvSpPr>
-              <p:cNvPr id="19" name="Rectangle 18">
-                <a:extLst>
-                  <a:ext uri="{FF2B5EF4-FFF2-40B4-BE49-F238E27FC236}">
-                    <a16:creationId xmlns:a16="http://schemas.microsoft.com/office/drawing/2014/main" id="{D1423ABE-B95A-39BF-B25A-51AE295D7BCC}"/>
-                  </a:ext>
-                </a:extLst>
-              </p:cNvPr>
-              <p:cNvSpPr/>
-              <p:nvPr/>
-            </p:nvSpPr>
-            <p:spPr>
-              <a:xfrm>
-                <a:off x="3816079" y="4722603"/>
-                <a:ext cx="771421" cy="250978"/>
-              </a:xfrm>
-              <a:prstGeom prst="rect">
-                <a:avLst/>
-              </a:prstGeom>
-              <a:solidFill>
-                <a:schemeClr val="bg1">
-                  <a:lumMod val="95000"/>
-                </a:schemeClr>
-              </a:solidFill>
-              <a:ln w="19050">
-                <a:solidFill>
-                  <a:schemeClr val="bg2"/>
-                </a:solidFill>
-              </a:ln>
-            </p:spPr>
-            <p:style>
-              <a:lnRef idx="2">
-                <a:schemeClr val="accent1">
-                  <a:shade val="50000"/>
-                </a:schemeClr>
-              </a:lnRef>
-              <a:fillRef idx="1">
-                <a:schemeClr val="accent1"/>
-              </a:fillRef>
-              <a:effectRef idx="0">
-                <a:schemeClr val="accent1"/>
-              </a:effectRef>
-              <a:fontRef idx="minor">
-                <a:schemeClr val="lt1"/>
-              </a:fontRef>
-            </p:style>
-            <p:txBody>
-              <a:bodyPr lIns="0" rIns="0" rtlCol="0" anchor="ctr"/>
-              <a:lstStyle/>
-              <a:p>
-                <a:pPr marL="0" marR="0" lvl="0" indent="0" algn="ctr" defTabSz="914400" rtl="0" eaLnBrk="1" fontAlgn="auto" latinLnBrk="0" hangingPunct="1">
-                  <a:lnSpc>
-                    <a:spcPct val="100000"/>
-                  </a:lnSpc>
-                  <a:spcBef>
-                    <a:spcPts val="0"/>
-                  </a:spcBef>
-                  <a:spcAft>
-                    <a:spcPts val="0"/>
-                  </a:spcAft>
-                  <a:buClrTx/>
-                  <a:buSzTx/>
-                  <a:buFontTx/>
-                  <a:buNone/>
-                  <a:tabLst/>
-                  <a:defRPr/>
-                </a:pPr>
-                <a:r>
-                  <a:rPr kumimoji="0" lang="en-US" sz="900" b="0" i="0" u="none" strike="noStrike" kern="1200" cap="none" spc="0" normalizeH="0" baseline="0" noProof="0" dirty="0">
-                    <a:ln>
-                      <a:noFill/>
-                    </a:ln>
-                    <a:solidFill>
-                      <a:prstClr val="black"/>
-                    </a:solidFill>
-                    <a:effectLst/>
-                    <a:uLnTx/>
-                    <a:uFillTx/>
-                    <a:ea typeface="+mn-ea"/>
-                    <a:cs typeface="+mn-cs"/>
-                  </a:rPr>
-                  <a:t>Compute</a:t>
-                </a:r>
-              </a:p>
-              <a:p>
-                <a:pPr marL="0" marR="0" lvl="0" indent="0" algn="ctr" defTabSz="914400" rtl="0" eaLnBrk="1" fontAlgn="auto" latinLnBrk="0" hangingPunct="1">
-                  <a:lnSpc>
-                    <a:spcPct val="100000"/>
-                  </a:lnSpc>
-                  <a:spcBef>
-                    <a:spcPts val="0"/>
-                  </a:spcBef>
-                  <a:spcAft>
-                    <a:spcPts val="0"/>
-                  </a:spcAft>
-                  <a:buClrTx/>
-                  <a:buSzTx/>
-                  <a:buFontTx/>
-                  <a:buNone/>
-                  <a:tabLst/>
-                  <a:defRPr/>
-                </a:pPr>
-                <a:r>
-                  <a:rPr kumimoji="0" lang="en-US" sz="900" b="0" i="0" u="none" strike="noStrike" kern="1200" cap="none" spc="0" normalizeH="0" baseline="0" noProof="0" dirty="0">
-                    <a:ln>
-                      <a:noFill/>
-                    </a:ln>
-                    <a:solidFill>
-                      <a:prstClr val="black"/>
-                    </a:solidFill>
-                    <a:effectLst/>
-                    <a:uLnTx/>
-                    <a:uFillTx/>
-                    <a:ea typeface="+mn-ea"/>
-                    <a:cs typeface="+mn-cs"/>
-                  </a:rPr>
-                  <a:t>Platform</a:t>
-                </a:r>
-              </a:p>
-            </p:txBody>
-          </p:sp>
-          <p:sp>
-            <p:nvSpPr>
-              <p:cNvPr id="20" name="Rectangle: Rounded Corners 19">
-                <a:extLst>
-                  <a:ext uri="{FF2B5EF4-FFF2-40B4-BE49-F238E27FC236}">
-                    <a16:creationId xmlns:a16="http://schemas.microsoft.com/office/drawing/2014/main" id="{78CF353B-5D46-A40D-867F-63CF5553D636}"/>
-                  </a:ext>
-                </a:extLst>
-              </p:cNvPr>
-              <p:cNvSpPr/>
-              <p:nvPr/>
-            </p:nvSpPr>
-            <p:spPr>
-              <a:xfrm>
-                <a:off x="3816080" y="4399416"/>
-                <a:ext cx="771420" cy="815479"/>
-              </a:xfrm>
-              <a:prstGeom prst="roundRect">
-                <a:avLst/>
-              </a:prstGeom>
-              <a:noFill/>
-              <a:ln w="19050">
-                <a:solidFill>
-                  <a:schemeClr val="tx1"/>
-                </a:solidFill>
-              </a:ln>
-            </p:spPr>
-            <p:style>
-              <a:lnRef idx="2">
-                <a:schemeClr val="accent1">
-                  <a:shade val="50000"/>
-                </a:schemeClr>
-              </a:lnRef>
-              <a:fillRef idx="1">
-                <a:schemeClr val="accent1"/>
-              </a:fillRef>
-              <a:effectRef idx="0">
-                <a:schemeClr val="accent1"/>
-              </a:effectRef>
-              <a:fontRef idx="minor">
-                <a:schemeClr val="lt1"/>
-              </a:fontRef>
-            </p:style>
-            <p:txBody>
-              <a:bodyPr lIns="45720" tIns="0" bIns="9144" rtlCol="0" anchor="b" anchorCtr="0"/>
-              <a:lstStyle/>
-              <a:p>
-                <a:pPr lvl="0">
-                  <a:defRPr/>
-                </a:pPr>
-                <a:r>
-                  <a:rPr lang="en-US" sz="800" dirty="0">
-                    <a:solidFill>
-                      <a:prstClr val="black"/>
-                    </a:solidFill>
-                  </a:rPr>
-                  <a:t>server-2</a:t>
-                </a:r>
-                <a:endParaRPr kumimoji="0" lang="en-US" sz="800" b="0" i="0" u="none" strike="noStrike" kern="1200" cap="none" spc="0" normalizeH="0" baseline="0" noProof="0" dirty="0">
-                  <a:ln>
-                    <a:noFill/>
-                  </a:ln>
-                  <a:solidFill>
-                    <a:prstClr val="black"/>
-                  </a:solidFill>
-                  <a:effectLst/>
-                  <a:uLnTx/>
-                  <a:uFillTx/>
-                  <a:ea typeface="+mn-ea"/>
-                  <a:cs typeface="+mn-cs"/>
-                </a:endParaRPr>
-              </a:p>
-            </p:txBody>
-          </p:sp>
-          <p:sp>
-            <p:nvSpPr>
-              <p:cNvPr id="21" name="Arrow: Chevron 20">
-                <a:extLst>
-                  <a:ext uri="{FF2B5EF4-FFF2-40B4-BE49-F238E27FC236}">
-                    <a16:creationId xmlns:a16="http://schemas.microsoft.com/office/drawing/2014/main" id="{C60B1716-C9A4-F253-E974-95F1F394129E}"/>
-                  </a:ext>
-                </a:extLst>
-              </p:cNvPr>
-              <p:cNvSpPr/>
-              <p:nvPr/>
-            </p:nvSpPr>
-            <p:spPr>
-              <a:xfrm rot="5400000">
-                <a:off x="4026243" y="4166150"/>
-                <a:ext cx="351106" cy="466531"/>
-              </a:xfrm>
-              <a:prstGeom prst="chevron">
-                <a:avLst>
-                  <a:gd name="adj" fmla="val 14000"/>
-                </a:avLst>
-              </a:prstGeom>
-              <a:solidFill>
-                <a:schemeClr val="bg1"/>
-              </a:solidFill>
-              <a:ln w="12700">
-                <a:solidFill>
-                  <a:schemeClr val="tx1"/>
-                </a:solidFill>
-              </a:ln>
-            </p:spPr>
-            <p:style>
-              <a:lnRef idx="2">
-                <a:schemeClr val="accent1">
-                  <a:shade val="50000"/>
-                </a:schemeClr>
-              </a:lnRef>
-              <a:fillRef idx="1">
-                <a:schemeClr val="accent1"/>
-              </a:fillRef>
-              <a:effectRef idx="0">
-                <a:schemeClr val="accent1"/>
-              </a:effectRef>
-              <a:fontRef idx="minor">
-                <a:schemeClr val="lt1"/>
-              </a:fontRef>
-            </p:style>
-            <p:txBody>
-              <a:bodyPr tIns="0" rtlCol="0" anchor="t" anchorCtr="0"/>
-              <a:lstStyle/>
-              <a:p>
-                <a:pPr marL="0" marR="0" lvl="0" indent="0" algn="l" defTabSz="914400" rtl="0" eaLnBrk="1" fontAlgn="auto" latinLnBrk="0" hangingPunct="1">
-                  <a:lnSpc>
-                    <a:spcPct val="100000"/>
-                  </a:lnSpc>
-                  <a:spcBef>
-                    <a:spcPts val="0"/>
-                  </a:spcBef>
-                  <a:spcAft>
-                    <a:spcPts val="0"/>
-                  </a:spcAft>
-                  <a:buClrTx/>
-                  <a:buSzTx/>
-                  <a:buFontTx/>
-                  <a:buNone/>
-                  <a:tabLst/>
-                  <a:defRPr/>
-                </a:pPr>
-                <a:endParaRPr kumimoji="0" lang="en-US" sz="1000" b="0" i="0" u="none" strike="noStrike" kern="1200" cap="none" spc="0" normalizeH="0" baseline="0" noProof="0">
-                  <a:ln>
-                    <a:noFill/>
-                  </a:ln>
-                  <a:solidFill>
-                    <a:prstClr val="black"/>
-                  </a:solidFill>
-                  <a:effectLst/>
-                  <a:uLnTx/>
-                  <a:uFillTx/>
-                  <a:ea typeface="+mn-ea"/>
-                  <a:cs typeface="+mn-cs"/>
-                </a:endParaRPr>
-              </a:p>
-            </p:txBody>
-          </p:sp>
-          <p:sp>
-            <p:nvSpPr>
-              <p:cNvPr id="22" name="TextBox 21">
-                <a:extLst>
-                  <a:ext uri="{FF2B5EF4-FFF2-40B4-BE49-F238E27FC236}">
-                    <a16:creationId xmlns:a16="http://schemas.microsoft.com/office/drawing/2014/main" id="{F268AEC8-6C38-0232-0F56-5A4E5946BD1B}"/>
-                  </a:ext>
-                </a:extLst>
-              </p:cNvPr>
-              <p:cNvSpPr txBox="1"/>
-              <p:nvPr/>
-            </p:nvSpPr>
-            <p:spPr>
-              <a:xfrm>
-                <a:off x="3995650" y="4276305"/>
-                <a:ext cx="412292" cy="230832"/>
-              </a:xfrm>
-              <a:prstGeom prst="rect">
-                <a:avLst/>
-              </a:prstGeom>
-              <a:noFill/>
-            </p:spPr>
-            <p:txBody>
-              <a:bodyPr wrap="square" rtlCol="0">
-                <a:spAutoFit/>
-              </a:bodyPr>
-              <a:lstStyle/>
-              <a:p>
-                <a:pPr marL="0" marR="0" lvl="0" indent="0" algn="l" defTabSz="914400" rtl="0" eaLnBrk="1" fontAlgn="auto" latinLnBrk="0" hangingPunct="1">
-                  <a:lnSpc>
-                    <a:spcPct val="100000"/>
-                  </a:lnSpc>
-                  <a:spcBef>
-                    <a:spcPts val="0"/>
-                  </a:spcBef>
-                  <a:spcAft>
-                    <a:spcPts val="0"/>
-                  </a:spcAft>
-                  <a:buClrTx/>
-                  <a:buSzTx/>
-                  <a:buFontTx/>
-                  <a:buNone/>
-                  <a:tabLst/>
-                  <a:defRPr/>
-                </a:pPr>
-                <a:r>
-                  <a:rPr kumimoji="0" lang="en-US" sz="900" b="0" i="0" u="none" strike="noStrike" kern="1200" cap="none" spc="0" normalizeH="0" baseline="0" noProof="0" dirty="0">
-                    <a:ln>
-                      <a:noFill/>
-                    </a:ln>
-                    <a:solidFill>
-                      <a:prstClr val="black"/>
-                    </a:solidFill>
-                    <a:effectLst/>
-                    <a:uLnTx/>
-                    <a:uFillTx/>
-                    <a:ea typeface="+mn-ea"/>
-                    <a:cs typeface="+mn-cs"/>
-                  </a:rPr>
-                  <a:t>host</a:t>
-                </a:r>
-              </a:p>
-            </p:txBody>
-          </p:sp>
-        </p:grpSp>
-        <p:grpSp>
-          <p:nvGrpSpPr>
-            <p:cNvPr id="3" name="Group 2">
-              <a:extLst>
-                <a:ext uri="{FF2B5EF4-FFF2-40B4-BE49-F238E27FC236}">
-                  <a16:creationId xmlns:a16="http://schemas.microsoft.com/office/drawing/2014/main" id="{3A99F461-7629-9323-0DE9-021B01CABE83}"/>
-                </a:ext>
-              </a:extLst>
-            </p:cNvPr>
-            <p:cNvGrpSpPr/>
-            <p:nvPr/>
-          </p:nvGrpSpPr>
-          <p:grpSpPr>
-            <a:xfrm>
-              <a:off x="4476934" y="3622050"/>
-              <a:ext cx="771421" cy="991032"/>
-              <a:chOff x="3816079" y="4223863"/>
-              <a:chExt cx="771421" cy="991032"/>
-            </a:xfrm>
-          </p:grpSpPr>
-          <p:sp>
-            <p:nvSpPr>
-              <p:cNvPr id="4" name="Rectangle 3">
-                <a:extLst>
-                  <a:ext uri="{FF2B5EF4-FFF2-40B4-BE49-F238E27FC236}">
-                    <a16:creationId xmlns:a16="http://schemas.microsoft.com/office/drawing/2014/main" id="{3F6342D2-2BD2-3F2F-12EC-A146021CED14}"/>
-                  </a:ext>
-                </a:extLst>
-              </p:cNvPr>
-              <p:cNvSpPr/>
-              <p:nvPr/>
-            </p:nvSpPr>
-            <p:spPr>
-              <a:xfrm>
-                <a:off x="3816079" y="4722603"/>
-                <a:ext cx="771421" cy="250978"/>
-              </a:xfrm>
-              <a:prstGeom prst="rect">
-                <a:avLst/>
-              </a:prstGeom>
-              <a:solidFill>
-                <a:schemeClr val="bg1">
-                  <a:lumMod val="95000"/>
-                </a:schemeClr>
-              </a:solidFill>
-              <a:ln w="19050">
-                <a:solidFill>
-                  <a:schemeClr val="bg2"/>
-                </a:solidFill>
-              </a:ln>
-            </p:spPr>
-            <p:style>
-              <a:lnRef idx="2">
-                <a:schemeClr val="accent1">
-                  <a:shade val="50000"/>
-                </a:schemeClr>
-              </a:lnRef>
-              <a:fillRef idx="1">
-                <a:schemeClr val="accent1"/>
-              </a:fillRef>
-              <a:effectRef idx="0">
-                <a:schemeClr val="accent1"/>
-              </a:effectRef>
-              <a:fontRef idx="minor">
-                <a:schemeClr val="lt1"/>
-              </a:fontRef>
-            </p:style>
-            <p:txBody>
-              <a:bodyPr lIns="0" rIns="0" rtlCol="0" anchor="ctr"/>
-              <a:lstStyle/>
-              <a:p>
-                <a:pPr marL="0" marR="0" lvl="0" indent="0" algn="ctr" defTabSz="914400" rtl="0" eaLnBrk="1" fontAlgn="auto" latinLnBrk="0" hangingPunct="1">
-                  <a:lnSpc>
-                    <a:spcPct val="100000"/>
-                  </a:lnSpc>
-                  <a:spcBef>
-                    <a:spcPts val="0"/>
-                  </a:spcBef>
-                  <a:spcAft>
-                    <a:spcPts val="0"/>
-                  </a:spcAft>
-                  <a:buClrTx/>
-                  <a:buSzTx/>
-                  <a:buFontTx/>
-                  <a:buNone/>
-                  <a:tabLst/>
-                  <a:defRPr/>
-                </a:pPr>
-                <a:r>
-                  <a:rPr kumimoji="0" lang="en-US" sz="900" b="0" i="0" u="none" strike="noStrike" kern="1200" cap="none" spc="0" normalizeH="0" baseline="0" noProof="0" dirty="0">
-                    <a:ln>
-                      <a:noFill/>
-                    </a:ln>
-                    <a:solidFill>
-                      <a:prstClr val="black"/>
-                    </a:solidFill>
-                    <a:effectLst/>
-                    <a:uLnTx/>
-                    <a:uFillTx/>
-                    <a:ea typeface="+mn-ea"/>
-                    <a:cs typeface="+mn-cs"/>
-                  </a:rPr>
-                  <a:t>Compute</a:t>
-                </a:r>
-              </a:p>
-              <a:p>
-                <a:pPr marL="0" marR="0" lvl="0" indent="0" algn="ctr" defTabSz="914400" rtl="0" eaLnBrk="1" fontAlgn="auto" latinLnBrk="0" hangingPunct="1">
-                  <a:lnSpc>
-                    <a:spcPct val="100000"/>
-                  </a:lnSpc>
-                  <a:spcBef>
-                    <a:spcPts val="0"/>
-                  </a:spcBef>
-                  <a:spcAft>
-                    <a:spcPts val="0"/>
-                  </a:spcAft>
-                  <a:buClrTx/>
-                  <a:buSzTx/>
-                  <a:buFontTx/>
-                  <a:buNone/>
-                  <a:tabLst/>
-                  <a:defRPr/>
-                </a:pPr>
-                <a:r>
-                  <a:rPr kumimoji="0" lang="en-US" sz="900" b="0" i="0" u="none" strike="noStrike" kern="1200" cap="none" spc="0" normalizeH="0" baseline="0" noProof="0" dirty="0">
-                    <a:ln>
-                      <a:noFill/>
-                    </a:ln>
-                    <a:solidFill>
-                      <a:prstClr val="black"/>
-                    </a:solidFill>
-                    <a:effectLst/>
-                    <a:uLnTx/>
-                    <a:uFillTx/>
-                    <a:ea typeface="+mn-ea"/>
-                    <a:cs typeface="+mn-cs"/>
-                  </a:rPr>
-                  <a:t>Platform</a:t>
-                </a:r>
-              </a:p>
-            </p:txBody>
-          </p:sp>
-          <p:sp>
-            <p:nvSpPr>
-              <p:cNvPr id="5" name="Rectangle: Rounded Corners 4">
-                <a:extLst>
-                  <a:ext uri="{FF2B5EF4-FFF2-40B4-BE49-F238E27FC236}">
-                    <a16:creationId xmlns:a16="http://schemas.microsoft.com/office/drawing/2014/main" id="{C2B03128-B2AD-BACE-B928-B415473EEF22}"/>
-                  </a:ext>
-                </a:extLst>
-              </p:cNvPr>
-              <p:cNvSpPr/>
-              <p:nvPr/>
-            </p:nvSpPr>
-            <p:spPr>
-              <a:xfrm>
-                <a:off x="3816080" y="4399416"/>
-                <a:ext cx="771420" cy="815479"/>
-              </a:xfrm>
-              <a:prstGeom prst="roundRect">
-                <a:avLst/>
-              </a:prstGeom>
-              <a:noFill/>
-              <a:ln w="19050">
-                <a:solidFill>
-                  <a:schemeClr val="tx1"/>
-                </a:solidFill>
-              </a:ln>
-            </p:spPr>
-            <p:style>
-              <a:lnRef idx="2">
-                <a:schemeClr val="accent1">
-                  <a:shade val="50000"/>
-                </a:schemeClr>
-              </a:lnRef>
-              <a:fillRef idx="1">
-                <a:schemeClr val="accent1"/>
-              </a:fillRef>
-              <a:effectRef idx="0">
-                <a:schemeClr val="accent1"/>
-              </a:effectRef>
-              <a:fontRef idx="minor">
-                <a:schemeClr val="lt1"/>
-              </a:fontRef>
-            </p:style>
-            <p:txBody>
-              <a:bodyPr lIns="45720" tIns="0" bIns="9144" rtlCol="0" anchor="b" anchorCtr="0"/>
-              <a:lstStyle/>
-              <a:p>
-                <a:pPr lvl="0">
-                  <a:defRPr/>
-                </a:pPr>
-                <a:r>
-                  <a:rPr lang="en-US" sz="800" dirty="0">
-                    <a:solidFill>
-                      <a:prstClr val="black"/>
-                    </a:solidFill>
-                  </a:rPr>
-                  <a:t>server-1</a:t>
-                </a:r>
-                <a:endParaRPr kumimoji="0" lang="en-US" sz="800" b="0" i="0" u="none" strike="noStrike" kern="1200" cap="none" spc="0" normalizeH="0" baseline="0" noProof="0" dirty="0">
-                  <a:ln>
-                    <a:noFill/>
-                  </a:ln>
-                  <a:solidFill>
-                    <a:prstClr val="black"/>
-                  </a:solidFill>
-                  <a:effectLst/>
-                  <a:uLnTx/>
-                  <a:uFillTx/>
-                  <a:ea typeface="+mn-ea"/>
-                  <a:cs typeface="+mn-cs"/>
-                </a:endParaRPr>
-              </a:p>
-            </p:txBody>
-          </p:sp>
-          <p:sp>
-            <p:nvSpPr>
-              <p:cNvPr id="7" name="Arrow: Chevron 6">
-                <a:extLst>
-                  <a:ext uri="{FF2B5EF4-FFF2-40B4-BE49-F238E27FC236}">
-                    <a16:creationId xmlns:a16="http://schemas.microsoft.com/office/drawing/2014/main" id="{D68E7360-61B8-BE90-9A3F-11434C632E45}"/>
-                  </a:ext>
-                </a:extLst>
-              </p:cNvPr>
-              <p:cNvSpPr/>
-              <p:nvPr/>
-            </p:nvSpPr>
-            <p:spPr>
-              <a:xfrm rot="5400000">
-                <a:off x="4026243" y="4166150"/>
-                <a:ext cx="351106" cy="466531"/>
-              </a:xfrm>
-              <a:prstGeom prst="chevron">
-                <a:avLst>
-                  <a:gd name="adj" fmla="val 14000"/>
-                </a:avLst>
-              </a:prstGeom>
-              <a:solidFill>
-                <a:schemeClr val="bg1"/>
-              </a:solidFill>
-              <a:ln w="12700">
-                <a:solidFill>
-                  <a:schemeClr val="tx1"/>
-                </a:solidFill>
-              </a:ln>
-            </p:spPr>
-            <p:style>
-              <a:lnRef idx="2">
-                <a:schemeClr val="accent1">
-                  <a:shade val="50000"/>
-                </a:schemeClr>
-              </a:lnRef>
-              <a:fillRef idx="1">
-                <a:schemeClr val="accent1"/>
-              </a:fillRef>
-              <a:effectRef idx="0">
-                <a:schemeClr val="accent1"/>
-              </a:effectRef>
-              <a:fontRef idx="minor">
-                <a:schemeClr val="lt1"/>
-              </a:fontRef>
-            </p:style>
-            <p:txBody>
-              <a:bodyPr tIns="0" rtlCol="0" anchor="t" anchorCtr="0"/>
-              <a:lstStyle/>
-              <a:p>
-                <a:pPr marL="0" marR="0" lvl="0" indent="0" algn="l" defTabSz="914400" rtl="0" eaLnBrk="1" fontAlgn="auto" latinLnBrk="0" hangingPunct="1">
-                  <a:lnSpc>
-                    <a:spcPct val="100000"/>
-                  </a:lnSpc>
-                  <a:spcBef>
-                    <a:spcPts val="0"/>
-                  </a:spcBef>
-                  <a:spcAft>
-                    <a:spcPts val="0"/>
-                  </a:spcAft>
-                  <a:buClrTx/>
-                  <a:buSzTx/>
-                  <a:buFontTx/>
-                  <a:buNone/>
-                  <a:tabLst/>
-                  <a:defRPr/>
-                </a:pPr>
-                <a:endParaRPr kumimoji="0" lang="en-US" sz="1000" b="0" i="0" u="none" strike="noStrike" kern="1200" cap="none" spc="0" normalizeH="0" baseline="0" noProof="0">
-                  <a:ln>
-                    <a:noFill/>
-                  </a:ln>
-                  <a:solidFill>
-                    <a:prstClr val="black"/>
-                  </a:solidFill>
-                  <a:effectLst/>
-                  <a:uLnTx/>
-                  <a:uFillTx/>
-                  <a:ea typeface="+mn-ea"/>
-                  <a:cs typeface="+mn-cs"/>
-                </a:endParaRPr>
-              </a:p>
-            </p:txBody>
-          </p:sp>
-          <p:sp>
-            <p:nvSpPr>
-              <p:cNvPr id="8" name="TextBox 7">
-                <a:extLst>
-                  <a:ext uri="{FF2B5EF4-FFF2-40B4-BE49-F238E27FC236}">
-                    <a16:creationId xmlns:a16="http://schemas.microsoft.com/office/drawing/2014/main" id="{E486CB13-0C54-5DB4-1664-F45F6DBBDDAF}"/>
-                  </a:ext>
-                </a:extLst>
-              </p:cNvPr>
-              <p:cNvSpPr txBox="1"/>
-              <p:nvPr/>
-            </p:nvSpPr>
-            <p:spPr>
-              <a:xfrm>
-                <a:off x="3995650" y="4276305"/>
-                <a:ext cx="412292" cy="230832"/>
-              </a:xfrm>
-              <a:prstGeom prst="rect">
-                <a:avLst/>
-              </a:prstGeom>
-              <a:noFill/>
-            </p:spPr>
-            <p:txBody>
-              <a:bodyPr wrap="square" rtlCol="0">
-                <a:spAutoFit/>
-              </a:bodyPr>
-              <a:lstStyle/>
-              <a:p>
-                <a:pPr marL="0" marR="0" lvl="0" indent="0" algn="l" defTabSz="914400" rtl="0" eaLnBrk="1" fontAlgn="auto" latinLnBrk="0" hangingPunct="1">
-                  <a:lnSpc>
-                    <a:spcPct val="100000"/>
-                  </a:lnSpc>
-                  <a:spcBef>
-                    <a:spcPts val="0"/>
-                  </a:spcBef>
-                  <a:spcAft>
-                    <a:spcPts val="0"/>
-                  </a:spcAft>
-                  <a:buClrTx/>
-                  <a:buSzTx/>
-                  <a:buFontTx/>
-                  <a:buNone/>
-                  <a:tabLst/>
-                  <a:defRPr/>
-                </a:pPr>
-                <a:r>
-                  <a:rPr kumimoji="0" lang="en-US" sz="900" b="0" i="0" u="none" strike="noStrike" kern="1200" cap="none" spc="0" normalizeH="0" baseline="0" noProof="0" dirty="0">
-                    <a:ln>
-                      <a:noFill/>
-                    </a:ln>
-                    <a:solidFill>
-                      <a:prstClr val="black"/>
-                    </a:solidFill>
-                    <a:effectLst/>
-                    <a:uLnTx/>
-                    <a:uFillTx/>
-                    <a:ea typeface="+mn-ea"/>
-                    <a:cs typeface="+mn-cs"/>
-                  </a:rPr>
-                  <a:t>host</a:t>
-                </a:r>
-              </a:p>
-            </p:txBody>
-          </p:sp>
-        </p:grpSp>
-        <p:grpSp>
-          <p:nvGrpSpPr>
-            <p:cNvPr id="9" name="Group 8">
-              <a:extLst>
-                <a:ext uri="{FF2B5EF4-FFF2-40B4-BE49-F238E27FC236}">
-                  <a16:creationId xmlns:a16="http://schemas.microsoft.com/office/drawing/2014/main" id="{38983788-9062-D8A3-6D54-EADBC6687F98}"/>
-                </a:ext>
-              </a:extLst>
-            </p:cNvPr>
-            <p:cNvGrpSpPr/>
-            <p:nvPr/>
-          </p:nvGrpSpPr>
-          <p:grpSpPr>
-            <a:xfrm>
-              <a:off x="7048362" y="3622050"/>
-              <a:ext cx="771421" cy="991032"/>
-              <a:chOff x="3816079" y="4223863"/>
-              <a:chExt cx="771421" cy="991032"/>
-            </a:xfrm>
-          </p:grpSpPr>
-          <p:sp>
-            <p:nvSpPr>
-              <p:cNvPr id="10" name="Rectangle 9">
-                <a:extLst>
-                  <a:ext uri="{FF2B5EF4-FFF2-40B4-BE49-F238E27FC236}">
-                    <a16:creationId xmlns:a16="http://schemas.microsoft.com/office/drawing/2014/main" id="{5F76869A-41B1-B995-EFA4-2EE7542BA307}"/>
-                  </a:ext>
-                </a:extLst>
-              </p:cNvPr>
-              <p:cNvSpPr/>
-              <p:nvPr/>
-            </p:nvSpPr>
-            <p:spPr>
-              <a:xfrm>
-                <a:off x="3816079" y="4722603"/>
-                <a:ext cx="771421" cy="250978"/>
-              </a:xfrm>
-              <a:prstGeom prst="rect">
-                <a:avLst/>
-              </a:prstGeom>
-              <a:solidFill>
-                <a:schemeClr val="bg1">
-                  <a:lumMod val="95000"/>
-                </a:schemeClr>
-              </a:solidFill>
-              <a:ln w="19050">
-                <a:solidFill>
-                  <a:schemeClr val="bg2"/>
-                </a:solidFill>
-              </a:ln>
-            </p:spPr>
-            <p:style>
-              <a:lnRef idx="2">
-                <a:schemeClr val="accent1">
-                  <a:shade val="50000"/>
-                </a:schemeClr>
-              </a:lnRef>
-              <a:fillRef idx="1">
-                <a:schemeClr val="accent1"/>
-              </a:fillRef>
-              <a:effectRef idx="0">
-                <a:schemeClr val="accent1"/>
-              </a:effectRef>
-              <a:fontRef idx="minor">
-                <a:schemeClr val="lt1"/>
-              </a:fontRef>
-            </p:style>
-            <p:txBody>
-              <a:bodyPr lIns="0" rIns="0" rtlCol="0" anchor="ctr"/>
-              <a:lstStyle/>
-              <a:p>
-                <a:pPr marL="0" marR="0" lvl="0" indent="0" algn="ctr" defTabSz="914400" rtl="0" eaLnBrk="1" fontAlgn="auto" latinLnBrk="0" hangingPunct="1">
-                  <a:lnSpc>
-                    <a:spcPct val="100000"/>
-                  </a:lnSpc>
-                  <a:spcBef>
-                    <a:spcPts val="0"/>
-                  </a:spcBef>
-                  <a:spcAft>
-                    <a:spcPts val="0"/>
-                  </a:spcAft>
-                  <a:buClrTx/>
-                  <a:buSzTx/>
-                  <a:buFontTx/>
-                  <a:buNone/>
-                  <a:tabLst/>
-                  <a:defRPr/>
-                </a:pPr>
-                <a:r>
-                  <a:rPr kumimoji="0" lang="en-US" sz="900" b="0" i="0" u="none" strike="noStrike" kern="1200" cap="none" spc="0" normalizeH="0" baseline="0" noProof="0" dirty="0">
-                    <a:ln>
-                      <a:noFill/>
-                    </a:ln>
-                    <a:solidFill>
-                      <a:prstClr val="black"/>
-                    </a:solidFill>
-                    <a:effectLst/>
-                    <a:uLnTx/>
-                    <a:uFillTx/>
-                    <a:ea typeface="+mn-ea"/>
-                    <a:cs typeface="+mn-cs"/>
-                  </a:rPr>
-                  <a:t>Compute</a:t>
-                </a:r>
-              </a:p>
-              <a:p>
-                <a:pPr marL="0" marR="0" lvl="0" indent="0" algn="ctr" defTabSz="914400" rtl="0" eaLnBrk="1" fontAlgn="auto" latinLnBrk="0" hangingPunct="1">
-                  <a:lnSpc>
-                    <a:spcPct val="100000"/>
-                  </a:lnSpc>
-                  <a:spcBef>
-                    <a:spcPts val="0"/>
-                  </a:spcBef>
-                  <a:spcAft>
-                    <a:spcPts val="0"/>
-                  </a:spcAft>
-                  <a:buClrTx/>
-                  <a:buSzTx/>
-                  <a:buFontTx/>
-                  <a:buNone/>
-                  <a:tabLst/>
-                  <a:defRPr/>
-                </a:pPr>
-                <a:r>
-                  <a:rPr kumimoji="0" lang="en-US" sz="900" b="0" i="0" u="none" strike="noStrike" kern="1200" cap="none" spc="0" normalizeH="0" baseline="0" noProof="0" dirty="0">
-                    <a:ln>
-                      <a:noFill/>
-                    </a:ln>
-                    <a:solidFill>
-                      <a:prstClr val="black"/>
-                    </a:solidFill>
-                    <a:effectLst/>
-                    <a:uLnTx/>
-                    <a:uFillTx/>
-                    <a:ea typeface="+mn-ea"/>
-                    <a:cs typeface="+mn-cs"/>
-                  </a:rPr>
-                  <a:t>Platform</a:t>
-                </a:r>
-              </a:p>
-            </p:txBody>
-          </p:sp>
-          <p:sp>
-            <p:nvSpPr>
-              <p:cNvPr id="11" name="Rectangle: Rounded Corners 10">
-                <a:extLst>
-                  <a:ext uri="{FF2B5EF4-FFF2-40B4-BE49-F238E27FC236}">
-                    <a16:creationId xmlns:a16="http://schemas.microsoft.com/office/drawing/2014/main" id="{50C4CF9E-9098-7414-E53A-3622FDF1F2C1}"/>
-                  </a:ext>
-                </a:extLst>
-              </p:cNvPr>
-              <p:cNvSpPr/>
-              <p:nvPr/>
-            </p:nvSpPr>
-            <p:spPr>
-              <a:xfrm>
-                <a:off x="3816080" y="4399416"/>
-                <a:ext cx="771420" cy="815479"/>
-              </a:xfrm>
-              <a:prstGeom prst="roundRect">
-                <a:avLst/>
-              </a:prstGeom>
-              <a:noFill/>
-              <a:ln w="19050">
-                <a:solidFill>
-                  <a:schemeClr val="tx1"/>
-                </a:solidFill>
-              </a:ln>
-            </p:spPr>
-            <p:style>
-              <a:lnRef idx="2">
-                <a:schemeClr val="accent1">
-                  <a:shade val="50000"/>
-                </a:schemeClr>
-              </a:lnRef>
-              <a:fillRef idx="1">
-                <a:schemeClr val="accent1"/>
-              </a:fillRef>
-              <a:effectRef idx="0">
-                <a:schemeClr val="accent1"/>
-              </a:effectRef>
-              <a:fontRef idx="minor">
-                <a:schemeClr val="lt1"/>
-              </a:fontRef>
-            </p:style>
-            <p:txBody>
-              <a:bodyPr lIns="45720" tIns="0" bIns="9144" rtlCol="0" anchor="b" anchorCtr="0"/>
-              <a:lstStyle/>
-              <a:p>
-                <a:pPr lvl="0">
-                  <a:defRPr/>
-                </a:pPr>
-                <a:r>
-                  <a:rPr lang="en-US" sz="800" dirty="0">
-                    <a:solidFill>
-                      <a:prstClr val="black"/>
-                    </a:solidFill>
-                  </a:rPr>
-                  <a:t>server-3</a:t>
-                </a:r>
-                <a:endParaRPr kumimoji="0" lang="en-US" sz="800" b="0" i="0" u="none" strike="noStrike" kern="1200" cap="none" spc="0" normalizeH="0" baseline="0" noProof="0" dirty="0">
-                  <a:ln>
-                    <a:noFill/>
-                  </a:ln>
-                  <a:solidFill>
-                    <a:prstClr val="black"/>
-                  </a:solidFill>
-                  <a:effectLst/>
-                  <a:uLnTx/>
-                  <a:uFillTx/>
-                  <a:ea typeface="+mn-ea"/>
-                  <a:cs typeface="+mn-cs"/>
-                </a:endParaRPr>
-              </a:p>
-            </p:txBody>
-          </p:sp>
-          <p:sp>
-            <p:nvSpPr>
-              <p:cNvPr id="12" name="Arrow: Chevron 11">
-                <a:extLst>
-                  <a:ext uri="{FF2B5EF4-FFF2-40B4-BE49-F238E27FC236}">
-                    <a16:creationId xmlns:a16="http://schemas.microsoft.com/office/drawing/2014/main" id="{C6A56CA5-FF15-FDAB-A65C-821691A8EA13}"/>
-                  </a:ext>
-                </a:extLst>
-              </p:cNvPr>
-              <p:cNvSpPr/>
-              <p:nvPr/>
-            </p:nvSpPr>
-            <p:spPr>
-              <a:xfrm rot="5400000">
-                <a:off x="4026243" y="4166150"/>
-                <a:ext cx="351106" cy="466531"/>
-              </a:xfrm>
-              <a:prstGeom prst="chevron">
-                <a:avLst>
-                  <a:gd name="adj" fmla="val 14000"/>
-                </a:avLst>
-              </a:prstGeom>
-              <a:solidFill>
-                <a:schemeClr val="bg1"/>
-              </a:solidFill>
-              <a:ln w="12700">
-                <a:solidFill>
-                  <a:schemeClr val="tx1"/>
-                </a:solidFill>
-              </a:ln>
-            </p:spPr>
-            <p:style>
-              <a:lnRef idx="2">
-                <a:schemeClr val="accent1">
-                  <a:shade val="50000"/>
-                </a:schemeClr>
-              </a:lnRef>
-              <a:fillRef idx="1">
-                <a:schemeClr val="accent1"/>
-              </a:fillRef>
-              <a:effectRef idx="0">
-                <a:schemeClr val="accent1"/>
-              </a:effectRef>
-              <a:fontRef idx="minor">
-                <a:schemeClr val="lt1"/>
-              </a:fontRef>
-            </p:style>
-            <p:txBody>
-              <a:bodyPr tIns="0" rtlCol="0" anchor="t" anchorCtr="0"/>
-              <a:lstStyle/>
-              <a:p>
-                <a:pPr marL="0" marR="0" lvl="0" indent="0" algn="l" defTabSz="914400" rtl="0" eaLnBrk="1" fontAlgn="auto" latinLnBrk="0" hangingPunct="1">
-                  <a:lnSpc>
-                    <a:spcPct val="100000"/>
-                  </a:lnSpc>
-                  <a:spcBef>
-                    <a:spcPts val="0"/>
-                  </a:spcBef>
-                  <a:spcAft>
-                    <a:spcPts val="0"/>
-                  </a:spcAft>
-                  <a:buClrTx/>
-                  <a:buSzTx/>
-                  <a:buFontTx/>
-                  <a:buNone/>
-                  <a:tabLst/>
-                  <a:defRPr/>
-                </a:pPr>
-                <a:endParaRPr kumimoji="0" lang="en-US" sz="1000" b="0" i="0" u="none" strike="noStrike" kern="1200" cap="none" spc="0" normalizeH="0" baseline="0" noProof="0">
-                  <a:ln>
-                    <a:noFill/>
-                  </a:ln>
-                  <a:solidFill>
-                    <a:prstClr val="black"/>
-                  </a:solidFill>
-                  <a:effectLst/>
-                  <a:uLnTx/>
-                  <a:uFillTx/>
-                  <a:ea typeface="+mn-ea"/>
-                  <a:cs typeface="+mn-cs"/>
-                </a:endParaRPr>
-              </a:p>
-            </p:txBody>
-          </p:sp>
-          <p:sp>
-            <p:nvSpPr>
-              <p:cNvPr id="13" name="TextBox 12">
-                <a:extLst>
-                  <a:ext uri="{FF2B5EF4-FFF2-40B4-BE49-F238E27FC236}">
-                    <a16:creationId xmlns:a16="http://schemas.microsoft.com/office/drawing/2014/main" id="{19BA00EF-8EEE-B0E7-013E-E70BE9F3FCFF}"/>
-                  </a:ext>
-                </a:extLst>
-              </p:cNvPr>
-              <p:cNvSpPr txBox="1"/>
-              <p:nvPr/>
-            </p:nvSpPr>
-            <p:spPr>
-              <a:xfrm>
-                <a:off x="3995650" y="4276305"/>
-                <a:ext cx="412292" cy="230832"/>
-              </a:xfrm>
-              <a:prstGeom prst="rect">
-                <a:avLst/>
-              </a:prstGeom>
-              <a:noFill/>
-            </p:spPr>
-            <p:txBody>
-              <a:bodyPr wrap="square" rtlCol="0">
-                <a:spAutoFit/>
-              </a:bodyPr>
-              <a:lstStyle/>
-              <a:p>
-                <a:pPr marL="0" marR="0" lvl="0" indent="0" algn="l" defTabSz="914400" rtl="0" eaLnBrk="1" fontAlgn="auto" latinLnBrk="0" hangingPunct="1">
-                  <a:lnSpc>
-                    <a:spcPct val="100000"/>
-                  </a:lnSpc>
-                  <a:spcBef>
-                    <a:spcPts val="0"/>
-                  </a:spcBef>
-                  <a:spcAft>
-                    <a:spcPts val="0"/>
-                  </a:spcAft>
-                  <a:buClrTx/>
-                  <a:buSzTx/>
-                  <a:buFontTx/>
-                  <a:buNone/>
-                  <a:tabLst/>
-                  <a:defRPr/>
-                </a:pPr>
-                <a:r>
-                  <a:rPr kumimoji="0" lang="en-US" sz="900" b="0" i="0" u="none" strike="noStrike" kern="1200" cap="none" spc="0" normalizeH="0" baseline="0" noProof="0" dirty="0">
-                    <a:ln>
-                      <a:noFill/>
-                    </a:ln>
-                    <a:solidFill>
-                      <a:prstClr val="black"/>
-                    </a:solidFill>
-                    <a:effectLst/>
-                    <a:uLnTx/>
-                    <a:uFillTx/>
-                    <a:ea typeface="+mn-ea"/>
-                    <a:cs typeface="+mn-cs"/>
-                  </a:rPr>
-                  <a:t>host</a:t>
-                </a:r>
-              </a:p>
-            </p:txBody>
-          </p:sp>
-        </p:grpSp>
-      </p:grpSp>
-      <p:cxnSp>
-        <p:nvCxnSpPr>
-          <p:cNvPr id="15" name="Straight Arrow Connector 14">
-            <a:extLst>
-              <a:ext uri="{FF2B5EF4-FFF2-40B4-BE49-F238E27FC236}">
-                <a16:creationId xmlns:a16="http://schemas.microsoft.com/office/drawing/2014/main" id="{9CE2AA60-048F-9707-B8D4-AC1533057B60}"/>
-              </a:ext>
-            </a:extLst>
-          </p:cNvPr>
-          <p:cNvCxnSpPr>
-            <a:cxnSpLocks/>
-            <a:stCxn id="7" idx="1"/>
-            <a:endCxn id="36" idx="2"/>
-          </p:cNvCxnSpPr>
-          <p:nvPr/>
-        </p:nvCxnSpPr>
-        <p:spPr>
-          <a:xfrm flipV="1">
-            <a:off x="4862651" y="3422088"/>
-            <a:ext cx="1285708" cy="249117"/>
-          </a:xfrm>
-          <a:prstGeom prst="straightConnector1">
-            <a:avLst/>
-          </a:prstGeom>
-          <a:ln w="12700">
-            <a:solidFill>
-              <a:schemeClr val="tx1"/>
-            </a:solidFill>
-            <a:headEnd type="triangle" w="med" len="med"/>
-            <a:tailEnd type="none" w="med" len="med"/>
-          </a:ln>
-        </p:spPr>
-        <p:style>
-          <a:lnRef idx="1">
-            <a:schemeClr val="accent1"/>
-          </a:lnRef>
-          <a:fillRef idx="0">
-            <a:schemeClr val="accent1"/>
-          </a:fillRef>
-          <a:effectRef idx="0">
-            <a:schemeClr val="accent1"/>
-          </a:effectRef>
-          <a:fontRef idx="minor">
-            <a:schemeClr val="tx1"/>
-          </a:fontRef>
-        </p:style>
-      </p:cxnSp>
-      <p:cxnSp>
-        <p:nvCxnSpPr>
-          <p:cNvPr id="25" name="Straight Arrow Connector 24">
-            <a:extLst>
-              <a:ext uri="{FF2B5EF4-FFF2-40B4-BE49-F238E27FC236}">
-                <a16:creationId xmlns:a16="http://schemas.microsoft.com/office/drawing/2014/main" id="{EE661CC2-B4A9-39AC-6DFE-1DFC81B81F03}"/>
-              </a:ext>
-            </a:extLst>
-          </p:cNvPr>
-          <p:cNvCxnSpPr>
-            <a:cxnSpLocks/>
-            <a:stCxn id="12" idx="1"/>
-            <a:endCxn id="36" idx="2"/>
-          </p:cNvCxnSpPr>
-          <p:nvPr/>
-        </p:nvCxnSpPr>
-        <p:spPr>
-          <a:xfrm flipH="1" flipV="1">
-            <a:off x="6148359" y="3422088"/>
-            <a:ext cx="1285720" cy="249117"/>
-          </a:xfrm>
-          <a:prstGeom prst="straightConnector1">
-            <a:avLst/>
-          </a:prstGeom>
-          <a:ln w="12700">
-            <a:solidFill>
-              <a:schemeClr val="tx1"/>
-            </a:solidFill>
-            <a:headEnd type="triangle" w="med" len="med"/>
-            <a:tailEnd type="none" w="med" len="med"/>
-          </a:ln>
-        </p:spPr>
-        <p:style>
-          <a:lnRef idx="1">
-            <a:schemeClr val="accent1"/>
-          </a:lnRef>
-          <a:fillRef idx="0">
-            <a:schemeClr val="accent1"/>
-          </a:fillRef>
-          <a:effectRef idx="0">
-            <a:schemeClr val="accent1"/>
-          </a:effectRef>
-          <a:fontRef idx="minor">
-            <a:schemeClr val="tx1"/>
-          </a:fontRef>
-        </p:style>
-      </p:cxnSp>
-      <p:grpSp>
-        <p:nvGrpSpPr>
-          <p:cNvPr id="147" name="Group 146">
-            <a:extLst>
-              <a:ext uri="{FF2B5EF4-FFF2-40B4-BE49-F238E27FC236}">
-                <a16:creationId xmlns:a16="http://schemas.microsoft.com/office/drawing/2014/main" id="{0375C6D9-01BE-B248-9FB8-0C3F014FEF4F}"/>
-              </a:ext>
-            </a:extLst>
-          </p:cNvPr>
-          <p:cNvGrpSpPr/>
-          <p:nvPr/>
-        </p:nvGrpSpPr>
-        <p:grpSpPr>
-          <a:xfrm>
-            <a:off x="5762648" y="2244919"/>
-            <a:ext cx="771421" cy="1177169"/>
-            <a:chOff x="4115528" y="2620040"/>
-            <a:chExt cx="771421" cy="1177169"/>
-          </a:xfrm>
-        </p:grpSpPr>
-        <p:grpSp>
-          <p:nvGrpSpPr>
-            <p:cNvPr id="146" name="Group 145">
-              <a:extLst>
-                <a:ext uri="{FF2B5EF4-FFF2-40B4-BE49-F238E27FC236}">
-                  <a16:creationId xmlns:a16="http://schemas.microsoft.com/office/drawing/2014/main" id="{21372C5F-6019-6E0C-9508-4E8A358AF2EE}"/>
-                </a:ext>
-              </a:extLst>
-            </p:cNvPr>
-            <p:cNvGrpSpPr/>
-            <p:nvPr/>
-          </p:nvGrpSpPr>
-          <p:grpSpPr>
-            <a:xfrm>
-              <a:off x="4115528" y="2823110"/>
-              <a:ext cx="771421" cy="815478"/>
-              <a:chOff x="4115528" y="2823110"/>
-              <a:chExt cx="771421" cy="815478"/>
-            </a:xfrm>
-          </p:grpSpPr>
-          <p:sp>
-            <p:nvSpPr>
-              <p:cNvPr id="34" name="Rectangle 33">
-                <a:extLst>
-                  <a:ext uri="{FF2B5EF4-FFF2-40B4-BE49-F238E27FC236}">
-                    <a16:creationId xmlns:a16="http://schemas.microsoft.com/office/drawing/2014/main" id="{AC8C008F-40AE-7B56-066D-358A9B134B49}"/>
-                  </a:ext>
-                </a:extLst>
-              </p:cNvPr>
-              <p:cNvSpPr/>
-              <p:nvPr/>
-            </p:nvSpPr>
-            <p:spPr>
-              <a:xfrm>
-                <a:off x="4115528" y="3145212"/>
-                <a:ext cx="771421" cy="279919"/>
-              </a:xfrm>
-              <a:prstGeom prst="rect">
-                <a:avLst/>
-              </a:prstGeom>
-              <a:solidFill>
-                <a:schemeClr val="bg1">
-                  <a:lumMod val="95000"/>
-                </a:schemeClr>
-              </a:solidFill>
-              <a:ln w="19050">
-                <a:solidFill>
-                  <a:schemeClr val="bg2"/>
-                </a:solidFill>
-              </a:ln>
-            </p:spPr>
-            <p:style>
-              <a:lnRef idx="2">
-                <a:schemeClr val="accent1">
-                  <a:shade val="50000"/>
-                </a:schemeClr>
-              </a:lnRef>
-              <a:fillRef idx="1">
-                <a:schemeClr val="accent1"/>
-              </a:fillRef>
-              <a:effectRef idx="0">
-                <a:schemeClr val="accent1"/>
-              </a:effectRef>
-              <a:fontRef idx="minor">
-                <a:schemeClr val="lt1"/>
-              </a:fontRef>
-            </p:style>
-            <p:txBody>
-              <a:bodyPr lIns="0" rIns="0" rtlCol="0" anchor="ctr"/>
-              <a:lstStyle/>
-              <a:p>
-                <a:pPr marL="0" marR="0" lvl="0" indent="0" algn="ctr" defTabSz="914400" rtl="0" eaLnBrk="1" fontAlgn="auto" latinLnBrk="0" hangingPunct="1">
-                  <a:lnSpc>
-                    <a:spcPct val="100000"/>
-                  </a:lnSpc>
-                  <a:spcBef>
-                    <a:spcPts val="0"/>
-                  </a:spcBef>
-                  <a:spcAft>
-                    <a:spcPts val="0"/>
-                  </a:spcAft>
-                  <a:buClrTx/>
-                  <a:buSzTx/>
-                  <a:buFontTx/>
-                  <a:buNone/>
-                  <a:tabLst/>
-                  <a:defRPr/>
-                </a:pPr>
-                <a:r>
-                  <a:rPr kumimoji="0" lang="en-US" sz="900" b="0" i="0" u="none" strike="noStrike" kern="1200" cap="none" spc="0" normalizeH="0" baseline="0" noProof="0" dirty="0">
-                    <a:ln>
-                      <a:noFill/>
-                    </a:ln>
-                    <a:solidFill>
-                      <a:prstClr val="black"/>
-                    </a:solidFill>
-                    <a:effectLst/>
-                    <a:uLnTx/>
-                    <a:uFillTx/>
-                    <a:ea typeface="+mn-ea"/>
-                    <a:cs typeface="+mn-cs"/>
-                  </a:rPr>
-                  <a:t>Kubernetes Cluster</a:t>
-                </a:r>
-              </a:p>
-            </p:txBody>
-          </p:sp>
-          <p:sp>
-            <p:nvSpPr>
-              <p:cNvPr id="35" name="Rectangle: Rounded Corners 34">
-                <a:extLst>
-                  <a:ext uri="{FF2B5EF4-FFF2-40B4-BE49-F238E27FC236}">
-                    <a16:creationId xmlns:a16="http://schemas.microsoft.com/office/drawing/2014/main" id="{DFBFC135-6FE4-4904-9572-E0043D70EBD6}"/>
-                  </a:ext>
-                </a:extLst>
-              </p:cNvPr>
-              <p:cNvSpPr/>
-              <p:nvPr/>
-            </p:nvSpPr>
-            <p:spPr>
-              <a:xfrm>
-                <a:off x="4115528" y="2823110"/>
-                <a:ext cx="771420" cy="815478"/>
-              </a:xfrm>
-              <a:prstGeom prst="roundRect">
-                <a:avLst/>
-              </a:prstGeom>
-              <a:noFill/>
-              <a:ln w="19050">
-                <a:solidFill>
-                  <a:schemeClr val="tx1"/>
-                </a:solidFill>
-              </a:ln>
-            </p:spPr>
-            <p:style>
-              <a:lnRef idx="2">
-                <a:schemeClr val="accent1">
-                  <a:shade val="50000"/>
-                </a:schemeClr>
-              </a:lnRef>
-              <a:fillRef idx="1">
-                <a:schemeClr val="accent1"/>
-              </a:fillRef>
-              <a:effectRef idx="0">
-                <a:schemeClr val="accent1"/>
-              </a:effectRef>
-              <a:fontRef idx="minor">
-                <a:schemeClr val="lt1"/>
-              </a:fontRef>
-            </p:style>
-            <p:txBody>
-              <a:bodyPr lIns="45720" tIns="118872" rtlCol="0" anchor="t" anchorCtr="0"/>
-              <a:lstStyle/>
-              <a:p>
-                <a:pPr marL="0" marR="0" lvl="0" indent="0" algn="l" defTabSz="914400" rtl="0" eaLnBrk="1" fontAlgn="auto" latinLnBrk="0" hangingPunct="1">
-                  <a:lnSpc>
-                    <a:spcPct val="100000"/>
-                  </a:lnSpc>
-                  <a:spcBef>
-                    <a:spcPts val="0"/>
-                  </a:spcBef>
-                  <a:spcAft>
-                    <a:spcPts val="0"/>
-                  </a:spcAft>
-                  <a:buClrTx/>
-                  <a:buSzTx/>
-                  <a:buFontTx/>
-                  <a:buNone/>
-                  <a:tabLst/>
-                  <a:defRPr/>
-                </a:pPr>
-                <a:r>
-                  <a:rPr lang="en-US" sz="800" dirty="0">
-                    <a:solidFill>
-                      <a:prstClr val="black"/>
-                    </a:solidFill>
-                  </a:rPr>
-                  <a:t>cluster-1</a:t>
-                </a:r>
-                <a:endParaRPr kumimoji="0" lang="en-US" sz="800" b="0" i="0" u="none" strike="noStrike" kern="1200" cap="none" spc="0" normalizeH="0" baseline="0" noProof="0" dirty="0">
-                  <a:ln>
-                    <a:noFill/>
-                  </a:ln>
-                  <a:solidFill>
-                    <a:prstClr val="black"/>
-                  </a:solidFill>
-                  <a:effectLst/>
-                  <a:uLnTx/>
-                  <a:uFillTx/>
-                  <a:ea typeface="+mn-ea"/>
-                  <a:cs typeface="+mn-cs"/>
-                </a:endParaRPr>
-              </a:p>
-            </p:txBody>
-          </p:sp>
-        </p:grpSp>
-        <p:sp>
-          <p:nvSpPr>
-            <p:cNvPr id="36" name="Flowchart: Off-page Connector 35">
-              <a:extLst>
-                <a:ext uri="{FF2B5EF4-FFF2-40B4-BE49-F238E27FC236}">
-                  <a16:creationId xmlns:a16="http://schemas.microsoft.com/office/drawing/2014/main" id="{200F0872-23D3-5A7D-8660-9DA58F7CD82D}"/>
-                </a:ext>
-              </a:extLst>
-            </p:cNvPr>
-            <p:cNvSpPr/>
-            <p:nvPr/>
-          </p:nvSpPr>
-          <p:spPr>
-            <a:xfrm>
-              <a:off x="4267973" y="3517290"/>
-              <a:ext cx="466531" cy="279919"/>
-            </a:xfrm>
-            <a:prstGeom prst="flowChartOffpageConnector">
-              <a:avLst/>
-            </a:prstGeom>
-            <a:solidFill>
-              <a:schemeClr val="bg1"/>
-            </a:solidFill>
-            <a:ln w="19050">
-              <a:solidFill>
-                <a:schemeClr val="tx1"/>
-              </a:solidFill>
-            </a:ln>
-          </p:spPr>
-          <p:style>
-            <a:lnRef idx="2">
-              <a:schemeClr val="accent1">
-                <a:shade val="50000"/>
-              </a:schemeClr>
-            </a:lnRef>
-            <a:fillRef idx="1">
-              <a:schemeClr val="accent1"/>
-            </a:fillRef>
-            <a:effectRef idx="0">
-              <a:schemeClr val="accent1"/>
-            </a:effectRef>
-            <a:fontRef idx="minor">
-              <a:schemeClr val="lt1"/>
-            </a:fontRef>
-          </p:style>
-          <p:txBody>
-            <a:bodyPr tIns="0" rtlCol="0" anchor="t" anchorCtr="0"/>
-            <a:lstStyle/>
-            <a:p>
-              <a:pPr marL="0" marR="0" lvl="0" indent="0" algn="l" defTabSz="914400" rtl="0" eaLnBrk="1" fontAlgn="auto" latinLnBrk="0" hangingPunct="1">
-                <a:lnSpc>
-                  <a:spcPct val="100000"/>
-                </a:lnSpc>
-                <a:spcBef>
-                  <a:spcPts val="0"/>
-                </a:spcBef>
-                <a:spcAft>
-                  <a:spcPts val="0"/>
-                </a:spcAft>
-                <a:buClrTx/>
-                <a:buSzTx/>
-                <a:buFontTx/>
-                <a:buNone/>
-                <a:tabLst/>
-                <a:defRPr/>
-              </a:pPr>
-              <a:endParaRPr kumimoji="0" lang="en-US" sz="1000" b="0" i="0" u="none" strike="noStrike" kern="1200" cap="none" spc="0" normalizeH="0" baseline="0" noProof="0">
-                <a:ln>
-                  <a:noFill/>
-                </a:ln>
-                <a:solidFill>
-                  <a:prstClr val="black"/>
-                </a:solidFill>
-                <a:effectLst/>
-                <a:uLnTx/>
-                <a:uFillTx/>
-                <a:ea typeface="+mn-ea"/>
-                <a:cs typeface="+mn-cs"/>
-              </a:endParaRPr>
-            </a:p>
-          </p:txBody>
-        </p:sp>
-        <p:sp>
-          <p:nvSpPr>
-            <p:cNvPr id="37" name="TextBox 36">
-              <a:extLst>
-                <a:ext uri="{FF2B5EF4-FFF2-40B4-BE49-F238E27FC236}">
-                  <a16:creationId xmlns:a16="http://schemas.microsoft.com/office/drawing/2014/main" id="{75E9CD42-DACD-5EDE-FB72-AF6D27C6718E}"/>
-                </a:ext>
-              </a:extLst>
-            </p:cNvPr>
-            <p:cNvSpPr txBox="1"/>
-            <p:nvPr/>
-          </p:nvSpPr>
-          <p:spPr>
-            <a:xfrm>
-              <a:off x="4295092" y="3534139"/>
-              <a:ext cx="412292" cy="230832"/>
-            </a:xfrm>
-            <a:prstGeom prst="rect">
-              <a:avLst/>
-            </a:prstGeom>
-            <a:noFill/>
-          </p:spPr>
-          <p:txBody>
-            <a:bodyPr wrap="square" rtlCol="0">
-              <a:spAutoFit/>
-            </a:bodyPr>
-            <a:lstStyle/>
-            <a:p>
-              <a:pPr marL="0" marR="0" lvl="0" indent="0" algn="l" defTabSz="914400" rtl="0" eaLnBrk="1" fontAlgn="auto" latinLnBrk="0" hangingPunct="1">
-                <a:lnSpc>
-                  <a:spcPct val="100000"/>
-                </a:lnSpc>
-                <a:spcBef>
-                  <a:spcPts val="0"/>
-                </a:spcBef>
-                <a:spcAft>
-                  <a:spcPts val="0"/>
-                </a:spcAft>
-                <a:buClrTx/>
-                <a:buSzTx/>
-                <a:buFontTx/>
-                <a:buNone/>
-                <a:tabLst/>
-                <a:defRPr/>
-              </a:pPr>
-              <a:r>
-                <a:rPr kumimoji="0" lang="en-US" sz="900" b="0" i="0" u="none" strike="noStrike" kern="1200" cap="none" spc="0" normalizeH="0" baseline="0" noProof="0" dirty="0">
-                  <a:ln>
-                    <a:noFill/>
-                  </a:ln>
-                  <a:solidFill>
-                    <a:prstClr val="black"/>
-                  </a:solidFill>
-                  <a:effectLst/>
-                  <a:uLnTx/>
-                  <a:uFillTx/>
-                  <a:ea typeface="+mn-ea"/>
-                  <a:cs typeface="+mn-cs"/>
-                </a:rPr>
-                <a:t>host</a:t>
-              </a:r>
-            </a:p>
-          </p:txBody>
-        </p:sp>
-        <p:grpSp>
-          <p:nvGrpSpPr>
-            <p:cNvPr id="58" name="Group 57">
-              <a:extLst>
-                <a:ext uri="{FF2B5EF4-FFF2-40B4-BE49-F238E27FC236}">
-                  <a16:creationId xmlns:a16="http://schemas.microsoft.com/office/drawing/2014/main" id="{F6FF56A3-16B1-831C-57CE-9919876BB236}"/>
-                </a:ext>
-              </a:extLst>
-            </p:cNvPr>
-            <p:cNvGrpSpPr/>
-            <p:nvPr/>
-          </p:nvGrpSpPr>
-          <p:grpSpPr>
-            <a:xfrm>
-              <a:off x="4267973" y="2620040"/>
-              <a:ext cx="466531" cy="351106"/>
-              <a:chOff x="6810318" y="4284899"/>
-              <a:chExt cx="466531" cy="351106"/>
-            </a:xfrm>
-          </p:grpSpPr>
-          <p:sp>
-            <p:nvSpPr>
-              <p:cNvPr id="54" name="Arrow: Chevron 53">
-                <a:extLst>
-                  <a:ext uri="{FF2B5EF4-FFF2-40B4-BE49-F238E27FC236}">
-                    <a16:creationId xmlns:a16="http://schemas.microsoft.com/office/drawing/2014/main" id="{20E00F62-D32A-8FB7-5FEB-5D3162EC33D3}"/>
-                  </a:ext>
-                </a:extLst>
-              </p:cNvPr>
-              <p:cNvSpPr/>
-              <p:nvPr/>
-            </p:nvSpPr>
-            <p:spPr>
-              <a:xfrm rot="5400000">
-                <a:off x="6868031" y="4227186"/>
-                <a:ext cx="351106" cy="466531"/>
-              </a:xfrm>
-              <a:prstGeom prst="chevron">
-                <a:avLst>
-                  <a:gd name="adj" fmla="val 14000"/>
-                </a:avLst>
-              </a:prstGeom>
-              <a:solidFill>
-                <a:schemeClr val="bg1"/>
-              </a:solidFill>
-              <a:ln w="12700">
-                <a:solidFill>
-                  <a:schemeClr val="tx1"/>
-                </a:solidFill>
-              </a:ln>
-            </p:spPr>
-            <p:style>
-              <a:lnRef idx="2">
-                <a:schemeClr val="accent1">
-                  <a:shade val="50000"/>
-                </a:schemeClr>
-              </a:lnRef>
-              <a:fillRef idx="1">
-                <a:schemeClr val="accent1"/>
-              </a:fillRef>
-              <a:effectRef idx="0">
-                <a:schemeClr val="accent1"/>
-              </a:effectRef>
-              <a:fontRef idx="minor">
-                <a:schemeClr val="lt1"/>
-              </a:fontRef>
-            </p:style>
-            <p:txBody>
-              <a:bodyPr tIns="0" rtlCol="0" anchor="t" anchorCtr="0"/>
-              <a:lstStyle/>
-              <a:p>
-                <a:pPr marL="0" marR="0" lvl="0" indent="0" algn="l" defTabSz="914400" rtl="0" eaLnBrk="1" fontAlgn="auto" latinLnBrk="0" hangingPunct="1">
-                  <a:lnSpc>
-                    <a:spcPct val="100000"/>
-                  </a:lnSpc>
-                  <a:spcBef>
-                    <a:spcPts val="0"/>
-                  </a:spcBef>
-                  <a:spcAft>
-                    <a:spcPts val="0"/>
-                  </a:spcAft>
-                  <a:buClrTx/>
-                  <a:buSzTx/>
-                  <a:buFontTx/>
-                  <a:buNone/>
-                  <a:tabLst/>
-                  <a:defRPr/>
-                </a:pPr>
-                <a:endParaRPr kumimoji="0" lang="en-US" sz="1000" b="0" i="0" u="none" strike="noStrike" kern="1200" cap="none" spc="0" normalizeH="0" baseline="0" noProof="0">
-                  <a:ln>
-                    <a:noFill/>
-                  </a:ln>
-                  <a:solidFill>
-                    <a:prstClr val="black"/>
-                  </a:solidFill>
-                  <a:effectLst/>
-                  <a:uLnTx/>
-                  <a:uFillTx/>
-                  <a:ea typeface="+mn-ea"/>
-                  <a:cs typeface="+mn-cs"/>
-                </a:endParaRPr>
-              </a:p>
-            </p:txBody>
-          </p:sp>
-          <p:sp>
-            <p:nvSpPr>
-              <p:cNvPr id="57" name="TextBox 56">
-                <a:extLst>
-                  <a:ext uri="{FF2B5EF4-FFF2-40B4-BE49-F238E27FC236}">
-                    <a16:creationId xmlns:a16="http://schemas.microsoft.com/office/drawing/2014/main" id="{430F5921-AE55-FC29-BAE4-5A0B0592787C}"/>
-                  </a:ext>
-                </a:extLst>
-              </p:cNvPr>
-              <p:cNvSpPr txBox="1"/>
-              <p:nvPr/>
-            </p:nvSpPr>
-            <p:spPr>
-              <a:xfrm>
-                <a:off x="6837438" y="4337341"/>
-                <a:ext cx="412292" cy="230832"/>
-              </a:xfrm>
-              <a:prstGeom prst="rect">
-                <a:avLst/>
-              </a:prstGeom>
-              <a:noFill/>
-            </p:spPr>
-            <p:txBody>
-              <a:bodyPr wrap="square" rtlCol="0">
-                <a:spAutoFit/>
-              </a:bodyPr>
-              <a:lstStyle/>
-              <a:p>
-                <a:pPr marL="0" marR="0" lvl="0" indent="0" algn="l" defTabSz="914400" rtl="0" eaLnBrk="1" fontAlgn="auto" latinLnBrk="0" hangingPunct="1">
-                  <a:lnSpc>
-                    <a:spcPct val="100000"/>
-                  </a:lnSpc>
-                  <a:spcBef>
-                    <a:spcPts val="0"/>
-                  </a:spcBef>
-                  <a:spcAft>
-                    <a:spcPts val="0"/>
-                  </a:spcAft>
-                  <a:buClrTx/>
-                  <a:buSzTx/>
-                  <a:buFontTx/>
-                  <a:buNone/>
-                  <a:tabLst/>
-                  <a:defRPr/>
-                </a:pPr>
-                <a:r>
-                  <a:rPr kumimoji="0" lang="en-US" sz="900" b="0" i="0" u="none" strike="noStrike" kern="1200" cap="none" spc="0" normalizeH="0" baseline="0" noProof="0" dirty="0">
-                    <a:ln>
-                      <a:noFill/>
-                    </a:ln>
-                    <a:solidFill>
-                      <a:prstClr val="black"/>
-                    </a:solidFill>
-                    <a:effectLst/>
-                    <a:uLnTx/>
-                    <a:uFillTx/>
-                    <a:ea typeface="+mn-ea"/>
-                    <a:cs typeface="+mn-cs"/>
-                  </a:rPr>
-                  <a:t>host</a:t>
-                </a:r>
-              </a:p>
-            </p:txBody>
-          </p:sp>
-        </p:grpSp>
-      </p:grpSp>
-    </p:spTree>
-    <p:extLst>
-      <p:ext uri="{BB962C8B-B14F-4D97-AF65-F5344CB8AC3E}">
-        <p14:creationId xmlns:p14="http://schemas.microsoft.com/office/powerpoint/2010/main" val="3881308953"/>
-      </p:ext>
-    </p:extLst>
-  </p:cSld>
-  <p:clrMapOvr>
-    <a:masterClrMapping/>
-  </p:clrMapOvr>
-</p:sld>
-</file>
-
-<file path=ppt/slides/slide6.xml><?xml version="1.0" encoding="utf-8"?>
-<p:sld xmlns:a="http://schemas.openxmlformats.org/drawingml/2006/main" xmlns:r="http://schemas.openxmlformats.org/officeDocument/2006/relationships" xmlns:p="http://schemas.openxmlformats.org/presentationml/2006/main">
-  <p:cSld>
-    <p:spTree>
-      <p:nvGrpSpPr>
-        <p:cNvPr id="1" name=""/>
-        <p:cNvGrpSpPr/>
-        <p:nvPr/>
-      </p:nvGrpSpPr>
-      <p:grpSpPr>
-        <a:xfrm>
-          <a:off x="0" y="0"/>
-          <a:ext cx="0" cy="0"/>
-          <a:chOff x="0" y="0"/>
-          <a:chExt cx="0" cy="0"/>
-        </a:xfrm>
-      </p:grpSpPr>
       <p:grpSp>
         <p:nvGrpSpPr>
           <p:cNvPr id="6" name="Group 5">
@@ -9000,7 +7158,7 @@
                     <a:ea typeface="+mn-ea"/>
                     <a:cs typeface="+mn-cs"/>
                   </a:rPr>
-                  <a:t>Compute</a:t>
+                  <a:t>Server</a:t>
                 </a:r>
               </a:p>
               <a:p>
@@ -9096,7 +7254,7 @@
                       <a:prstClr val="black"/>
                     </a:solidFill>
                   </a:rPr>
-                  <a:t>server-1</a:t>
+                  <a:t>Server-1</a:t>
                 </a:r>
                 <a:endParaRPr kumimoji="0" lang="en-US" sz="800" b="0" i="0" u="none" strike="noStrike" kern="1200" cap="none" spc="0" normalizeH="0" baseline="0" noProof="0" dirty="0">
                   <a:ln>
@@ -9385,7 +7543,7 @@
                       <a:ea typeface="+mn-ea"/>
                       <a:cs typeface="+mn-cs"/>
                     </a:rPr>
-                    <a:t>Kubernetes Cluster</a:t>
+                    <a:t>Container Platform</a:t>
                   </a:r>
                 </a:p>
               </p:txBody>
@@ -9904,7 +8062,7 @@
                     <a:defRPr/>
                   </a:pPr>
                   <a:r>
-                    <a:rPr kumimoji="0" lang="en-US" sz="900" b="0" i="0" u="none" strike="noStrike" kern="1200" cap="none" spc="0" normalizeH="0" baseline="0" noProof="0" dirty="0" err="1">
+                    <a:rPr kumimoji="0" lang="en-US" sz="900" b="0" i="0" u="none" strike="noStrike" kern="1200" cap="none" spc="0" normalizeH="0" baseline="0" noProof="0" dirty="0">
                       <a:ln>
                         <a:noFill/>
                       </a:ln>
@@ -9917,21 +8075,8 @@
                       <a:ea typeface="+mn-ea"/>
                       <a:cs typeface="+mn-cs"/>
                     </a:rPr>
-                    <a:t>Kubevirt</a:t>
+                    <a:t>Virtualization Platform</a:t>
                   </a:r>
-                  <a:endParaRPr kumimoji="0" lang="en-US" sz="900" b="0" i="0" u="none" strike="noStrike" kern="1200" cap="none" spc="0" normalizeH="0" baseline="0" noProof="0" dirty="0">
-                    <a:ln>
-                      <a:noFill/>
-                    </a:ln>
-                    <a:solidFill>
-                      <a:prstClr val="black"/>
-                    </a:solidFill>
-                    <a:effectLst/>
-                    <a:uLnTx/>
-                    <a:uFillTx/>
-                    <a:ea typeface="+mn-ea"/>
-                    <a:cs typeface="+mn-cs"/>
-                  </a:endParaRPr>
                 </a:p>
               </p:txBody>
             </p:sp>
@@ -10442,7 +8587,7 @@
                     <a:ea typeface="+mn-ea"/>
                     <a:cs typeface="+mn-cs"/>
                   </a:rPr>
-                  <a:t>Compute</a:t>
+                  <a:t>Server</a:t>
                 </a:r>
               </a:p>
               <a:p>
@@ -10880,7 +9025,7 @@
 </p:sld>
 </file>
 
-<file path=ppt/slides/slide7.xml><?xml version="1.0" encoding="utf-8"?>
+<file path=ppt/slides/slide6.xml><?xml version="1.0" encoding="utf-8"?>
 <p:sld xmlns:a="http://schemas.openxmlformats.org/drawingml/2006/main" xmlns:r="http://schemas.openxmlformats.org/officeDocument/2006/relationships" xmlns:p="http://schemas.openxmlformats.org/presentationml/2006/main">
   <p:cSld>
     <p:spTree>
@@ -10999,7 +9144,7 @@
                   <a:ea typeface="+mn-ea"/>
                   <a:cs typeface="+mn-cs"/>
                 </a:rPr>
-                <a:t>Compute</a:t>
+                <a:t>Server</a:t>
               </a:r>
             </a:p>
             <a:p>
@@ -11095,7 +9240,7 @@
                     <a:prstClr val="black"/>
                   </a:solidFill>
                 </a:rPr>
-                <a:t>server-1</a:t>
+                <a:t>Server-1</a:t>
               </a:r>
               <a:endParaRPr kumimoji="0" lang="en-US" sz="800" b="0" i="0" u="none" strike="noStrike" kern="1200" cap="none" spc="0" normalizeH="0" baseline="0" noProof="0" dirty="0">
                 <a:ln>
@@ -11525,7 +9670,7 @@
                     <a:ea typeface="+mn-ea"/>
                     <a:cs typeface="+mn-cs"/>
                   </a:rPr>
-                  <a:t>Kubernetes Cluster</a:t>
+                  <a:t>Container Platform</a:t>
                 </a:r>
               </a:p>
             </p:txBody>
@@ -12044,7 +10189,7 @@
                   <a:defRPr/>
                 </a:pPr>
                 <a:r>
-                  <a:rPr kumimoji="0" lang="en-US" sz="900" b="0" i="0" u="none" strike="noStrike" kern="1200" cap="none" spc="0" normalizeH="0" baseline="0" noProof="0" dirty="0" err="1">
+                  <a:rPr kumimoji="0" lang="en-US" sz="900" b="0" i="0" u="none" strike="noStrike" kern="1200" cap="none" spc="0" normalizeH="0" baseline="0" noProof="0" dirty="0">
                     <a:ln>
                       <a:noFill/>
                     </a:ln>
@@ -12057,21 +10202,8 @@
                     <a:ea typeface="+mn-ea"/>
                     <a:cs typeface="+mn-cs"/>
                   </a:rPr>
-                  <a:t>Kubevirt</a:t>
+                  <a:t>Virtualization Platform</a:t>
                 </a:r>
-                <a:endParaRPr kumimoji="0" lang="en-US" sz="900" b="0" i="0" u="none" strike="noStrike" kern="1200" cap="none" spc="0" normalizeH="0" baseline="0" noProof="0" dirty="0">
-                  <a:ln>
-                    <a:noFill/>
-                  </a:ln>
-                  <a:solidFill>
-                    <a:prstClr val="black"/>
-                  </a:solidFill>
-                  <a:effectLst/>
-                  <a:uLnTx/>
-                  <a:uFillTx/>
-                  <a:ea typeface="+mn-ea"/>
-                  <a:cs typeface="+mn-cs"/>
-                </a:endParaRPr>
               </a:p>
             </p:txBody>
           </p:sp>
@@ -12435,7 +10567,7 @@
                     <a:ea typeface="+mn-ea"/>
                     <a:cs typeface="+mn-cs"/>
                   </a:rPr>
-                  <a:t>Compute</a:t>
+                  <a:t>Server</a:t>
                 </a:r>
               </a:p>
               <a:p>
@@ -13106,7 +11238,7628 @@
     </p:spTree>
     <p:extLst>
       <p:ext uri="{BB962C8B-B14F-4D97-AF65-F5344CB8AC3E}">
-        <p14:creationId xmlns:p14="http://schemas.microsoft.com/office/powerpoint/2010/main" val="2669653796"/>
+        <p14:creationId xmlns:p14="http://schemas.microsoft.com/office/powerpoint/2010/main" val="2376814170"/>
+      </p:ext>
+    </p:extLst>
+  </p:cSld>
+  <p:clrMapOvr>
+    <a:masterClrMapping/>
+  </p:clrMapOvr>
+</p:sld>
+</file>
+
+<file path=ppt/slides/slide7.xml><?xml version="1.0" encoding="utf-8"?>
+<p:sld xmlns:a="http://schemas.openxmlformats.org/drawingml/2006/main" xmlns:r="http://schemas.openxmlformats.org/officeDocument/2006/relationships" xmlns:p="http://schemas.openxmlformats.org/presentationml/2006/main">
+  <p:cSld>
+    <p:spTree>
+      <p:nvGrpSpPr>
+        <p:cNvPr id="1" name=""/>
+        <p:cNvGrpSpPr/>
+        <p:nvPr/>
+      </p:nvGrpSpPr>
+      <p:grpSpPr>
+        <a:xfrm>
+          <a:off x="0" y="0"/>
+          <a:ext cx="0" cy="0"/>
+          <a:chOff x="0" y="0"/>
+          <a:chExt cx="0" cy="0"/>
+        </a:xfrm>
+      </p:grpSpPr>
+      <p:grpSp>
+        <p:nvGrpSpPr>
+          <p:cNvPr id="48" name="Group 47">
+            <a:extLst>
+              <a:ext uri="{FF2B5EF4-FFF2-40B4-BE49-F238E27FC236}">
+                <a16:creationId xmlns:a16="http://schemas.microsoft.com/office/drawing/2014/main" id="{FED66C52-1B56-6179-741E-A80C19EA644A}"/>
+              </a:ext>
+            </a:extLst>
+          </p:cNvPr>
+          <p:cNvGrpSpPr/>
+          <p:nvPr/>
+        </p:nvGrpSpPr>
+        <p:grpSpPr>
+          <a:xfrm>
+            <a:off x="5717798" y="2244919"/>
+            <a:ext cx="771421" cy="1205580"/>
+            <a:chOff x="5762648" y="2244919"/>
+            <a:chExt cx="771421" cy="1205580"/>
+          </a:xfrm>
+        </p:grpSpPr>
+        <p:grpSp>
+          <p:nvGrpSpPr>
+            <p:cNvPr id="146" name="Group 145">
+              <a:extLst>
+                <a:ext uri="{FF2B5EF4-FFF2-40B4-BE49-F238E27FC236}">
+                  <a16:creationId xmlns:a16="http://schemas.microsoft.com/office/drawing/2014/main" id="{21372C5F-6019-6E0C-9508-4E8A358AF2EE}"/>
+                </a:ext>
+              </a:extLst>
+            </p:cNvPr>
+            <p:cNvGrpSpPr/>
+            <p:nvPr/>
+          </p:nvGrpSpPr>
+          <p:grpSpPr>
+            <a:xfrm>
+              <a:off x="5762648" y="2447989"/>
+              <a:ext cx="771421" cy="815478"/>
+              <a:chOff x="4115528" y="2823110"/>
+              <a:chExt cx="771421" cy="815478"/>
+            </a:xfrm>
+          </p:grpSpPr>
+          <p:sp>
+            <p:nvSpPr>
+              <p:cNvPr id="34" name="Rectangle 33">
+                <a:extLst>
+                  <a:ext uri="{FF2B5EF4-FFF2-40B4-BE49-F238E27FC236}">
+                    <a16:creationId xmlns:a16="http://schemas.microsoft.com/office/drawing/2014/main" id="{AC8C008F-40AE-7B56-066D-358A9B134B49}"/>
+                  </a:ext>
+                </a:extLst>
+              </p:cNvPr>
+              <p:cNvSpPr/>
+              <p:nvPr/>
+            </p:nvSpPr>
+            <p:spPr>
+              <a:xfrm>
+                <a:off x="4115528" y="3145212"/>
+                <a:ext cx="771421" cy="279919"/>
+              </a:xfrm>
+              <a:prstGeom prst="rect">
+                <a:avLst/>
+              </a:prstGeom>
+              <a:solidFill>
+                <a:schemeClr val="bg1">
+                  <a:lumMod val="95000"/>
+                </a:schemeClr>
+              </a:solidFill>
+              <a:ln w="19050">
+                <a:solidFill>
+                  <a:schemeClr val="bg2"/>
+                </a:solidFill>
+              </a:ln>
+            </p:spPr>
+            <p:style>
+              <a:lnRef idx="2">
+                <a:schemeClr val="accent1">
+                  <a:shade val="50000"/>
+                </a:schemeClr>
+              </a:lnRef>
+              <a:fillRef idx="1">
+                <a:schemeClr val="accent1"/>
+              </a:fillRef>
+              <a:effectRef idx="0">
+                <a:schemeClr val="accent1"/>
+              </a:effectRef>
+              <a:fontRef idx="minor">
+                <a:schemeClr val="lt1"/>
+              </a:fontRef>
+            </p:style>
+            <p:txBody>
+              <a:bodyPr lIns="0" rIns="0" rtlCol="0" anchor="ctr"/>
+              <a:lstStyle/>
+              <a:p>
+                <a:pPr marL="0" marR="0" lvl="0" indent="0" algn="ctr" defTabSz="914400" rtl="0" eaLnBrk="1" fontAlgn="auto" latinLnBrk="0" hangingPunct="1">
+                  <a:lnSpc>
+                    <a:spcPct val="100000"/>
+                  </a:lnSpc>
+                  <a:spcBef>
+                    <a:spcPts val="0"/>
+                  </a:spcBef>
+                  <a:spcAft>
+                    <a:spcPts val="0"/>
+                  </a:spcAft>
+                  <a:buClrTx/>
+                  <a:buSzTx/>
+                  <a:buFontTx/>
+                  <a:buNone/>
+                  <a:tabLst/>
+                  <a:defRPr/>
+                </a:pPr>
+                <a:r>
+                  <a:rPr kumimoji="0" lang="en-US" sz="900" b="0" i="0" u="none" strike="noStrike" kern="1200" cap="none" spc="0" normalizeH="0" baseline="0" noProof="0" dirty="0">
+                    <a:ln>
+                      <a:noFill/>
+                    </a:ln>
+                    <a:solidFill>
+                      <a:prstClr val="black"/>
+                    </a:solidFill>
+                    <a:effectLst/>
+                    <a:uLnTx/>
+                    <a:uFillTx/>
+                    <a:ea typeface="+mn-ea"/>
+                    <a:cs typeface="+mn-cs"/>
+                  </a:rPr>
+                  <a:t>Container Platform</a:t>
+                </a:r>
+              </a:p>
+            </p:txBody>
+          </p:sp>
+          <p:sp>
+            <p:nvSpPr>
+              <p:cNvPr id="35" name="Rectangle: Rounded Corners 34">
+                <a:extLst>
+                  <a:ext uri="{FF2B5EF4-FFF2-40B4-BE49-F238E27FC236}">
+                    <a16:creationId xmlns:a16="http://schemas.microsoft.com/office/drawing/2014/main" id="{DFBFC135-6FE4-4904-9572-E0043D70EBD6}"/>
+                  </a:ext>
+                </a:extLst>
+              </p:cNvPr>
+              <p:cNvSpPr/>
+              <p:nvPr/>
+            </p:nvSpPr>
+            <p:spPr>
+              <a:xfrm>
+                <a:off x="4115528" y="2823110"/>
+                <a:ext cx="771420" cy="815478"/>
+              </a:xfrm>
+              <a:prstGeom prst="roundRect">
+                <a:avLst/>
+              </a:prstGeom>
+              <a:noFill/>
+              <a:ln w="19050">
+                <a:solidFill>
+                  <a:schemeClr val="tx1"/>
+                </a:solidFill>
+              </a:ln>
+            </p:spPr>
+            <p:style>
+              <a:lnRef idx="2">
+                <a:schemeClr val="accent1">
+                  <a:shade val="50000"/>
+                </a:schemeClr>
+              </a:lnRef>
+              <a:fillRef idx="1">
+                <a:schemeClr val="accent1"/>
+              </a:fillRef>
+              <a:effectRef idx="0">
+                <a:schemeClr val="accent1"/>
+              </a:effectRef>
+              <a:fontRef idx="minor">
+                <a:schemeClr val="lt1"/>
+              </a:fontRef>
+            </p:style>
+            <p:txBody>
+              <a:bodyPr lIns="45720" tIns="118872" rtlCol="0" anchor="t" anchorCtr="0"/>
+              <a:lstStyle/>
+              <a:p>
+                <a:pPr marL="0" marR="0" lvl="0" indent="0" algn="l" defTabSz="914400" rtl="0" eaLnBrk="1" fontAlgn="auto" latinLnBrk="0" hangingPunct="1">
+                  <a:lnSpc>
+                    <a:spcPct val="100000"/>
+                  </a:lnSpc>
+                  <a:spcBef>
+                    <a:spcPts val="0"/>
+                  </a:spcBef>
+                  <a:spcAft>
+                    <a:spcPts val="0"/>
+                  </a:spcAft>
+                  <a:buClrTx/>
+                  <a:buSzTx/>
+                  <a:buFontTx/>
+                  <a:buNone/>
+                  <a:tabLst/>
+                  <a:defRPr/>
+                </a:pPr>
+                <a:r>
+                  <a:rPr lang="en-US" sz="800" dirty="0">
+                    <a:solidFill>
+                      <a:prstClr val="black"/>
+                    </a:solidFill>
+                  </a:rPr>
+                  <a:t>cluster-1</a:t>
+                </a:r>
+                <a:endParaRPr kumimoji="0" lang="en-US" sz="800" b="0" i="0" u="none" strike="noStrike" kern="1200" cap="none" spc="0" normalizeH="0" baseline="0" noProof="0" dirty="0">
+                  <a:ln>
+                    <a:noFill/>
+                  </a:ln>
+                  <a:solidFill>
+                    <a:prstClr val="black"/>
+                  </a:solidFill>
+                  <a:effectLst/>
+                  <a:uLnTx/>
+                  <a:uFillTx/>
+                  <a:ea typeface="+mn-ea"/>
+                  <a:cs typeface="+mn-cs"/>
+                </a:endParaRPr>
+              </a:p>
+            </p:txBody>
+          </p:sp>
+        </p:grpSp>
+        <p:grpSp>
+          <p:nvGrpSpPr>
+            <p:cNvPr id="58" name="Group 57">
+              <a:extLst>
+                <a:ext uri="{FF2B5EF4-FFF2-40B4-BE49-F238E27FC236}">
+                  <a16:creationId xmlns:a16="http://schemas.microsoft.com/office/drawing/2014/main" id="{F6FF56A3-16B1-831C-57CE-9919876BB236}"/>
+                </a:ext>
+              </a:extLst>
+            </p:cNvPr>
+            <p:cNvGrpSpPr/>
+            <p:nvPr/>
+          </p:nvGrpSpPr>
+          <p:grpSpPr>
+            <a:xfrm>
+              <a:off x="5915093" y="2244919"/>
+              <a:ext cx="466531" cy="351106"/>
+              <a:chOff x="6810318" y="4284899"/>
+              <a:chExt cx="466531" cy="351106"/>
+            </a:xfrm>
+          </p:grpSpPr>
+          <p:sp>
+            <p:nvSpPr>
+              <p:cNvPr id="54" name="Arrow: Chevron 53">
+                <a:extLst>
+                  <a:ext uri="{FF2B5EF4-FFF2-40B4-BE49-F238E27FC236}">
+                    <a16:creationId xmlns:a16="http://schemas.microsoft.com/office/drawing/2014/main" id="{20E00F62-D32A-8FB7-5FEB-5D3162EC33D3}"/>
+                  </a:ext>
+                </a:extLst>
+              </p:cNvPr>
+              <p:cNvSpPr/>
+              <p:nvPr/>
+            </p:nvSpPr>
+            <p:spPr>
+              <a:xfrm rot="5400000">
+                <a:off x="6868031" y="4227186"/>
+                <a:ext cx="351106" cy="466531"/>
+              </a:xfrm>
+              <a:prstGeom prst="chevron">
+                <a:avLst>
+                  <a:gd name="adj" fmla="val 14000"/>
+                </a:avLst>
+              </a:prstGeom>
+              <a:solidFill>
+                <a:schemeClr val="bg1"/>
+              </a:solidFill>
+              <a:ln w="12700">
+                <a:solidFill>
+                  <a:schemeClr val="tx1"/>
+                </a:solidFill>
+              </a:ln>
+            </p:spPr>
+            <p:style>
+              <a:lnRef idx="2">
+                <a:schemeClr val="accent1">
+                  <a:shade val="50000"/>
+                </a:schemeClr>
+              </a:lnRef>
+              <a:fillRef idx="1">
+                <a:schemeClr val="accent1"/>
+              </a:fillRef>
+              <a:effectRef idx="0">
+                <a:schemeClr val="accent1"/>
+              </a:effectRef>
+              <a:fontRef idx="minor">
+                <a:schemeClr val="lt1"/>
+              </a:fontRef>
+            </p:style>
+            <p:txBody>
+              <a:bodyPr tIns="0" rtlCol="0" anchor="t" anchorCtr="0"/>
+              <a:lstStyle/>
+              <a:p>
+                <a:pPr marL="0" marR="0" lvl="0" indent="0" algn="l" defTabSz="914400" rtl="0" eaLnBrk="1" fontAlgn="auto" latinLnBrk="0" hangingPunct="1">
+                  <a:lnSpc>
+                    <a:spcPct val="100000"/>
+                  </a:lnSpc>
+                  <a:spcBef>
+                    <a:spcPts val="0"/>
+                  </a:spcBef>
+                  <a:spcAft>
+                    <a:spcPts val="0"/>
+                  </a:spcAft>
+                  <a:buClrTx/>
+                  <a:buSzTx/>
+                  <a:buFontTx/>
+                  <a:buNone/>
+                  <a:tabLst/>
+                  <a:defRPr/>
+                </a:pPr>
+                <a:endParaRPr kumimoji="0" lang="en-US" sz="1000" b="0" i="0" u="none" strike="noStrike" kern="1200" cap="none" spc="0" normalizeH="0" baseline="0" noProof="0">
+                  <a:ln>
+                    <a:noFill/>
+                  </a:ln>
+                  <a:solidFill>
+                    <a:prstClr val="black"/>
+                  </a:solidFill>
+                  <a:effectLst/>
+                  <a:uLnTx/>
+                  <a:uFillTx/>
+                  <a:ea typeface="+mn-ea"/>
+                  <a:cs typeface="+mn-cs"/>
+                </a:endParaRPr>
+              </a:p>
+            </p:txBody>
+          </p:sp>
+          <p:sp>
+            <p:nvSpPr>
+              <p:cNvPr id="57" name="TextBox 56">
+                <a:extLst>
+                  <a:ext uri="{FF2B5EF4-FFF2-40B4-BE49-F238E27FC236}">
+                    <a16:creationId xmlns:a16="http://schemas.microsoft.com/office/drawing/2014/main" id="{430F5921-AE55-FC29-BAE4-5A0B0592787C}"/>
+                  </a:ext>
+                </a:extLst>
+              </p:cNvPr>
+              <p:cNvSpPr txBox="1"/>
+              <p:nvPr/>
+            </p:nvSpPr>
+            <p:spPr>
+              <a:xfrm>
+                <a:off x="6837438" y="4337341"/>
+                <a:ext cx="412292" cy="230832"/>
+              </a:xfrm>
+              <a:prstGeom prst="rect">
+                <a:avLst/>
+              </a:prstGeom>
+              <a:noFill/>
+            </p:spPr>
+            <p:txBody>
+              <a:bodyPr wrap="square" rtlCol="0">
+                <a:spAutoFit/>
+              </a:bodyPr>
+              <a:lstStyle/>
+              <a:p>
+                <a:pPr marL="0" marR="0" lvl="0" indent="0" algn="l" defTabSz="914400" rtl="0" eaLnBrk="1" fontAlgn="auto" latinLnBrk="0" hangingPunct="1">
+                  <a:lnSpc>
+                    <a:spcPct val="100000"/>
+                  </a:lnSpc>
+                  <a:spcBef>
+                    <a:spcPts val="0"/>
+                  </a:spcBef>
+                  <a:spcAft>
+                    <a:spcPts val="0"/>
+                  </a:spcAft>
+                  <a:buClrTx/>
+                  <a:buSzTx/>
+                  <a:buFontTx/>
+                  <a:buNone/>
+                  <a:tabLst/>
+                  <a:defRPr/>
+                </a:pPr>
+                <a:r>
+                  <a:rPr kumimoji="0" lang="en-US" sz="900" b="0" i="0" u="none" strike="noStrike" kern="1200" cap="none" spc="0" normalizeH="0" baseline="0" noProof="0" dirty="0">
+                    <a:ln>
+                      <a:noFill/>
+                    </a:ln>
+                    <a:solidFill>
+                      <a:prstClr val="black"/>
+                    </a:solidFill>
+                    <a:effectLst/>
+                    <a:uLnTx/>
+                    <a:uFillTx/>
+                    <a:ea typeface="+mn-ea"/>
+                    <a:cs typeface="+mn-cs"/>
+                  </a:rPr>
+                  <a:t>host</a:t>
+                </a:r>
+              </a:p>
+            </p:txBody>
+          </p:sp>
+        </p:grpSp>
+        <p:grpSp>
+          <p:nvGrpSpPr>
+            <p:cNvPr id="24" name="Group 23">
+              <a:extLst>
+                <a:ext uri="{FF2B5EF4-FFF2-40B4-BE49-F238E27FC236}">
+                  <a16:creationId xmlns:a16="http://schemas.microsoft.com/office/drawing/2014/main" id="{03F61A79-2B14-4689-A373-1B6C8A8BF00D}"/>
+                </a:ext>
+              </a:extLst>
+            </p:cNvPr>
+            <p:cNvGrpSpPr/>
+            <p:nvPr/>
+          </p:nvGrpSpPr>
+          <p:grpSpPr>
+            <a:xfrm>
+              <a:off x="5800358" y="3170580"/>
+              <a:ext cx="708987" cy="279919"/>
+              <a:chOff x="4610835" y="2915239"/>
+              <a:chExt cx="708987" cy="279919"/>
+            </a:xfrm>
+          </p:grpSpPr>
+          <p:sp>
+            <p:nvSpPr>
+              <p:cNvPr id="2" name="Flowchart: Off-page Connector 1">
+                <a:extLst>
+                  <a:ext uri="{FF2B5EF4-FFF2-40B4-BE49-F238E27FC236}">
+                    <a16:creationId xmlns:a16="http://schemas.microsoft.com/office/drawing/2014/main" id="{D2DBAF6C-1A9D-A2B7-54F2-9B06CDF54057}"/>
+                  </a:ext>
+                </a:extLst>
+              </p:cNvPr>
+              <p:cNvSpPr/>
+              <p:nvPr/>
+            </p:nvSpPr>
+            <p:spPr>
+              <a:xfrm>
+                <a:off x="4610835" y="2915239"/>
+                <a:ext cx="323575" cy="279919"/>
+              </a:xfrm>
+              <a:prstGeom prst="flowChartOffpageConnector">
+                <a:avLst/>
+              </a:prstGeom>
+              <a:solidFill>
+                <a:schemeClr val="bg1"/>
+              </a:solidFill>
+              <a:ln w="19050">
+                <a:solidFill>
+                  <a:schemeClr val="tx1"/>
+                </a:solidFill>
+              </a:ln>
+            </p:spPr>
+            <p:style>
+              <a:lnRef idx="2">
+                <a:schemeClr val="accent1">
+                  <a:shade val="50000"/>
+                </a:schemeClr>
+              </a:lnRef>
+              <a:fillRef idx="1">
+                <a:schemeClr val="accent1"/>
+              </a:fillRef>
+              <a:effectRef idx="0">
+                <a:schemeClr val="accent1"/>
+              </a:effectRef>
+              <a:fontRef idx="minor">
+                <a:schemeClr val="lt1"/>
+              </a:fontRef>
+            </p:style>
+            <p:txBody>
+              <a:bodyPr tIns="0" rtlCol="0" anchor="t" anchorCtr="0"/>
+              <a:lstStyle/>
+              <a:p>
+                <a:pPr marL="0" marR="0" lvl="0" indent="0" algn="l" defTabSz="914400" rtl="0" eaLnBrk="1" fontAlgn="auto" latinLnBrk="0" hangingPunct="1">
+                  <a:lnSpc>
+                    <a:spcPct val="100000"/>
+                  </a:lnSpc>
+                  <a:spcBef>
+                    <a:spcPts val="0"/>
+                  </a:spcBef>
+                  <a:spcAft>
+                    <a:spcPts val="0"/>
+                  </a:spcAft>
+                  <a:buClrTx/>
+                  <a:buSzTx/>
+                  <a:buFontTx/>
+                  <a:buNone/>
+                  <a:tabLst/>
+                  <a:defRPr/>
+                </a:pPr>
+                <a:endParaRPr kumimoji="0" lang="en-US" sz="1000" b="0" i="0" u="none" strike="noStrike" kern="1200" cap="none" spc="0" normalizeH="0" baseline="0" noProof="0">
+                  <a:ln>
+                    <a:noFill/>
+                  </a:ln>
+                  <a:solidFill>
+                    <a:prstClr val="black"/>
+                  </a:solidFill>
+                  <a:effectLst/>
+                  <a:uLnTx/>
+                  <a:uFillTx/>
+                  <a:ea typeface="+mn-ea"/>
+                  <a:cs typeface="+mn-cs"/>
+                </a:endParaRPr>
+              </a:p>
+            </p:txBody>
+          </p:sp>
+          <p:sp>
+            <p:nvSpPr>
+              <p:cNvPr id="6" name="TextBox 5">
+                <a:extLst>
+                  <a:ext uri="{FF2B5EF4-FFF2-40B4-BE49-F238E27FC236}">
+                    <a16:creationId xmlns:a16="http://schemas.microsoft.com/office/drawing/2014/main" id="{7C552AEA-8D5A-DF05-C663-F088491F3B22}"/>
+                  </a:ext>
+                </a:extLst>
+              </p:cNvPr>
+              <p:cNvSpPr txBox="1"/>
+              <p:nvPr/>
+            </p:nvSpPr>
+            <p:spPr>
+              <a:xfrm>
+                <a:off x="4631734" y="2915239"/>
+                <a:ext cx="285956" cy="230832"/>
+              </a:xfrm>
+              <a:prstGeom prst="rect">
+                <a:avLst/>
+              </a:prstGeom>
+              <a:noFill/>
+            </p:spPr>
+            <p:txBody>
+              <a:bodyPr wrap="square" lIns="0" rIns="0" rtlCol="0">
+                <a:spAutoFit/>
+              </a:bodyPr>
+              <a:lstStyle/>
+              <a:p>
+                <a:pPr marL="0" marR="0" lvl="0" indent="0" algn="ctr" defTabSz="914400" rtl="0" eaLnBrk="1" fontAlgn="auto" latinLnBrk="0" hangingPunct="1">
+                  <a:lnSpc>
+                    <a:spcPct val="100000"/>
+                  </a:lnSpc>
+                  <a:spcBef>
+                    <a:spcPts val="0"/>
+                  </a:spcBef>
+                  <a:spcAft>
+                    <a:spcPts val="0"/>
+                  </a:spcAft>
+                  <a:buClrTx/>
+                  <a:buSzTx/>
+                  <a:buFontTx/>
+                  <a:buNone/>
+                  <a:tabLst/>
+                  <a:defRPr/>
+                </a:pPr>
+                <a:r>
+                  <a:rPr kumimoji="0" lang="en-US" sz="900" b="0" i="0" u="none" strike="noStrike" kern="1200" cap="none" spc="0" normalizeH="0" baseline="0" noProof="0" dirty="0">
+                    <a:ln>
+                      <a:noFill/>
+                    </a:ln>
+                    <a:solidFill>
+                      <a:prstClr val="black"/>
+                    </a:solidFill>
+                    <a:effectLst/>
+                    <a:uLnTx/>
+                    <a:uFillTx/>
+                    <a:ea typeface="+mn-ea"/>
+                    <a:cs typeface="+mn-cs"/>
+                  </a:rPr>
+                  <a:t>runs</a:t>
+                </a:r>
+              </a:p>
+            </p:txBody>
+          </p:sp>
+          <p:sp>
+            <p:nvSpPr>
+              <p:cNvPr id="16" name="Flowchart: Off-page Connector 15">
+                <a:extLst>
+                  <a:ext uri="{FF2B5EF4-FFF2-40B4-BE49-F238E27FC236}">
+                    <a16:creationId xmlns:a16="http://schemas.microsoft.com/office/drawing/2014/main" id="{D72AF047-6361-3F51-B89D-DA8B28A07C73}"/>
+                  </a:ext>
+                </a:extLst>
+              </p:cNvPr>
+              <p:cNvSpPr/>
+              <p:nvPr/>
+            </p:nvSpPr>
+            <p:spPr>
+              <a:xfrm>
+                <a:off x="4996247" y="2915239"/>
+                <a:ext cx="323575" cy="279919"/>
+              </a:xfrm>
+              <a:prstGeom prst="flowChartOffpageConnector">
+                <a:avLst/>
+              </a:prstGeom>
+              <a:solidFill>
+                <a:schemeClr val="bg1"/>
+              </a:solidFill>
+              <a:ln w="19050">
+                <a:solidFill>
+                  <a:schemeClr val="tx1"/>
+                </a:solidFill>
+              </a:ln>
+            </p:spPr>
+            <p:style>
+              <a:lnRef idx="2">
+                <a:schemeClr val="accent1">
+                  <a:shade val="50000"/>
+                </a:schemeClr>
+              </a:lnRef>
+              <a:fillRef idx="1">
+                <a:schemeClr val="accent1"/>
+              </a:fillRef>
+              <a:effectRef idx="0">
+                <a:schemeClr val="accent1"/>
+              </a:effectRef>
+              <a:fontRef idx="minor">
+                <a:schemeClr val="lt1"/>
+              </a:fontRef>
+            </p:style>
+            <p:txBody>
+              <a:bodyPr tIns="0" rtlCol="0" anchor="t" anchorCtr="0"/>
+              <a:lstStyle/>
+              <a:p>
+                <a:pPr marL="0" marR="0" lvl="0" indent="0" algn="l" defTabSz="914400" rtl="0" eaLnBrk="1" fontAlgn="auto" latinLnBrk="0" hangingPunct="1">
+                  <a:lnSpc>
+                    <a:spcPct val="100000"/>
+                  </a:lnSpc>
+                  <a:spcBef>
+                    <a:spcPts val="0"/>
+                  </a:spcBef>
+                  <a:spcAft>
+                    <a:spcPts val="0"/>
+                  </a:spcAft>
+                  <a:buClrTx/>
+                  <a:buSzTx/>
+                  <a:buFontTx/>
+                  <a:buNone/>
+                  <a:tabLst/>
+                  <a:defRPr/>
+                </a:pPr>
+                <a:endParaRPr kumimoji="0" lang="en-US" sz="1000" b="0" i="0" u="none" strike="noStrike" kern="1200" cap="none" spc="0" normalizeH="0" baseline="0" noProof="0">
+                  <a:ln>
+                    <a:noFill/>
+                  </a:ln>
+                  <a:solidFill>
+                    <a:prstClr val="black"/>
+                  </a:solidFill>
+                  <a:effectLst/>
+                  <a:uLnTx/>
+                  <a:uFillTx/>
+                  <a:ea typeface="+mn-ea"/>
+                  <a:cs typeface="+mn-cs"/>
+                </a:endParaRPr>
+              </a:p>
+            </p:txBody>
+          </p:sp>
+          <p:sp>
+            <p:nvSpPr>
+              <p:cNvPr id="23" name="TextBox 22">
+                <a:extLst>
+                  <a:ext uri="{FF2B5EF4-FFF2-40B4-BE49-F238E27FC236}">
+                    <a16:creationId xmlns:a16="http://schemas.microsoft.com/office/drawing/2014/main" id="{42224FE2-30D1-9035-A3A4-A437C4BF524D}"/>
+                  </a:ext>
+                </a:extLst>
+              </p:cNvPr>
+              <p:cNvSpPr txBox="1"/>
+              <p:nvPr/>
+            </p:nvSpPr>
+            <p:spPr>
+              <a:xfrm>
+                <a:off x="5017146" y="2915239"/>
+                <a:ext cx="285956" cy="230832"/>
+              </a:xfrm>
+              <a:prstGeom prst="rect">
+                <a:avLst/>
+              </a:prstGeom>
+              <a:noFill/>
+            </p:spPr>
+            <p:txBody>
+              <a:bodyPr wrap="square" lIns="0" rIns="0" rtlCol="0">
+                <a:spAutoFit/>
+              </a:bodyPr>
+              <a:lstStyle/>
+              <a:p>
+                <a:pPr marL="0" marR="0" lvl="0" indent="0" algn="ctr" defTabSz="914400" rtl="0" eaLnBrk="1" fontAlgn="auto" latinLnBrk="0" hangingPunct="1">
+                  <a:lnSpc>
+                    <a:spcPct val="100000"/>
+                  </a:lnSpc>
+                  <a:spcBef>
+                    <a:spcPts val="0"/>
+                  </a:spcBef>
+                  <a:spcAft>
+                    <a:spcPts val="0"/>
+                  </a:spcAft>
+                  <a:buClrTx/>
+                  <a:buSzTx/>
+                  <a:buFontTx/>
+                  <a:buNone/>
+                  <a:tabLst/>
+                  <a:defRPr/>
+                </a:pPr>
+                <a:r>
+                  <a:rPr kumimoji="0" lang="en-US" sz="900" b="0" i="0" u="none" strike="noStrike" kern="1200" cap="none" spc="0" normalizeH="0" baseline="0" noProof="0" dirty="0">
+                    <a:ln>
+                      <a:noFill/>
+                    </a:ln>
+                    <a:solidFill>
+                      <a:prstClr val="black"/>
+                    </a:solidFill>
+                    <a:effectLst/>
+                    <a:uLnTx/>
+                    <a:uFillTx/>
+                    <a:ea typeface="+mn-ea"/>
+                    <a:cs typeface="+mn-cs"/>
+                  </a:rPr>
+                  <a:t>host</a:t>
+                </a:r>
+              </a:p>
+            </p:txBody>
+          </p:sp>
+        </p:grpSp>
+      </p:grpSp>
+      <p:cxnSp>
+        <p:nvCxnSpPr>
+          <p:cNvPr id="17" name="Straight Arrow Connector 16">
+            <a:extLst>
+              <a:ext uri="{FF2B5EF4-FFF2-40B4-BE49-F238E27FC236}">
+                <a16:creationId xmlns:a16="http://schemas.microsoft.com/office/drawing/2014/main" id="{E58D11E9-E884-B98D-C7B8-50308964A9BB}"/>
+              </a:ext>
+            </a:extLst>
+          </p:cNvPr>
+          <p:cNvCxnSpPr>
+            <a:cxnSpLocks/>
+            <a:endCxn id="16" idx="2"/>
+          </p:cNvCxnSpPr>
+          <p:nvPr/>
+        </p:nvCxnSpPr>
+        <p:spPr>
+          <a:xfrm flipV="1">
+            <a:off x="6149118" y="3450499"/>
+            <a:ext cx="153590" cy="321432"/>
+          </a:xfrm>
+          <a:prstGeom prst="straightConnector1">
+            <a:avLst/>
+          </a:prstGeom>
+          <a:ln w="12700">
+            <a:solidFill>
+              <a:schemeClr val="tx1"/>
+            </a:solidFill>
+            <a:headEnd type="triangle" w="med" len="med"/>
+            <a:tailEnd type="none" w="med" len="med"/>
+          </a:ln>
+        </p:spPr>
+        <p:style>
+          <a:lnRef idx="1">
+            <a:schemeClr val="accent1"/>
+          </a:lnRef>
+          <a:fillRef idx="0">
+            <a:schemeClr val="accent1"/>
+          </a:fillRef>
+          <a:effectRef idx="0">
+            <a:schemeClr val="accent1"/>
+          </a:effectRef>
+          <a:fontRef idx="minor">
+            <a:schemeClr val="tx1"/>
+          </a:fontRef>
+        </p:style>
+      </p:cxnSp>
+      <p:grpSp>
+        <p:nvGrpSpPr>
+          <p:cNvPr id="18" name="Group 17">
+            <a:extLst>
+              <a:ext uri="{FF2B5EF4-FFF2-40B4-BE49-F238E27FC236}">
+                <a16:creationId xmlns:a16="http://schemas.microsoft.com/office/drawing/2014/main" id="{0965E86A-1C94-A558-145A-CBC2E89E62AD}"/>
+              </a:ext>
+            </a:extLst>
+          </p:cNvPr>
+          <p:cNvGrpSpPr/>
+          <p:nvPr/>
+        </p:nvGrpSpPr>
+        <p:grpSpPr>
+          <a:xfrm>
+            <a:off x="5720229" y="3725747"/>
+            <a:ext cx="771421" cy="991032"/>
+            <a:chOff x="3816079" y="4223863"/>
+            <a:chExt cx="771421" cy="991032"/>
+          </a:xfrm>
+        </p:grpSpPr>
+        <p:sp>
+          <p:nvSpPr>
+            <p:cNvPr id="19" name="Rectangle 18">
+              <a:extLst>
+                <a:ext uri="{FF2B5EF4-FFF2-40B4-BE49-F238E27FC236}">
+                  <a16:creationId xmlns:a16="http://schemas.microsoft.com/office/drawing/2014/main" id="{D1423ABE-B95A-39BF-B25A-51AE295D7BCC}"/>
+                </a:ext>
+              </a:extLst>
+            </p:cNvPr>
+            <p:cNvSpPr/>
+            <p:nvPr/>
+          </p:nvSpPr>
+          <p:spPr>
+            <a:xfrm>
+              <a:off x="3816079" y="4722603"/>
+              <a:ext cx="771421" cy="250978"/>
+            </a:xfrm>
+            <a:prstGeom prst="rect">
+              <a:avLst/>
+            </a:prstGeom>
+            <a:solidFill>
+              <a:schemeClr val="bg1">
+                <a:lumMod val="95000"/>
+              </a:schemeClr>
+            </a:solidFill>
+            <a:ln w="19050">
+              <a:solidFill>
+                <a:schemeClr val="bg2"/>
+              </a:solidFill>
+            </a:ln>
+          </p:spPr>
+          <p:style>
+            <a:lnRef idx="2">
+              <a:schemeClr val="accent1">
+                <a:shade val="50000"/>
+              </a:schemeClr>
+            </a:lnRef>
+            <a:fillRef idx="1">
+              <a:schemeClr val="accent1"/>
+            </a:fillRef>
+            <a:effectRef idx="0">
+              <a:schemeClr val="accent1"/>
+            </a:effectRef>
+            <a:fontRef idx="minor">
+              <a:schemeClr val="lt1"/>
+            </a:fontRef>
+          </p:style>
+          <p:txBody>
+            <a:bodyPr lIns="0" rIns="0" rtlCol="0" anchor="ctr"/>
+            <a:lstStyle/>
+            <a:p>
+              <a:pPr marL="0" marR="0" lvl="0" indent="0" algn="ctr" defTabSz="914400" rtl="0" eaLnBrk="1" fontAlgn="auto" latinLnBrk="0" hangingPunct="1">
+                <a:lnSpc>
+                  <a:spcPct val="100000"/>
+                </a:lnSpc>
+                <a:spcBef>
+                  <a:spcPts val="0"/>
+                </a:spcBef>
+                <a:spcAft>
+                  <a:spcPts val="0"/>
+                </a:spcAft>
+                <a:buClrTx/>
+                <a:buSzTx/>
+                <a:buFontTx/>
+                <a:buNone/>
+                <a:tabLst/>
+                <a:defRPr/>
+              </a:pPr>
+              <a:r>
+                <a:rPr kumimoji="0" lang="en-US" sz="900" b="0" i="0" u="none" strike="noStrike" kern="1200" cap="none" spc="0" normalizeH="0" baseline="0" noProof="0" dirty="0">
+                  <a:ln>
+                    <a:noFill/>
+                  </a:ln>
+                  <a:solidFill>
+                    <a:prstClr val="black"/>
+                  </a:solidFill>
+                  <a:effectLst/>
+                  <a:uLnTx/>
+                  <a:uFillTx/>
+                  <a:ea typeface="+mn-ea"/>
+                  <a:cs typeface="+mn-cs"/>
+                </a:rPr>
+                <a:t>Server</a:t>
+              </a:r>
+            </a:p>
+            <a:p>
+              <a:pPr marL="0" marR="0" lvl="0" indent="0" algn="ctr" defTabSz="914400" rtl="0" eaLnBrk="1" fontAlgn="auto" latinLnBrk="0" hangingPunct="1">
+                <a:lnSpc>
+                  <a:spcPct val="100000"/>
+                </a:lnSpc>
+                <a:spcBef>
+                  <a:spcPts val="0"/>
+                </a:spcBef>
+                <a:spcAft>
+                  <a:spcPts val="0"/>
+                </a:spcAft>
+                <a:buClrTx/>
+                <a:buSzTx/>
+                <a:buFontTx/>
+                <a:buNone/>
+                <a:tabLst/>
+                <a:defRPr/>
+              </a:pPr>
+              <a:r>
+                <a:rPr kumimoji="0" lang="en-US" sz="900" b="0" i="0" u="none" strike="noStrike" kern="1200" cap="none" spc="0" normalizeH="0" baseline="0" noProof="0" dirty="0">
+                  <a:ln>
+                    <a:noFill/>
+                  </a:ln>
+                  <a:solidFill>
+                    <a:prstClr val="black"/>
+                  </a:solidFill>
+                  <a:effectLst/>
+                  <a:uLnTx/>
+                  <a:uFillTx/>
+                  <a:ea typeface="+mn-ea"/>
+                  <a:cs typeface="+mn-cs"/>
+                </a:rPr>
+                <a:t>Platform</a:t>
+              </a:r>
+            </a:p>
+          </p:txBody>
+        </p:sp>
+        <p:sp>
+          <p:nvSpPr>
+            <p:cNvPr id="20" name="Rectangle: Rounded Corners 19">
+              <a:extLst>
+                <a:ext uri="{FF2B5EF4-FFF2-40B4-BE49-F238E27FC236}">
+                  <a16:creationId xmlns:a16="http://schemas.microsoft.com/office/drawing/2014/main" id="{78CF353B-5D46-A40D-867F-63CF5553D636}"/>
+                </a:ext>
+              </a:extLst>
+            </p:cNvPr>
+            <p:cNvSpPr/>
+            <p:nvPr/>
+          </p:nvSpPr>
+          <p:spPr>
+            <a:xfrm>
+              <a:off x="3816080" y="4399416"/>
+              <a:ext cx="771420" cy="815479"/>
+            </a:xfrm>
+            <a:prstGeom prst="roundRect">
+              <a:avLst/>
+            </a:prstGeom>
+            <a:noFill/>
+            <a:ln w="19050">
+              <a:solidFill>
+                <a:schemeClr val="tx1"/>
+              </a:solidFill>
+            </a:ln>
+          </p:spPr>
+          <p:style>
+            <a:lnRef idx="2">
+              <a:schemeClr val="accent1">
+                <a:shade val="50000"/>
+              </a:schemeClr>
+            </a:lnRef>
+            <a:fillRef idx="1">
+              <a:schemeClr val="accent1"/>
+            </a:fillRef>
+            <a:effectRef idx="0">
+              <a:schemeClr val="accent1"/>
+            </a:effectRef>
+            <a:fontRef idx="minor">
+              <a:schemeClr val="lt1"/>
+            </a:fontRef>
+          </p:style>
+          <p:txBody>
+            <a:bodyPr lIns="45720" tIns="0" bIns="9144" rtlCol="0" anchor="b" anchorCtr="0"/>
+            <a:lstStyle/>
+            <a:p>
+              <a:pPr lvl="0">
+                <a:defRPr/>
+              </a:pPr>
+              <a:r>
+                <a:rPr lang="en-US" sz="800" dirty="0">
+                  <a:solidFill>
+                    <a:prstClr val="black"/>
+                  </a:solidFill>
+                </a:rPr>
+                <a:t>Server-2</a:t>
+              </a:r>
+              <a:endParaRPr kumimoji="0" lang="en-US" sz="800" b="0" i="0" u="none" strike="noStrike" kern="1200" cap="none" spc="0" normalizeH="0" baseline="0" noProof="0" dirty="0">
+                <a:ln>
+                  <a:noFill/>
+                </a:ln>
+                <a:solidFill>
+                  <a:prstClr val="black"/>
+                </a:solidFill>
+                <a:effectLst/>
+                <a:uLnTx/>
+                <a:uFillTx/>
+                <a:ea typeface="+mn-ea"/>
+                <a:cs typeface="+mn-cs"/>
+              </a:endParaRPr>
+            </a:p>
+          </p:txBody>
+        </p:sp>
+        <p:sp>
+          <p:nvSpPr>
+            <p:cNvPr id="21" name="Arrow: Chevron 20">
+              <a:extLst>
+                <a:ext uri="{FF2B5EF4-FFF2-40B4-BE49-F238E27FC236}">
+                  <a16:creationId xmlns:a16="http://schemas.microsoft.com/office/drawing/2014/main" id="{C60B1716-C9A4-F253-E974-95F1F394129E}"/>
+                </a:ext>
+              </a:extLst>
+            </p:cNvPr>
+            <p:cNvSpPr/>
+            <p:nvPr/>
+          </p:nvSpPr>
+          <p:spPr>
+            <a:xfrm rot="5400000">
+              <a:off x="4026243" y="4166150"/>
+              <a:ext cx="351106" cy="466531"/>
+            </a:xfrm>
+            <a:prstGeom prst="chevron">
+              <a:avLst>
+                <a:gd name="adj" fmla="val 14000"/>
+              </a:avLst>
+            </a:prstGeom>
+            <a:solidFill>
+              <a:schemeClr val="bg1"/>
+            </a:solidFill>
+            <a:ln w="12700">
+              <a:solidFill>
+                <a:schemeClr val="tx1"/>
+              </a:solidFill>
+            </a:ln>
+          </p:spPr>
+          <p:style>
+            <a:lnRef idx="2">
+              <a:schemeClr val="accent1">
+                <a:shade val="50000"/>
+              </a:schemeClr>
+            </a:lnRef>
+            <a:fillRef idx="1">
+              <a:schemeClr val="accent1"/>
+            </a:fillRef>
+            <a:effectRef idx="0">
+              <a:schemeClr val="accent1"/>
+            </a:effectRef>
+            <a:fontRef idx="minor">
+              <a:schemeClr val="lt1"/>
+            </a:fontRef>
+          </p:style>
+          <p:txBody>
+            <a:bodyPr tIns="0" rtlCol="0" anchor="t" anchorCtr="0"/>
+            <a:lstStyle/>
+            <a:p>
+              <a:pPr marL="0" marR="0" lvl="0" indent="0" algn="l" defTabSz="914400" rtl="0" eaLnBrk="1" fontAlgn="auto" latinLnBrk="0" hangingPunct="1">
+                <a:lnSpc>
+                  <a:spcPct val="100000"/>
+                </a:lnSpc>
+                <a:spcBef>
+                  <a:spcPts val="0"/>
+                </a:spcBef>
+                <a:spcAft>
+                  <a:spcPts val="0"/>
+                </a:spcAft>
+                <a:buClrTx/>
+                <a:buSzTx/>
+                <a:buFontTx/>
+                <a:buNone/>
+                <a:tabLst/>
+                <a:defRPr/>
+              </a:pPr>
+              <a:endParaRPr kumimoji="0" lang="en-US" sz="1000" b="0" i="0" u="none" strike="noStrike" kern="1200" cap="none" spc="0" normalizeH="0" baseline="0" noProof="0">
+                <a:ln>
+                  <a:noFill/>
+                </a:ln>
+                <a:solidFill>
+                  <a:prstClr val="black"/>
+                </a:solidFill>
+                <a:effectLst/>
+                <a:uLnTx/>
+                <a:uFillTx/>
+                <a:ea typeface="+mn-ea"/>
+                <a:cs typeface="+mn-cs"/>
+              </a:endParaRPr>
+            </a:p>
+          </p:txBody>
+        </p:sp>
+        <p:sp>
+          <p:nvSpPr>
+            <p:cNvPr id="22" name="TextBox 21">
+              <a:extLst>
+                <a:ext uri="{FF2B5EF4-FFF2-40B4-BE49-F238E27FC236}">
+                  <a16:creationId xmlns:a16="http://schemas.microsoft.com/office/drawing/2014/main" id="{F268AEC8-6C38-0232-0F56-5A4E5946BD1B}"/>
+                </a:ext>
+              </a:extLst>
+            </p:cNvPr>
+            <p:cNvSpPr txBox="1"/>
+            <p:nvPr/>
+          </p:nvSpPr>
+          <p:spPr>
+            <a:xfrm>
+              <a:off x="3995650" y="4276305"/>
+              <a:ext cx="412292" cy="230832"/>
+            </a:xfrm>
+            <a:prstGeom prst="rect">
+              <a:avLst/>
+            </a:prstGeom>
+            <a:noFill/>
+          </p:spPr>
+          <p:txBody>
+            <a:bodyPr wrap="square" rtlCol="0">
+              <a:spAutoFit/>
+            </a:bodyPr>
+            <a:lstStyle/>
+            <a:p>
+              <a:pPr marL="0" marR="0" lvl="0" indent="0" algn="l" defTabSz="914400" rtl="0" eaLnBrk="1" fontAlgn="auto" latinLnBrk="0" hangingPunct="1">
+                <a:lnSpc>
+                  <a:spcPct val="100000"/>
+                </a:lnSpc>
+                <a:spcBef>
+                  <a:spcPts val="0"/>
+                </a:spcBef>
+                <a:spcAft>
+                  <a:spcPts val="0"/>
+                </a:spcAft>
+                <a:buClrTx/>
+                <a:buSzTx/>
+                <a:buFontTx/>
+                <a:buNone/>
+                <a:tabLst/>
+                <a:defRPr/>
+              </a:pPr>
+              <a:r>
+                <a:rPr kumimoji="0" lang="en-US" sz="900" b="0" i="0" u="none" strike="noStrike" kern="1200" cap="none" spc="0" normalizeH="0" baseline="0" noProof="0" dirty="0">
+                  <a:ln>
+                    <a:noFill/>
+                  </a:ln>
+                  <a:solidFill>
+                    <a:prstClr val="black"/>
+                  </a:solidFill>
+                  <a:effectLst/>
+                  <a:uLnTx/>
+                  <a:uFillTx/>
+                  <a:ea typeface="+mn-ea"/>
+                  <a:cs typeface="+mn-cs"/>
+                </a:rPr>
+                <a:t>host</a:t>
+              </a:r>
+            </a:p>
+          </p:txBody>
+        </p:sp>
+      </p:grpSp>
+      <p:grpSp>
+        <p:nvGrpSpPr>
+          <p:cNvPr id="9" name="Group 8">
+            <a:extLst>
+              <a:ext uri="{FF2B5EF4-FFF2-40B4-BE49-F238E27FC236}">
+                <a16:creationId xmlns:a16="http://schemas.microsoft.com/office/drawing/2014/main" id="{38983788-9062-D8A3-6D54-EADBC6687F98}"/>
+              </a:ext>
+            </a:extLst>
+          </p:cNvPr>
+          <p:cNvGrpSpPr/>
+          <p:nvPr/>
+        </p:nvGrpSpPr>
+        <p:grpSpPr>
+          <a:xfrm>
+            <a:off x="6756131" y="3725747"/>
+            <a:ext cx="771421" cy="991032"/>
+            <a:chOff x="3816079" y="4223863"/>
+            <a:chExt cx="771421" cy="991032"/>
+          </a:xfrm>
+        </p:grpSpPr>
+        <p:sp>
+          <p:nvSpPr>
+            <p:cNvPr id="10" name="Rectangle 9">
+              <a:extLst>
+                <a:ext uri="{FF2B5EF4-FFF2-40B4-BE49-F238E27FC236}">
+                  <a16:creationId xmlns:a16="http://schemas.microsoft.com/office/drawing/2014/main" id="{5F76869A-41B1-B995-EFA4-2EE7542BA307}"/>
+                </a:ext>
+              </a:extLst>
+            </p:cNvPr>
+            <p:cNvSpPr/>
+            <p:nvPr/>
+          </p:nvSpPr>
+          <p:spPr>
+            <a:xfrm>
+              <a:off x="3816079" y="4722603"/>
+              <a:ext cx="771421" cy="250978"/>
+            </a:xfrm>
+            <a:prstGeom prst="rect">
+              <a:avLst/>
+            </a:prstGeom>
+            <a:solidFill>
+              <a:schemeClr val="bg1">
+                <a:lumMod val="95000"/>
+              </a:schemeClr>
+            </a:solidFill>
+            <a:ln w="19050">
+              <a:solidFill>
+                <a:schemeClr val="bg2"/>
+              </a:solidFill>
+            </a:ln>
+          </p:spPr>
+          <p:style>
+            <a:lnRef idx="2">
+              <a:schemeClr val="accent1">
+                <a:shade val="50000"/>
+              </a:schemeClr>
+            </a:lnRef>
+            <a:fillRef idx="1">
+              <a:schemeClr val="accent1"/>
+            </a:fillRef>
+            <a:effectRef idx="0">
+              <a:schemeClr val="accent1"/>
+            </a:effectRef>
+            <a:fontRef idx="minor">
+              <a:schemeClr val="lt1"/>
+            </a:fontRef>
+          </p:style>
+          <p:txBody>
+            <a:bodyPr lIns="0" rIns="0" rtlCol="0" anchor="ctr"/>
+            <a:lstStyle/>
+            <a:p>
+              <a:pPr marL="0" marR="0" lvl="0" indent="0" algn="ctr" defTabSz="914400" rtl="0" eaLnBrk="1" fontAlgn="auto" latinLnBrk="0" hangingPunct="1">
+                <a:lnSpc>
+                  <a:spcPct val="100000"/>
+                </a:lnSpc>
+                <a:spcBef>
+                  <a:spcPts val="0"/>
+                </a:spcBef>
+                <a:spcAft>
+                  <a:spcPts val="0"/>
+                </a:spcAft>
+                <a:buClrTx/>
+                <a:buSzTx/>
+                <a:buFontTx/>
+                <a:buNone/>
+                <a:tabLst/>
+                <a:defRPr/>
+              </a:pPr>
+              <a:r>
+                <a:rPr kumimoji="0" lang="en-US" sz="900" b="0" i="0" u="none" strike="noStrike" kern="1200" cap="none" spc="0" normalizeH="0" baseline="0" noProof="0" dirty="0">
+                  <a:ln>
+                    <a:noFill/>
+                  </a:ln>
+                  <a:solidFill>
+                    <a:prstClr val="black"/>
+                  </a:solidFill>
+                  <a:effectLst/>
+                  <a:uLnTx/>
+                  <a:uFillTx/>
+                  <a:ea typeface="+mn-ea"/>
+                  <a:cs typeface="+mn-cs"/>
+                </a:rPr>
+                <a:t>Server</a:t>
+              </a:r>
+            </a:p>
+            <a:p>
+              <a:pPr marL="0" marR="0" lvl="0" indent="0" algn="ctr" defTabSz="914400" rtl="0" eaLnBrk="1" fontAlgn="auto" latinLnBrk="0" hangingPunct="1">
+                <a:lnSpc>
+                  <a:spcPct val="100000"/>
+                </a:lnSpc>
+                <a:spcBef>
+                  <a:spcPts val="0"/>
+                </a:spcBef>
+                <a:spcAft>
+                  <a:spcPts val="0"/>
+                </a:spcAft>
+                <a:buClrTx/>
+                <a:buSzTx/>
+                <a:buFontTx/>
+                <a:buNone/>
+                <a:tabLst/>
+                <a:defRPr/>
+              </a:pPr>
+              <a:r>
+                <a:rPr kumimoji="0" lang="en-US" sz="900" b="0" i="0" u="none" strike="noStrike" kern="1200" cap="none" spc="0" normalizeH="0" baseline="0" noProof="0" dirty="0">
+                  <a:ln>
+                    <a:noFill/>
+                  </a:ln>
+                  <a:solidFill>
+                    <a:prstClr val="black"/>
+                  </a:solidFill>
+                  <a:effectLst/>
+                  <a:uLnTx/>
+                  <a:uFillTx/>
+                  <a:ea typeface="+mn-ea"/>
+                  <a:cs typeface="+mn-cs"/>
+                </a:rPr>
+                <a:t>Platform</a:t>
+              </a:r>
+            </a:p>
+          </p:txBody>
+        </p:sp>
+        <p:sp>
+          <p:nvSpPr>
+            <p:cNvPr id="11" name="Rectangle: Rounded Corners 10">
+              <a:extLst>
+                <a:ext uri="{FF2B5EF4-FFF2-40B4-BE49-F238E27FC236}">
+                  <a16:creationId xmlns:a16="http://schemas.microsoft.com/office/drawing/2014/main" id="{50C4CF9E-9098-7414-E53A-3622FDF1F2C1}"/>
+                </a:ext>
+              </a:extLst>
+            </p:cNvPr>
+            <p:cNvSpPr/>
+            <p:nvPr/>
+          </p:nvSpPr>
+          <p:spPr>
+            <a:xfrm>
+              <a:off x="3816080" y="4399416"/>
+              <a:ext cx="771420" cy="815479"/>
+            </a:xfrm>
+            <a:prstGeom prst="roundRect">
+              <a:avLst/>
+            </a:prstGeom>
+            <a:noFill/>
+            <a:ln w="19050">
+              <a:solidFill>
+                <a:schemeClr val="tx1"/>
+              </a:solidFill>
+            </a:ln>
+          </p:spPr>
+          <p:style>
+            <a:lnRef idx="2">
+              <a:schemeClr val="accent1">
+                <a:shade val="50000"/>
+              </a:schemeClr>
+            </a:lnRef>
+            <a:fillRef idx="1">
+              <a:schemeClr val="accent1"/>
+            </a:fillRef>
+            <a:effectRef idx="0">
+              <a:schemeClr val="accent1"/>
+            </a:effectRef>
+            <a:fontRef idx="minor">
+              <a:schemeClr val="lt1"/>
+            </a:fontRef>
+          </p:style>
+          <p:txBody>
+            <a:bodyPr lIns="45720" tIns="0" bIns="9144" rtlCol="0" anchor="b" anchorCtr="0"/>
+            <a:lstStyle/>
+            <a:p>
+              <a:pPr lvl="0">
+                <a:defRPr/>
+              </a:pPr>
+              <a:r>
+                <a:rPr lang="en-US" sz="800" dirty="0">
+                  <a:solidFill>
+                    <a:prstClr val="black"/>
+                  </a:solidFill>
+                </a:rPr>
+                <a:t>Server-3</a:t>
+              </a:r>
+              <a:endParaRPr kumimoji="0" lang="en-US" sz="800" b="0" i="0" u="none" strike="noStrike" kern="1200" cap="none" spc="0" normalizeH="0" baseline="0" noProof="0" dirty="0">
+                <a:ln>
+                  <a:noFill/>
+                </a:ln>
+                <a:solidFill>
+                  <a:prstClr val="black"/>
+                </a:solidFill>
+                <a:effectLst/>
+                <a:uLnTx/>
+                <a:uFillTx/>
+                <a:ea typeface="+mn-ea"/>
+                <a:cs typeface="+mn-cs"/>
+              </a:endParaRPr>
+            </a:p>
+          </p:txBody>
+        </p:sp>
+        <p:sp>
+          <p:nvSpPr>
+            <p:cNvPr id="12" name="Arrow: Chevron 11">
+              <a:extLst>
+                <a:ext uri="{FF2B5EF4-FFF2-40B4-BE49-F238E27FC236}">
+                  <a16:creationId xmlns:a16="http://schemas.microsoft.com/office/drawing/2014/main" id="{C6A56CA5-FF15-FDAB-A65C-821691A8EA13}"/>
+                </a:ext>
+              </a:extLst>
+            </p:cNvPr>
+            <p:cNvSpPr/>
+            <p:nvPr/>
+          </p:nvSpPr>
+          <p:spPr>
+            <a:xfrm rot="5400000">
+              <a:off x="4026243" y="4166150"/>
+              <a:ext cx="351106" cy="466531"/>
+            </a:xfrm>
+            <a:prstGeom prst="chevron">
+              <a:avLst>
+                <a:gd name="adj" fmla="val 14000"/>
+              </a:avLst>
+            </a:prstGeom>
+            <a:solidFill>
+              <a:schemeClr val="bg1"/>
+            </a:solidFill>
+            <a:ln w="12700">
+              <a:solidFill>
+                <a:schemeClr val="tx1"/>
+              </a:solidFill>
+            </a:ln>
+          </p:spPr>
+          <p:style>
+            <a:lnRef idx="2">
+              <a:schemeClr val="accent1">
+                <a:shade val="50000"/>
+              </a:schemeClr>
+            </a:lnRef>
+            <a:fillRef idx="1">
+              <a:schemeClr val="accent1"/>
+            </a:fillRef>
+            <a:effectRef idx="0">
+              <a:schemeClr val="accent1"/>
+            </a:effectRef>
+            <a:fontRef idx="minor">
+              <a:schemeClr val="lt1"/>
+            </a:fontRef>
+          </p:style>
+          <p:txBody>
+            <a:bodyPr tIns="0" rtlCol="0" anchor="t" anchorCtr="0"/>
+            <a:lstStyle/>
+            <a:p>
+              <a:pPr marL="0" marR="0" lvl="0" indent="0" algn="l" defTabSz="914400" rtl="0" eaLnBrk="1" fontAlgn="auto" latinLnBrk="0" hangingPunct="1">
+                <a:lnSpc>
+                  <a:spcPct val="100000"/>
+                </a:lnSpc>
+                <a:spcBef>
+                  <a:spcPts val="0"/>
+                </a:spcBef>
+                <a:spcAft>
+                  <a:spcPts val="0"/>
+                </a:spcAft>
+                <a:buClrTx/>
+                <a:buSzTx/>
+                <a:buFontTx/>
+                <a:buNone/>
+                <a:tabLst/>
+                <a:defRPr/>
+              </a:pPr>
+              <a:endParaRPr kumimoji="0" lang="en-US" sz="1000" b="0" i="0" u="none" strike="noStrike" kern="1200" cap="none" spc="0" normalizeH="0" baseline="0" noProof="0">
+                <a:ln>
+                  <a:noFill/>
+                </a:ln>
+                <a:solidFill>
+                  <a:prstClr val="black"/>
+                </a:solidFill>
+                <a:effectLst/>
+                <a:uLnTx/>
+                <a:uFillTx/>
+                <a:ea typeface="+mn-ea"/>
+                <a:cs typeface="+mn-cs"/>
+              </a:endParaRPr>
+            </a:p>
+          </p:txBody>
+        </p:sp>
+        <p:sp>
+          <p:nvSpPr>
+            <p:cNvPr id="13" name="TextBox 12">
+              <a:extLst>
+                <a:ext uri="{FF2B5EF4-FFF2-40B4-BE49-F238E27FC236}">
+                  <a16:creationId xmlns:a16="http://schemas.microsoft.com/office/drawing/2014/main" id="{19BA00EF-8EEE-B0E7-013E-E70BE9F3FCFF}"/>
+                </a:ext>
+              </a:extLst>
+            </p:cNvPr>
+            <p:cNvSpPr txBox="1"/>
+            <p:nvPr/>
+          </p:nvSpPr>
+          <p:spPr>
+            <a:xfrm>
+              <a:off x="3995650" y="4276305"/>
+              <a:ext cx="412292" cy="230832"/>
+            </a:xfrm>
+            <a:prstGeom prst="rect">
+              <a:avLst/>
+            </a:prstGeom>
+            <a:noFill/>
+          </p:spPr>
+          <p:txBody>
+            <a:bodyPr wrap="square" rtlCol="0">
+              <a:spAutoFit/>
+            </a:bodyPr>
+            <a:lstStyle/>
+            <a:p>
+              <a:pPr marL="0" marR="0" lvl="0" indent="0" algn="l" defTabSz="914400" rtl="0" eaLnBrk="1" fontAlgn="auto" latinLnBrk="0" hangingPunct="1">
+                <a:lnSpc>
+                  <a:spcPct val="100000"/>
+                </a:lnSpc>
+                <a:spcBef>
+                  <a:spcPts val="0"/>
+                </a:spcBef>
+                <a:spcAft>
+                  <a:spcPts val="0"/>
+                </a:spcAft>
+                <a:buClrTx/>
+                <a:buSzTx/>
+                <a:buFontTx/>
+                <a:buNone/>
+                <a:tabLst/>
+                <a:defRPr/>
+              </a:pPr>
+              <a:r>
+                <a:rPr kumimoji="0" lang="en-US" sz="900" b="0" i="0" u="none" strike="noStrike" kern="1200" cap="none" spc="0" normalizeH="0" baseline="0" noProof="0" dirty="0">
+                  <a:ln>
+                    <a:noFill/>
+                  </a:ln>
+                  <a:solidFill>
+                    <a:prstClr val="black"/>
+                  </a:solidFill>
+                  <a:effectLst/>
+                  <a:uLnTx/>
+                  <a:uFillTx/>
+                  <a:ea typeface="+mn-ea"/>
+                  <a:cs typeface="+mn-cs"/>
+                </a:rPr>
+                <a:t>host</a:t>
+              </a:r>
+            </a:p>
+          </p:txBody>
+        </p:sp>
+      </p:grpSp>
+      <p:cxnSp>
+        <p:nvCxnSpPr>
+          <p:cNvPr id="15" name="Straight Arrow Connector 14">
+            <a:extLst>
+              <a:ext uri="{FF2B5EF4-FFF2-40B4-BE49-F238E27FC236}">
+                <a16:creationId xmlns:a16="http://schemas.microsoft.com/office/drawing/2014/main" id="{9CE2AA60-048F-9707-B8D4-AC1533057B60}"/>
+              </a:ext>
+            </a:extLst>
+          </p:cNvPr>
+          <p:cNvCxnSpPr>
+            <a:cxnSpLocks/>
+            <a:stCxn id="33" idx="0"/>
+            <a:endCxn id="16" idx="2"/>
+          </p:cNvCxnSpPr>
+          <p:nvPr/>
+        </p:nvCxnSpPr>
+        <p:spPr>
+          <a:xfrm flipV="1">
+            <a:off x="5384872" y="3450499"/>
+            <a:ext cx="917836" cy="431598"/>
+          </a:xfrm>
+          <a:prstGeom prst="straightConnector1">
+            <a:avLst/>
+          </a:prstGeom>
+          <a:ln w="12700">
+            <a:solidFill>
+              <a:schemeClr val="tx1"/>
+            </a:solidFill>
+            <a:headEnd type="triangle" w="med" len="med"/>
+            <a:tailEnd type="none" w="med" len="med"/>
+          </a:ln>
+        </p:spPr>
+        <p:style>
+          <a:lnRef idx="1">
+            <a:schemeClr val="accent1"/>
+          </a:lnRef>
+          <a:fillRef idx="0">
+            <a:schemeClr val="accent1"/>
+          </a:fillRef>
+          <a:effectRef idx="0">
+            <a:schemeClr val="accent1"/>
+          </a:effectRef>
+          <a:fontRef idx="minor">
+            <a:schemeClr val="tx1"/>
+          </a:fontRef>
+        </p:style>
+      </p:cxnSp>
+      <p:cxnSp>
+        <p:nvCxnSpPr>
+          <p:cNvPr id="25" name="Straight Arrow Connector 24">
+            <a:extLst>
+              <a:ext uri="{FF2B5EF4-FFF2-40B4-BE49-F238E27FC236}">
+                <a16:creationId xmlns:a16="http://schemas.microsoft.com/office/drawing/2014/main" id="{EE661CC2-B4A9-39AC-6DFE-1DFC81B81F03}"/>
+              </a:ext>
+            </a:extLst>
+          </p:cNvPr>
+          <p:cNvCxnSpPr>
+            <a:cxnSpLocks/>
+            <a:stCxn id="12" idx="1"/>
+            <a:endCxn id="16" idx="2"/>
+          </p:cNvCxnSpPr>
+          <p:nvPr/>
+        </p:nvCxnSpPr>
+        <p:spPr>
+          <a:xfrm flipH="1" flipV="1">
+            <a:off x="6302708" y="3450499"/>
+            <a:ext cx="839140" cy="324403"/>
+          </a:xfrm>
+          <a:prstGeom prst="straightConnector1">
+            <a:avLst/>
+          </a:prstGeom>
+          <a:ln w="12700">
+            <a:solidFill>
+              <a:schemeClr val="tx1"/>
+            </a:solidFill>
+            <a:headEnd type="triangle" w="med" len="med"/>
+            <a:tailEnd type="none" w="med" len="med"/>
+          </a:ln>
+        </p:spPr>
+        <p:style>
+          <a:lnRef idx="1">
+            <a:schemeClr val="accent1"/>
+          </a:lnRef>
+          <a:fillRef idx="0">
+            <a:schemeClr val="accent1"/>
+          </a:fillRef>
+          <a:effectRef idx="0">
+            <a:schemeClr val="accent1"/>
+          </a:effectRef>
+          <a:fontRef idx="minor">
+            <a:schemeClr val="tx1"/>
+          </a:fontRef>
+        </p:style>
+      </p:cxnSp>
+      <p:grpSp>
+        <p:nvGrpSpPr>
+          <p:cNvPr id="46" name="Group 45">
+            <a:extLst>
+              <a:ext uri="{FF2B5EF4-FFF2-40B4-BE49-F238E27FC236}">
+                <a16:creationId xmlns:a16="http://schemas.microsoft.com/office/drawing/2014/main" id="{2DF1C4E2-20A7-BDF0-6EB5-2A00CD6A9199}"/>
+              </a:ext>
+            </a:extLst>
+          </p:cNvPr>
+          <p:cNvGrpSpPr/>
+          <p:nvPr/>
+        </p:nvGrpSpPr>
+        <p:grpSpPr>
+          <a:xfrm>
+            <a:off x="4679465" y="3764139"/>
+            <a:ext cx="776284" cy="952640"/>
+            <a:chOff x="4472071" y="3660442"/>
+            <a:chExt cx="776284" cy="952640"/>
+          </a:xfrm>
+        </p:grpSpPr>
+        <p:sp>
+          <p:nvSpPr>
+            <p:cNvPr id="4" name="Rectangle 3">
+              <a:extLst>
+                <a:ext uri="{FF2B5EF4-FFF2-40B4-BE49-F238E27FC236}">
+                  <a16:creationId xmlns:a16="http://schemas.microsoft.com/office/drawing/2014/main" id="{3F6342D2-2BD2-3F2F-12EC-A146021CED14}"/>
+                </a:ext>
+              </a:extLst>
+            </p:cNvPr>
+            <p:cNvSpPr/>
+            <p:nvPr/>
+          </p:nvSpPr>
+          <p:spPr>
+            <a:xfrm>
+              <a:off x="4476934" y="4120790"/>
+              <a:ext cx="771421" cy="250978"/>
+            </a:xfrm>
+            <a:prstGeom prst="rect">
+              <a:avLst/>
+            </a:prstGeom>
+            <a:solidFill>
+              <a:schemeClr val="bg1">
+                <a:lumMod val="95000"/>
+              </a:schemeClr>
+            </a:solidFill>
+            <a:ln w="19050">
+              <a:solidFill>
+                <a:schemeClr val="bg2"/>
+              </a:solidFill>
+            </a:ln>
+          </p:spPr>
+          <p:style>
+            <a:lnRef idx="2">
+              <a:schemeClr val="accent1">
+                <a:shade val="50000"/>
+              </a:schemeClr>
+            </a:lnRef>
+            <a:fillRef idx="1">
+              <a:schemeClr val="accent1"/>
+            </a:fillRef>
+            <a:effectRef idx="0">
+              <a:schemeClr val="accent1"/>
+            </a:effectRef>
+            <a:fontRef idx="minor">
+              <a:schemeClr val="lt1"/>
+            </a:fontRef>
+          </p:style>
+          <p:txBody>
+            <a:bodyPr lIns="0" rIns="0" rtlCol="0" anchor="ctr"/>
+            <a:lstStyle/>
+            <a:p>
+              <a:pPr marL="0" marR="0" lvl="0" indent="0" algn="ctr" defTabSz="914400" rtl="0" eaLnBrk="1" fontAlgn="auto" latinLnBrk="0" hangingPunct="1">
+                <a:lnSpc>
+                  <a:spcPct val="100000"/>
+                </a:lnSpc>
+                <a:spcBef>
+                  <a:spcPts val="0"/>
+                </a:spcBef>
+                <a:spcAft>
+                  <a:spcPts val="0"/>
+                </a:spcAft>
+                <a:buClrTx/>
+                <a:buSzTx/>
+                <a:buFontTx/>
+                <a:buNone/>
+                <a:tabLst/>
+                <a:defRPr/>
+              </a:pPr>
+              <a:r>
+                <a:rPr kumimoji="0" lang="en-US" sz="900" b="0" i="0" u="none" strike="noStrike" kern="1200" cap="none" spc="0" normalizeH="0" baseline="0" noProof="0" dirty="0">
+                  <a:ln>
+                    <a:noFill/>
+                  </a:ln>
+                  <a:solidFill>
+                    <a:prstClr val="black"/>
+                  </a:solidFill>
+                  <a:effectLst/>
+                  <a:uLnTx/>
+                  <a:uFillTx/>
+                  <a:ea typeface="+mn-ea"/>
+                  <a:cs typeface="+mn-cs"/>
+                </a:rPr>
+                <a:t>Server</a:t>
+              </a:r>
+            </a:p>
+            <a:p>
+              <a:pPr marL="0" marR="0" lvl="0" indent="0" algn="ctr" defTabSz="914400" rtl="0" eaLnBrk="1" fontAlgn="auto" latinLnBrk="0" hangingPunct="1">
+                <a:lnSpc>
+                  <a:spcPct val="100000"/>
+                </a:lnSpc>
+                <a:spcBef>
+                  <a:spcPts val="0"/>
+                </a:spcBef>
+                <a:spcAft>
+                  <a:spcPts val="0"/>
+                </a:spcAft>
+                <a:buClrTx/>
+                <a:buSzTx/>
+                <a:buFontTx/>
+                <a:buNone/>
+                <a:tabLst/>
+                <a:defRPr/>
+              </a:pPr>
+              <a:r>
+                <a:rPr kumimoji="0" lang="en-US" sz="900" b="0" i="0" u="none" strike="noStrike" kern="1200" cap="none" spc="0" normalizeH="0" baseline="0" noProof="0" dirty="0">
+                  <a:ln>
+                    <a:noFill/>
+                  </a:ln>
+                  <a:solidFill>
+                    <a:prstClr val="black"/>
+                  </a:solidFill>
+                  <a:effectLst/>
+                  <a:uLnTx/>
+                  <a:uFillTx/>
+                  <a:ea typeface="+mn-ea"/>
+                  <a:cs typeface="+mn-cs"/>
+                </a:rPr>
+                <a:t>Platform</a:t>
+              </a:r>
+            </a:p>
+          </p:txBody>
+        </p:sp>
+        <p:sp>
+          <p:nvSpPr>
+            <p:cNvPr id="5" name="Rectangle: Rounded Corners 4">
+              <a:extLst>
+                <a:ext uri="{FF2B5EF4-FFF2-40B4-BE49-F238E27FC236}">
+                  <a16:creationId xmlns:a16="http://schemas.microsoft.com/office/drawing/2014/main" id="{C2B03128-B2AD-BACE-B928-B415473EEF22}"/>
+                </a:ext>
+              </a:extLst>
+            </p:cNvPr>
+            <p:cNvSpPr/>
+            <p:nvPr/>
+          </p:nvSpPr>
+          <p:spPr>
+            <a:xfrm>
+              <a:off x="4476935" y="3797603"/>
+              <a:ext cx="771420" cy="815479"/>
+            </a:xfrm>
+            <a:prstGeom prst="roundRect">
+              <a:avLst/>
+            </a:prstGeom>
+            <a:noFill/>
+            <a:ln w="19050">
+              <a:solidFill>
+                <a:schemeClr val="tx1"/>
+              </a:solidFill>
+            </a:ln>
+          </p:spPr>
+          <p:style>
+            <a:lnRef idx="2">
+              <a:schemeClr val="accent1">
+                <a:shade val="50000"/>
+              </a:schemeClr>
+            </a:lnRef>
+            <a:fillRef idx="1">
+              <a:schemeClr val="accent1"/>
+            </a:fillRef>
+            <a:effectRef idx="0">
+              <a:schemeClr val="accent1"/>
+            </a:effectRef>
+            <a:fontRef idx="minor">
+              <a:schemeClr val="lt1"/>
+            </a:fontRef>
+          </p:style>
+          <p:txBody>
+            <a:bodyPr lIns="45720" tIns="0" bIns="9144" rtlCol="0" anchor="b" anchorCtr="0"/>
+            <a:lstStyle/>
+            <a:p>
+              <a:pPr lvl="0">
+                <a:defRPr/>
+              </a:pPr>
+              <a:r>
+                <a:rPr lang="en-US" sz="800" dirty="0">
+                  <a:solidFill>
+                    <a:prstClr val="black"/>
+                  </a:solidFill>
+                </a:rPr>
+                <a:t>Server-1</a:t>
+              </a:r>
+              <a:endParaRPr kumimoji="0" lang="en-US" sz="800" b="0" i="0" u="none" strike="noStrike" kern="1200" cap="none" spc="0" normalizeH="0" baseline="0" noProof="0" dirty="0">
+                <a:ln>
+                  <a:noFill/>
+                </a:ln>
+                <a:solidFill>
+                  <a:prstClr val="black"/>
+                </a:solidFill>
+                <a:effectLst/>
+                <a:uLnTx/>
+                <a:uFillTx/>
+                <a:ea typeface="+mn-ea"/>
+                <a:cs typeface="+mn-cs"/>
+              </a:endParaRPr>
+            </a:p>
+          </p:txBody>
+        </p:sp>
+        <p:grpSp>
+          <p:nvGrpSpPr>
+            <p:cNvPr id="43" name="Group 42">
+              <a:extLst>
+                <a:ext uri="{FF2B5EF4-FFF2-40B4-BE49-F238E27FC236}">
+                  <a16:creationId xmlns:a16="http://schemas.microsoft.com/office/drawing/2014/main" id="{75421F49-5858-B04E-3447-24F0CF1D165A}"/>
+                </a:ext>
+              </a:extLst>
+            </p:cNvPr>
+            <p:cNvGrpSpPr/>
+            <p:nvPr/>
+          </p:nvGrpSpPr>
+          <p:grpSpPr>
+            <a:xfrm>
+              <a:off x="4472071" y="3660442"/>
+              <a:ext cx="772086" cy="274320"/>
+              <a:chOff x="2171837" y="2443293"/>
+              <a:chExt cx="772086" cy="274320"/>
+            </a:xfrm>
+          </p:grpSpPr>
+          <p:grpSp>
+            <p:nvGrpSpPr>
+              <p:cNvPr id="41" name="Group 40">
+                <a:extLst>
+                  <a:ext uri="{FF2B5EF4-FFF2-40B4-BE49-F238E27FC236}">
+                    <a16:creationId xmlns:a16="http://schemas.microsoft.com/office/drawing/2014/main" id="{B460EE91-8F4A-C607-FBF9-AEF9F0222ADA}"/>
+                  </a:ext>
+                </a:extLst>
+              </p:cNvPr>
+              <p:cNvGrpSpPr/>
+              <p:nvPr/>
+            </p:nvGrpSpPr>
+            <p:grpSpPr>
+              <a:xfrm>
+                <a:off x="2171837" y="2443293"/>
+                <a:ext cx="412292" cy="274320"/>
+                <a:chOff x="2171837" y="2443293"/>
+                <a:chExt cx="412292" cy="274320"/>
+              </a:xfrm>
+            </p:grpSpPr>
+            <p:sp>
+              <p:nvSpPr>
+                <p:cNvPr id="31" name="Arrow: Chevron 30">
+                  <a:extLst>
+                    <a:ext uri="{FF2B5EF4-FFF2-40B4-BE49-F238E27FC236}">
+                      <a16:creationId xmlns:a16="http://schemas.microsoft.com/office/drawing/2014/main" id="{E33BF713-5749-D825-4DD3-1F73586886D5}"/>
+                    </a:ext>
+                  </a:extLst>
+                </p:cNvPr>
+                <p:cNvSpPr>
+                  <a:spLocks/>
+                </p:cNvSpPr>
+                <p:nvPr/>
+              </p:nvSpPr>
+              <p:spPr>
+                <a:xfrm rot="5400000">
+                  <a:off x="2240823" y="2429577"/>
+                  <a:ext cx="274320" cy="301752"/>
+                </a:xfrm>
+                <a:prstGeom prst="chevron">
+                  <a:avLst>
+                    <a:gd name="adj" fmla="val 14000"/>
+                  </a:avLst>
+                </a:prstGeom>
+                <a:solidFill>
+                  <a:schemeClr val="bg1"/>
+                </a:solidFill>
+                <a:ln w="12700">
+                  <a:solidFill>
+                    <a:schemeClr val="tx1"/>
+                  </a:solidFill>
+                </a:ln>
+              </p:spPr>
+              <p:style>
+                <a:lnRef idx="2">
+                  <a:schemeClr val="accent1">
+                    <a:shade val="50000"/>
+                  </a:schemeClr>
+                </a:lnRef>
+                <a:fillRef idx="1">
+                  <a:schemeClr val="accent1"/>
+                </a:fillRef>
+                <a:effectRef idx="0">
+                  <a:schemeClr val="accent1"/>
+                </a:effectRef>
+                <a:fontRef idx="minor">
+                  <a:schemeClr val="lt1"/>
+                </a:fontRef>
+              </p:style>
+              <p:txBody>
+                <a:bodyPr tIns="0" rtlCol="0" anchor="t" anchorCtr="0"/>
+                <a:lstStyle/>
+                <a:p>
+                  <a:pPr marL="0" marR="0" lvl="0" indent="0" algn="ctr" defTabSz="914400" rtl="0" eaLnBrk="1" fontAlgn="auto" latinLnBrk="0" hangingPunct="1">
+                    <a:lnSpc>
+                      <a:spcPct val="100000"/>
+                    </a:lnSpc>
+                    <a:spcBef>
+                      <a:spcPts val="0"/>
+                    </a:spcBef>
+                    <a:spcAft>
+                      <a:spcPts val="0"/>
+                    </a:spcAft>
+                    <a:buClrTx/>
+                    <a:buSzTx/>
+                    <a:buFontTx/>
+                    <a:buNone/>
+                    <a:tabLst/>
+                    <a:defRPr/>
+                  </a:pPr>
+                  <a:endParaRPr kumimoji="0" lang="en-US" sz="1000" b="0" i="0" u="none" strike="noStrike" kern="1200" cap="none" spc="0" normalizeH="0" baseline="0" noProof="0">
+                    <a:ln>
+                      <a:noFill/>
+                    </a:ln>
+                    <a:solidFill>
+                      <a:prstClr val="black"/>
+                    </a:solidFill>
+                    <a:effectLst/>
+                    <a:uLnTx/>
+                    <a:uFillTx/>
+                    <a:ea typeface="+mn-ea"/>
+                    <a:cs typeface="+mn-cs"/>
+                  </a:endParaRPr>
+                </a:p>
+              </p:txBody>
+            </p:sp>
+            <p:sp>
+              <p:nvSpPr>
+                <p:cNvPr id="32" name="TextBox 31">
+                  <a:extLst>
+                    <a:ext uri="{FF2B5EF4-FFF2-40B4-BE49-F238E27FC236}">
+                      <a16:creationId xmlns:a16="http://schemas.microsoft.com/office/drawing/2014/main" id="{C6E9D265-1678-44B6-6445-581052C2809D}"/>
+                    </a:ext>
+                  </a:extLst>
+                </p:cNvPr>
+                <p:cNvSpPr txBox="1"/>
+                <p:nvPr/>
+              </p:nvSpPr>
+              <p:spPr>
+                <a:xfrm>
+                  <a:off x="2171837" y="2495736"/>
+                  <a:ext cx="412292" cy="138499"/>
+                </a:xfrm>
+                <a:prstGeom prst="rect">
+                  <a:avLst/>
+                </a:prstGeom>
+                <a:noFill/>
+              </p:spPr>
+              <p:txBody>
+                <a:bodyPr wrap="square" lIns="0" tIns="0" rIns="0" bIns="0" rtlCol="0">
+                  <a:spAutoFit/>
+                </a:bodyPr>
+                <a:lstStyle/>
+                <a:p>
+                  <a:pPr marL="0" marR="0" lvl="0" indent="0" algn="ctr" defTabSz="914400" rtl="0" eaLnBrk="1" fontAlgn="auto" latinLnBrk="0" hangingPunct="1">
+                    <a:lnSpc>
+                      <a:spcPct val="100000"/>
+                    </a:lnSpc>
+                    <a:spcBef>
+                      <a:spcPts val="0"/>
+                    </a:spcBef>
+                    <a:spcAft>
+                      <a:spcPts val="0"/>
+                    </a:spcAft>
+                    <a:buClrTx/>
+                    <a:buSzTx/>
+                    <a:buFontTx/>
+                    <a:buNone/>
+                    <a:tabLst/>
+                    <a:defRPr/>
+                  </a:pPr>
+                  <a:r>
+                    <a:rPr kumimoji="0" lang="en-US" sz="900" b="0" i="0" u="none" strike="noStrike" kern="1200" cap="none" spc="0" normalizeH="0" baseline="0" noProof="0" dirty="0">
+                      <a:ln>
+                        <a:noFill/>
+                      </a:ln>
+                      <a:solidFill>
+                        <a:prstClr val="black"/>
+                      </a:solidFill>
+                      <a:effectLst/>
+                      <a:uLnTx/>
+                      <a:uFillTx/>
+                      <a:ea typeface="+mn-ea"/>
+                      <a:cs typeface="+mn-cs"/>
+                    </a:rPr>
+                    <a:t>exec</a:t>
+                  </a:r>
+                </a:p>
+              </p:txBody>
+            </p:sp>
+          </p:grpSp>
+          <p:grpSp>
+            <p:nvGrpSpPr>
+              <p:cNvPr id="42" name="Group 41">
+                <a:extLst>
+                  <a:ext uri="{FF2B5EF4-FFF2-40B4-BE49-F238E27FC236}">
+                    <a16:creationId xmlns:a16="http://schemas.microsoft.com/office/drawing/2014/main" id="{2E810DE2-E4AA-8500-C989-D976B72DAABA}"/>
+                  </a:ext>
+                </a:extLst>
+              </p:cNvPr>
+              <p:cNvGrpSpPr/>
+              <p:nvPr/>
+            </p:nvGrpSpPr>
+            <p:grpSpPr>
+              <a:xfrm>
+                <a:off x="2531631" y="2443293"/>
+                <a:ext cx="412292" cy="274320"/>
+                <a:chOff x="2324237" y="3199009"/>
+                <a:chExt cx="412292" cy="274320"/>
+              </a:xfrm>
+            </p:grpSpPr>
+            <p:sp>
+              <p:nvSpPr>
+                <p:cNvPr id="33" name="Arrow: Chevron 32">
+                  <a:extLst>
+                    <a:ext uri="{FF2B5EF4-FFF2-40B4-BE49-F238E27FC236}">
+                      <a16:creationId xmlns:a16="http://schemas.microsoft.com/office/drawing/2014/main" id="{7D89F4A9-45E3-6D6D-FE5F-2E1F136DA3DE}"/>
+                    </a:ext>
+                  </a:extLst>
+                </p:cNvPr>
+                <p:cNvSpPr>
+                  <a:spLocks/>
+                </p:cNvSpPr>
+                <p:nvPr/>
+              </p:nvSpPr>
+              <p:spPr>
+                <a:xfrm rot="5400000">
+                  <a:off x="2381814" y="3185293"/>
+                  <a:ext cx="274320" cy="301752"/>
+                </a:xfrm>
+                <a:prstGeom prst="chevron">
+                  <a:avLst>
+                    <a:gd name="adj" fmla="val 14000"/>
+                  </a:avLst>
+                </a:prstGeom>
+                <a:solidFill>
+                  <a:schemeClr val="bg1"/>
+                </a:solidFill>
+                <a:ln w="12700">
+                  <a:solidFill>
+                    <a:schemeClr val="tx1"/>
+                  </a:solidFill>
+                </a:ln>
+              </p:spPr>
+              <p:style>
+                <a:lnRef idx="2">
+                  <a:schemeClr val="accent1">
+                    <a:shade val="50000"/>
+                  </a:schemeClr>
+                </a:lnRef>
+                <a:fillRef idx="1">
+                  <a:schemeClr val="accent1"/>
+                </a:fillRef>
+                <a:effectRef idx="0">
+                  <a:schemeClr val="accent1"/>
+                </a:effectRef>
+                <a:fontRef idx="minor">
+                  <a:schemeClr val="lt1"/>
+                </a:fontRef>
+              </p:style>
+              <p:txBody>
+                <a:bodyPr tIns="0" rtlCol="0" anchor="t" anchorCtr="0"/>
+                <a:lstStyle/>
+                <a:p>
+                  <a:pPr marL="0" marR="0" lvl="0" indent="0" algn="l" defTabSz="914400" rtl="0" eaLnBrk="1" fontAlgn="auto" latinLnBrk="0" hangingPunct="1">
+                    <a:lnSpc>
+                      <a:spcPct val="100000"/>
+                    </a:lnSpc>
+                    <a:spcBef>
+                      <a:spcPts val="0"/>
+                    </a:spcBef>
+                    <a:spcAft>
+                      <a:spcPts val="0"/>
+                    </a:spcAft>
+                    <a:buClrTx/>
+                    <a:buSzTx/>
+                    <a:buFontTx/>
+                    <a:buNone/>
+                    <a:tabLst/>
+                    <a:defRPr/>
+                  </a:pPr>
+                  <a:endParaRPr kumimoji="0" lang="en-US" sz="1000" b="0" i="0" u="none" strike="noStrike" kern="1200" cap="none" spc="0" normalizeH="0" baseline="0" noProof="0">
+                    <a:ln>
+                      <a:noFill/>
+                    </a:ln>
+                    <a:solidFill>
+                      <a:prstClr val="black"/>
+                    </a:solidFill>
+                    <a:effectLst/>
+                    <a:uLnTx/>
+                    <a:uFillTx/>
+                    <a:ea typeface="+mn-ea"/>
+                    <a:cs typeface="+mn-cs"/>
+                  </a:endParaRPr>
+                </a:p>
+              </p:txBody>
+            </p:sp>
+            <p:sp>
+              <p:nvSpPr>
+                <p:cNvPr id="38" name="TextBox 37">
+                  <a:extLst>
+                    <a:ext uri="{FF2B5EF4-FFF2-40B4-BE49-F238E27FC236}">
+                      <a16:creationId xmlns:a16="http://schemas.microsoft.com/office/drawing/2014/main" id="{1F6FF579-B0C3-0657-65B8-5326CDA63148}"/>
+                    </a:ext>
+                  </a:extLst>
+                </p:cNvPr>
+                <p:cNvSpPr txBox="1"/>
+                <p:nvPr/>
+              </p:nvSpPr>
+              <p:spPr>
+                <a:xfrm>
+                  <a:off x="2324237" y="3251452"/>
+                  <a:ext cx="412292" cy="138499"/>
+                </a:xfrm>
+                <a:prstGeom prst="rect">
+                  <a:avLst/>
+                </a:prstGeom>
+                <a:noFill/>
+              </p:spPr>
+              <p:txBody>
+                <a:bodyPr wrap="square" lIns="0" tIns="0" rIns="0" bIns="0" rtlCol="0">
+                  <a:spAutoFit/>
+                </a:bodyPr>
+                <a:lstStyle/>
+                <a:p>
+                  <a:pPr marL="0" marR="0" lvl="0" indent="0" algn="ctr" defTabSz="914400" rtl="0" eaLnBrk="1" fontAlgn="auto" latinLnBrk="0" hangingPunct="1">
+                    <a:lnSpc>
+                      <a:spcPct val="100000"/>
+                    </a:lnSpc>
+                    <a:spcBef>
+                      <a:spcPts val="0"/>
+                    </a:spcBef>
+                    <a:spcAft>
+                      <a:spcPts val="0"/>
+                    </a:spcAft>
+                    <a:buClrTx/>
+                    <a:buSzTx/>
+                    <a:buFontTx/>
+                    <a:buNone/>
+                    <a:tabLst/>
+                    <a:defRPr/>
+                  </a:pPr>
+                  <a:r>
+                    <a:rPr kumimoji="0" lang="en-US" sz="900" b="0" i="0" u="none" strike="noStrike" kern="1200" cap="none" spc="0" normalizeH="0" baseline="0" noProof="0" dirty="0">
+                      <a:ln>
+                        <a:noFill/>
+                      </a:ln>
+                      <a:solidFill>
+                        <a:prstClr val="black"/>
+                      </a:solidFill>
+                      <a:effectLst/>
+                      <a:uLnTx/>
+                      <a:uFillTx/>
+                      <a:ea typeface="+mn-ea"/>
+                      <a:cs typeface="+mn-cs"/>
+                    </a:rPr>
+                    <a:t>host</a:t>
+                  </a:r>
+                </a:p>
+              </p:txBody>
+            </p:sp>
+          </p:grpSp>
+        </p:grpSp>
+      </p:grpSp>
+      <p:cxnSp>
+        <p:nvCxnSpPr>
+          <p:cNvPr id="55" name="Straight Arrow Connector 54">
+            <a:extLst>
+              <a:ext uri="{FF2B5EF4-FFF2-40B4-BE49-F238E27FC236}">
+                <a16:creationId xmlns:a16="http://schemas.microsoft.com/office/drawing/2014/main" id="{BF6CA7C1-E4F1-8DA7-FB04-B843FDF689CE}"/>
+              </a:ext>
+            </a:extLst>
+          </p:cNvPr>
+          <p:cNvCxnSpPr>
+            <a:cxnSpLocks/>
+            <a:stCxn id="31" idx="1"/>
+            <a:endCxn id="2" idx="2"/>
+          </p:cNvCxnSpPr>
+          <p:nvPr/>
+        </p:nvCxnSpPr>
+        <p:spPr>
+          <a:xfrm flipV="1">
+            <a:off x="4885611" y="3450499"/>
+            <a:ext cx="1031685" cy="352045"/>
+          </a:xfrm>
+          <a:prstGeom prst="straightConnector1">
+            <a:avLst/>
+          </a:prstGeom>
+          <a:ln w="12700">
+            <a:solidFill>
+              <a:schemeClr val="tx1"/>
+            </a:solidFill>
+            <a:headEnd type="triangle" w="med" len="med"/>
+            <a:tailEnd type="none" w="med" len="med"/>
+          </a:ln>
+        </p:spPr>
+        <p:style>
+          <a:lnRef idx="1">
+            <a:schemeClr val="accent1"/>
+          </a:lnRef>
+          <a:fillRef idx="0">
+            <a:schemeClr val="accent1"/>
+          </a:fillRef>
+          <a:effectRef idx="0">
+            <a:schemeClr val="accent1"/>
+          </a:effectRef>
+          <a:fontRef idx="minor">
+            <a:schemeClr val="tx1"/>
+          </a:fontRef>
+        </p:style>
+      </p:cxnSp>
+    </p:spTree>
+    <p:extLst>
+      <p:ext uri="{BB962C8B-B14F-4D97-AF65-F5344CB8AC3E}">
+        <p14:creationId xmlns:p14="http://schemas.microsoft.com/office/powerpoint/2010/main" val="85587820"/>
+      </p:ext>
+    </p:extLst>
+  </p:cSld>
+  <p:clrMapOvr>
+    <a:masterClrMapping/>
+  </p:clrMapOvr>
+</p:sld>
+</file>
+
+<file path=ppt/slides/slide8.xml><?xml version="1.0" encoding="utf-8"?>
+<p:sld xmlns:a="http://schemas.openxmlformats.org/drawingml/2006/main" xmlns:r="http://schemas.openxmlformats.org/officeDocument/2006/relationships" xmlns:p="http://schemas.openxmlformats.org/presentationml/2006/main">
+  <p:cSld>
+    <p:spTree>
+      <p:nvGrpSpPr>
+        <p:cNvPr id="1" name=""/>
+        <p:cNvGrpSpPr/>
+        <p:nvPr/>
+      </p:nvGrpSpPr>
+      <p:grpSpPr>
+        <a:xfrm>
+          <a:off x="0" y="0"/>
+          <a:ext cx="0" cy="0"/>
+          <a:chOff x="0" y="0"/>
+          <a:chExt cx="0" cy="0"/>
+        </a:xfrm>
+      </p:grpSpPr>
+      <p:grpSp>
+        <p:nvGrpSpPr>
+          <p:cNvPr id="48" name="Group 47">
+            <a:extLst>
+              <a:ext uri="{FF2B5EF4-FFF2-40B4-BE49-F238E27FC236}">
+                <a16:creationId xmlns:a16="http://schemas.microsoft.com/office/drawing/2014/main" id="{FED66C52-1B56-6179-741E-A80C19EA644A}"/>
+              </a:ext>
+            </a:extLst>
+          </p:cNvPr>
+          <p:cNvGrpSpPr/>
+          <p:nvPr/>
+        </p:nvGrpSpPr>
+        <p:grpSpPr>
+          <a:xfrm>
+            <a:off x="5717798" y="2244919"/>
+            <a:ext cx="771421" cy="1205580"/>
+            <a:chOff x="5762648" y="2244919"/>
+            <a:chExt cx="771421" cy="1205580"/>
+          </a:xfrm>
+        </p:grpSpPr>
+        <p:grpSp>
+          <p:nvGrpSpPr>
+            <p:cNvPr id="146" name="Group 145">
+              <a:extLst>
+                <a:ext uri="{FF2B5EF4-FFF2-40B4-BE49-F238E27FC236}">
+                  <a16:creationId xmlns:a16="http://schemas.microsoft.com/office/drawing/2014/main" id="{21372C5F-6019-6E0C-9508-4E8A358AF2EE}"/>
+                </a:ext>
+              </a:extLst>
+            </p:cNvPr>
+            <p:cNvGrpSpPr/>
+            <p:nvPr/>
+          </p:nvGrpSpPr>
+          <p:grpSpPr>
+            <a:xfrm>
+              <a:off x="5762648" y="2447989"/>
+              <a:ext cx="771421" cy="815478"/>
+              <a:chOff x="4115528" y="2823110"/>
+              <a:chExt cx="771421" cy="815478"/>
+            </a:xfrm>
+          </p:grpSpPr>
+          <p:sp>
+            <p:nvSpPr>
+              <p:cNvPr id="34" name="Rectangle 33">
+                <a:extLst>
+                  <a:ext uri="{FF2B5EF4-FFF2-40B4-BE49-F238E27FC236}">
+                    <a16:creationId xmlns:a16="http://schemas.microsoft.com/office/drawing/2014/main" id="{AC8C008F-40AE-7B56-066D-358A9B134B49}"/>
+                  </a:ext>
+                </a:extLst>
+              </p:cNvPr>
+              <p:cNvSpPr/>
+              <p:nvPr/>
+            </p:nvSpPr>
+            <p:spPr>
+              <a:xfrm>
+                <a:off x="4115528" y="3145212"/>
+                <a:ext cx="771421" cy="279919"/>
+              </a:xfrm>
+              <a:prstGeom prst="rect">
+                <a:avLst/>
+              </a:prstGeom>
+              <a:solidFill>
+                <a:schemeClr val="bg1">
+                  <a:lumMod val="95000"/>
+                </a:schemeClr>
+              </a:solidFill>
+              <a:ln w="19050">
+                <a:solidFill>
+                  <a:schemeClr val="bg2"/>
+                </a:solidFill>
+              </a:ln>
+            </p:spPr>
+            <p:style>
+              <a:lnRef idx="2">
+                <a:schemeClr val="accent1">
+                  <a:shade val="50000"/>
+                </a:schemeClr>
+              </a:lnRef>
+              <a:fillRef idx="1">
+                <a:schemeClr val="accent1"/>
+              </a:fillRef>
+              <a:effectRef idx="0">
+                <a:schemeClr val="accent1"/>
+              </a:effectRef>
+              <a:fontRef idx="minor">
+                <a:schemeClr val="lt1"/>
+              </a:fontRef>
+            </p:style>
+            <p:txBody>
+              <a:bodyPr lIns="0" rIns="0" rtlCol="0" anchor="ctr"/>
+              <a:lstStyle/>
+              <a:p>
+                <a:pPr marL="0" marR="0" lvl="0" indent="0" algn="ctr" defTabSz="914400" rtl="0" eaLnBrk="1" fontAlgn="auto" latinLnBrk="0" hangingPunct="1">
+                  <a:lnSpc>
+                    <a:spcPct val="100000"/>
+                  </a:lnSpc>
+                  <a:spcBef>
+                    <a:spcPts val="0"/>
+                  </a:spcBef>
+                  <a:spcAft>
+                    <a:spcPts val="0"/>
+                  </a:spcAft>
+                  <a:buClrTx/>
+                  <a:buSzTx/>
+                  <a:buFontTx/>
+                  <a:buNone/>
+                  <a:tabLst/>
+                  <a:defRPr/>
+                </a:pPr>
+                <a:r>
+                  <a:rPr kumimoji="0" lang="en-US" sz="900" b="0" i="0" u="none" strike="noStrike" kern="1200" cap="none" spc="0" normalizeH="0" baseline="0" noProof="0" dirty="0">
+                    <a:ln>
+                      <a:noFill/>
+                    </a:ln>
+                    <a:solidFill>
+                      <a:prstClr val="black"/>
+                    </a:solidFill>
+                    <a:effectLst/>
+                    <a:uLnTx/>
+                    <a:uFillTx/>
+                    <a:ea typeface="+mn-ea"/>
+                    <a:cs typeface="+mn-cs"/>
+                  </a:rPr>
+                  <a:t>Container Platform</a:t>
+                </a:r>
+              </a:p>
+            </p:txBody>
+          </p:sp>
+          <p:sp>
+            <p:nvSpPr>
+              <p:cNvPr id="35" name="Rectangle: Rounded Corners 34">
+                <a:extLst>
+                  <a:ext uri="{FF2B5EF4-FFF2-40B4-BE49-F238E27FC236}">
+                    <a16:creationId xmlns:a16="http://schemas.microsoft.com/office/drawing/2014/main" id="{DFBFC135-6FE4-4904-9572-E0043D70EBD6}"/>
+                  </a:ext>
+                </a:extLst>
+              </p:cNvPr>
+              <p:cNvSpPr/>
+              <p:nvPr/>
+            </p:nvSpPr>
+            <p:spPr>
+              <a:xfrm>
+                <a:off x="4115528" y="2823110"/>
+                <a:ext cx="771420" cy="815478"/>
+              </a:xfrm>
+              <a:prstGeom prst="roundRect">
+                <a:avLst/>
+              </a:prstGeom>
+              <a:noFill/>
+              <a:ln w="19050">
+                <a:solidFill>
+                  <a:schemeClr val="tx1"/>
+                </a:solidFill>
+              </a:ln>
+            </p:spPr>
+            <p:style>
+              <a:lnRef idx="2">
+                <a:schemeClr val="accent1">
+                  <a:shade val="50000"/>
+                </a:schemeClr>
+              </a:lnRef>
+              <a:fillRef idx="1">
+                <a:schemeClr val="accent1"/>
+              </a:fillRef>
+              <a:effectRef idx="0">
+                <a:schemeClr val="accent1"/>
+              </a:effectRef>
+              <a:fontRef idx="minor">
+                <a:schemeClr val="lt1"/>
+              </a:fontRef>
+            </p:style>
+            <p:txBody>
+              <a:bodyPr lIns="45720" tIns="118872" rtlCol="0" anchor="t" anchorCtr="0"/>
+              <a:lstStyle/>
+              <a:p>
+                <a:pPr marL="0" marR="0" lvl="0" indent="0" algn="l" defTabSz="914400" rtl="0" eaLnBrk="1" fontAlgn="auto" latinLnBrk="0" hangingPunct="1">
+                  <a:lnSpc>
+                    <a:spcPct val="100000"/>
+                  </a:lnSpc>
+                  <a:spcBef>
+                    <a:spcPts val="0"/>
+                  </a:spcBef>
+                  <a:spcAft>
+                    <a:spcPts val="0"/>
+                  </a:spcAft>
+                  <a:buClrTx/>
+                  <a:buSzTx/>
+                  <a:buFontTx/>
+                  <a:buNone/>
+                  <a:tabLst/>
+                  <a:defRPr/>
+                </a:pPr>
+                <a:r>
+                  <a:rPr lang="en-US" sz="800" dirty="0">
+                    <a:solidFill>
+                      <a:prstClr val="black"/>
+                    </a:solidFill>
+                  </a:rPr>
+                  <a:t>cluster-1</a:t>
+                </a:r>
+                <a:endParaRPr kumimoji="0" lang="en-US" sz="800" b="0" i="0" u="none" strike="noStrike" kern="1200" cap="none" spc="0" normalizeH="0" baseline="0" noProof="0" dirty="0">
+                  <a:ln>
+                    <a:noFill/>
+                  </a:ln>
+                  <a:solidFill>
+                    <a:prstClr val="black"/>
+                  </a:solidFill>
+                  <a:effectLst/>
+                  <a:uLnTx/>
+                  <a:uFillTx/>
+                  <a:ea typeface="+mn-ea"/>
+                  <a:cs typeface="+mn-cs"/>
+                </a:endParaRPr>
+              </a:p>
+            </p:txBody>
+          </p:sp>
+        </p:grpSp>
+        <p:grpSp>
+          <p:nvGrpSpPr>
+            <p:cNvPr id="58" name="Group 57">
+              <a:extLst>
+                <a:ext uri="{FF2B5EF4-FFF2-40B4-BE49-F238E27FC236}">
+                  <a16:creationId xmlns:a16="http://schemas.microsoft.com/office/drawing/2014/main" id="{F6FF56A3-16B1-831C-57CE-9919876BB236}"/>
+                </a:ext>
+              </a:extLst>
+            </p:cNvPr>
+            <p:cNvGrpSpPr/>
+            <p:nvPr/>
+          </p:nvGrpSpPr>
+          <p:grpSpPr>
+            <a:xfrm>
+              <a:off x="5915093" y="2244919"/>
+              <a:ext cx="466531" cy="351106"/>
+              <a:chOff x="6810318" y="4284899"/>
+              <a:chExt cx="466531" cy="351106"/>
+            </a:xfrm>
+          </p:grpSpPr>
+          <p:sp>
+            <p:nvSpPr>
+              <p:cNvPr id="54" name="Arrow: Chevron 53">
+                <a:extLst>
+                  <a:ext uri="{FF2B5EF4-FFF2-40B4-BE49-F238E27FC236}">
+                    <a16:creationId xmlns:a16="http://schemas.microsoft.com/office/drawing/2014/main" id="{20E00F62-D32A-8FB7-5FEB-5D3162EC33D3}"/>
+                  </a:ext>
+                </a:extLst>
+              </p:cNvPr>
+              <p:cNvSpPr/>
+              <p:nvPr/>
+            </p:nvSpPr>
+            <p:spPr>
+              <a:xfrm rot="5400000">
+                <a:off x="6868031" y="4227186"/>
+                <a:ext cx="351106" cy="466531"/>
+              </a:xfrm>
+              <a:prstGeom prst="chevron">
+                <a:avLst>
+                  <a:gd name="adj" fmla="val 14000"/>
+                </a:avLst>
+              </a:prstGeom>
+              <a:solidFill>
+                <a:schemeClr val="bg1"/>
+              </a:solidFill>
+              <a:ln w="12700">
+                <a:solidFill>
+                  <a:schemeClr val="tx1"/>
+                </a:solidFill>
+              </a:ln>
+            </p:spPr>
+            <p:style>
+              <a:lnRef idx="2">
+                <a:schemeClr val="accent1">
+                  <a:shade val="50000"/>
+                </a:schemeClr>
+              </a:lnRef>
+              <a:fillRef idx="1">
+                <a:schemeClr val="accent1"/>
+              </a:fillRef>
+              <a:effectRef idx="0">
+                <a:schemeClr val="accent1"/>
+              </a:effectRef>
+              <a:fontRef idx="minor">
+                <a:schemeClr val="lt1"/>
+              </a:fontRef>
+            </p:style>
+            <p:txBody>
+              <a:bodyPr tIns="0" rtlCol="0" anchor="t" anchorCtr="0"/>
+              <a:lstStyle/>
+              <a:p>
+                <a:pPr marL="0" marR="0" lvl="0" indent="0" algn="l" defTabSz="914400" rtl="0" eaLnBrk="1" fontAlgn="auto" latinLnBrk="0" hangingPunct="1">
+                  <a:lnSpc>
+                    <a:spcPct val="100000"/>
+                  </a:lnSpc>
+                  <a:spcBef>
+                    <a:spcPts val="0"/>
+                  </a:spcBef>
+                  <a:spcAft>
+                    <a:spcPts val="0"/>
+                  </a:spcAft>
+                  <a:buClrTx/>
+                  <a:buSzTx/>
+                  <a:buFontTx/>
+                  <a:buNone/>
+                  <a:tabLst/>
+                  <a:defRPr/>
+                </a:pPr>
+                <a:endParaRPr kumimoji="0" lang="en-US" sz="1000" b="0" i="0" u="none" strike="noStrike" kern="1200" cap="none" spc="0" normalizeH="0" baseline="0" noProof="0">
+                  <a:ln>
+                    <a:noFill/>
+                  </a:ln>
+                  <a:solidFill>
+                    <a:prstClr val="black"/>
+                  </a:solidFill>
+                  <a:effectLst/>
+                  <a:uLnTx/>
+                  <a:uFillTx/>
+                  <a:ea typeface="+mn-ea"/>
+                  <a:cs typeface="+mn-cs"/>
+                </a:endParaRPr>
+              </a:p>
+            </p:txBody>
+          </p:sp>
+          <p:sp>
+            <p:nvSpPr>
+              <p:cNvPr id="57" name="TextBox 56">
+                <a:extLst>
+                  <a:ext uri="{FF2B5EF4-FFF2-40B4-BE49-F238E27FC236}">
+                    <a16:creationId xmlns:a16="http://schemas.microsoft.com/office/drawing/2014/main" id="{430F5921-AE55-FC29-BAE4-5A0B0592787C}"/>
+                  </a:ext>
+                </a:extLst>
+              </p:cNvPr>
+              <p:cNvSpPr txBox="1"/>
+              <p:nvPr/>
+            </p:nvSpPr>
+            <p:spPr>
+              <a:xfrm>
+                <a:off x="6837438" y="4337341"/>
+                <a:ext cx="412292" cy="230832"/>
+              </a:xfrm>
+              <a:prstGeom prst="rect">
+                <a:avLst/>
+              </a:prstGeom>
+              <a:noFill/>
+            </p:spPr>
+            <p:txBody>
+              <a:bodyPr wrap="square" rtlCol="0">
+                <a:spAutoFit/>
+              </a:bodyPr>
+              <a:lstStyle/>
+              <a:p>
+                <a:pPr marL="0" marR="0" lvl="0" indent="0" algn="l" defTabSz="914400" rtl="0" eaLnBrk="1" fontAlgn="auto" latinLnBrk="0" hangingPunct="1">
+                  <a:lnSpc>
+                    <a:spcPct val="100000"/>
+                  </a:lnSpc>
+                  <a:spcBef>
+                    <a:spcPts val="0"/>
+                  </a:spcBef>
+                  <a:spcAft>
+                    <a:spcPts val="0"/>
+                  </a:spcAft>
+                  <a:buClrTx/>
+                  <a:buSzTx/>
+                  <a:buFontTx/>
+                  <a:buNone/>
+                  <a:tabLst/>
+                  <a:defRPr/>
+                </a:pPr>
+                <a:r>
+                  <a:rPr kumimoji="0" lang="en-US" sz="900" b="0" i="0" u="none" strike="noStrike" kern="1200" cap="none" spc="0" normalizeH="0" baseline="0" noProof="0" dirty="0">
+                    <a:ln>
+                      <a:noFill/>
+                    </a:ln>
+                    <a:solidFill>
+                      <a:prstClr val="black"/>
+                    </a:solidFill>
+                    <a:effectLst/>
+                    <a:uLnTx/>
+                    <a:uFillTx/>
+                    <a:ea typeface="+mn-ea"/>
+                    <a:cs typeface="+mn-cs"/>
+                  </a:rPr>
+                  <a:t>host</a:t>
+                </a:r>
+              </a:p>
+            </p:txBody>
+          </p:sp>
+        </p:grpSp>
+        <p:grpSp>
+          <p:nvGrpSpPr>
+            <p:cNvPr id="24" name="Group 23">
+              <a:extLst>
+                <a:ext uri="{FF2B5EF4-FFF2-40B4-BE49-F238E27FC236}">
+                  <a16:creationId xmlns:a16="http://schemas.microsoft.com/office/drawing/2014/main" id="{03F61A79-2B14-4689-A373-1B6C8A8BF00D}"/>
+                </a:ext>
+              </a:extLst>
+            </p:cNvPr>
+            <p:cNvGrpSpPr/>
+            <p:nvPr/>
+          </p:nvGrpSpPr>
+          <p:grpSpPr>
+            <a:xfrm>
+              <a:off x="5800358" y="3170580"/>
+              <a:ext cx="708987" cy="279919"/>
+              <a:chOff x="4610835" y="2915239"/>
+              <a:chExt cx="708987" cy="279919"/>
+            </a:xfrm>
+          </p:grpSpPr>
+          <p:sp>
+            <p:nvSpPr>
+              <p:cNvPr id="2" name="Flowchart: Off-page Connector 1">
+                <a:extLst>
+                  <a:ext uri="{FF2B5EF4-FFF2-40B4-BE49-F238E27FC236}">
+                    <a16:creationId xmlns:a16="http://schemas.microsoft.com/office/drawing/2014/main" id="{D2DBAF6C-1A9D-A2B7-54F2-9B06CDF54057}"/>
+                  </a:ext>
+                </a:extLst>
+              </p:cNvPr>
+              <p:cNvSpPr/>
+              <p:nvPr/>
+            </p:nvSpPr>
+            <p:spPr>
+              <a:xfrm>
+                <a:off x="4610835" y="2915239"/>
+                <a:ext cx="323575" cy="279919"/>
+              </a:xfrm>
+              <a:prstGeom prst="flowChartOffpageConnector">
+                <a:avLst/>
+              </a:prstGeom>
+              <a:solidFill>
+                <a:schemeClr val="bg1"/>
+              </a:solidFill>
+              <a:ln w="19050">
+                <a:solidFill>
+                  <a:schemeClr val="tx1"/>
+                </a:solidFill>
+              </a:ln>
+            </p:spPr>
+            <p:style>
+              <a:lnRef idx="2">
+                <a:schemeClr val="accent1">
+                  <a:shade val="50000"/>
+                </a:schemeClr>
+              </a:lnRef>
+              <a:fillRef idx="1">
+                <a:schemeClr val="accent1"/>
+              </a:fillRef>
+              <a:effectRef idx="0">
+                <a:schemeClr val="accent1"/>
+              </a:effectRef>
+              <a:fontRef idx="minor">
+                <a:schemeClr val="lt1"/>
+              </a:fontRef>
+            </p:style>
+            <p:txBody>
+              <a:bodyPr tIns="0" rtlCol="0" anchor="t" anchorCtr="0"/>
+              <a:lstStyle/>
+              <a:p>
+                <a:pPr marL="0" marR="0" lvl="0" indent="0" algn="l" defTabSz="914400" rtl="0" eaLnBrk="1" fontAlgn="auto" latinLnBrk="0" hangingPunct="1">
+                  <a:lnSpc>
+                    <a:spcPct val="100000"/>
+                  </a:lnSpc>
+                  <a:spcBef>
+                    <a:spcPts val="0"/>
+                  </a:spcBef>
+                  <a:spcAft>
+                    <a:spcPts val="0"/>
+                  </a:spcAft>
+                  <a:buClrTx/>
+                  <a:buSzTx/>
+                  <a:buFontTx/>
+                  <a:buNone/>
+                  <a:tabLst/>
+                  <a:defRPr/>
+                </a:pPr>
+                <a:endParaRPr kumimoji="0" lang="en-US" sz="1000" b="0" i="0" u="none" strike="noStrike" kern="1200" cap="none" spc="0" normalizeH="0" baseline="0" noProof="0">
+                  <a:ln>
+                    <a:noFill/>
+                  </a:ln>
+                  <a:solidFill>
+                    <a:prstClr val="black"/>
+                  </a:solidFill>
+                  <a:effectLst/>
+                  <a:uLnTx/>
+                  <a:uFillTx/>
+                  <a:ea typeface="+mn-ea"/>
+                  <a:cs typeface="+mn-cs"/>
+                </a:endParaRPr>
+              </a:p>
+            </p:txBody>
+          </p:sp>
+          <p:sp>
+            <p:nvSpPr>
+              <p:cNvPr id="6" name="TextBox 5">
+                <a:extLst>
+                  <a:ext uri="{FF2B5EF4-FFF2-40B4-BE49-F238E27FC236}">
+                    <a16:creationId xmlns:a16="http://schemas.microsoft.com/office/drawing/2014/main" id="{7C552AEA-8D5A-DF05-C663-F088491F3B22}"/>
+                  </a:ext>
+                </a:extLst>
+              </p:cNvPr>
+              <p:cNvSpPr txBox="1"/>
+              <p:nvPr/>
+            </p:nvSpPr>
+            <p:spPr>
+              <a:xfrm>
+                <a:off x="4631734" y="2915239"/>
+                <a:ext cx="285956" cy="230832"/>
+              </a:xfrm>
+              <a:prstGeom prst="rect">
+                <a:avLst/>
+              </a:prstGeom>
+              <a:noFill/>
+            </p:spPr>
+            <p:txBody>
+              <a:bodyPr wrap="square" lIns="0" rIns="0" rtlCol="0">
+                <a:spAutoFit/>
+              </a:bodyPr>
+              <a:lstStyle/>
+              <a:p>
+                <a:pPr marL="0" marR="0" lvl="0" indent="0" algn="ctr" defTabSz="914400" rtl="0" eaLnBrk="1" fontAlgn="auto" latinLnBrk="0" hangingPunct="1">
+                  <a:lnSpc>
+                    <a:spcPct val="100000"/>
+                  </a:lnSpc>
+                  <a:spcBef>
+                    <a:spcPts val="0"/>
+                  </a:spcBef>
+                  <a:spcAft>
+                    <a:spcPts val="0"/>
+                  </a:spcAft>
+                  <a:buClrTx/>
+                  <a:buSzTx/>
+                  <a:buFontTx/>
+                  <a:buNone/>
+                  <a:tabLst/>
+                  <a:defRPr/>
+                </a:pPr>
+                <a:r>
+                  <a:rPr kumimoji="0" lang="en-US" sz="900" b="0" i="0" u="none" strike="noStrike" kern="1200" cap="none" spc="0" normalizeH="0" baseline="0" noProof="0" dirty="0">
+                    <a:ln>
+                      <a:noFill/>
+                    </a:ln>
+                    <a:solidFill>
+                      <a:prstClr val="black"/>
+                    </a:solidFill>
+                    <a:effectLst/>
+                    <a:uLnTx/>
+                    <a:uFillTx/>
+                    <a:ea typeface="+mn-ea"/>
+                    <a:cs typeface="+mn-cs"/>
+                  </a:rPr>
+                  <a:t>runs</a:t>
+                </a:r>
+              </a:p>
+            </p:txBody>
+          </p:sp>
+          <p:sp>
+            <p:nvSpPr>
+              <p:cNvPr id="16" name="Flowchart: Off-page Connector 15">
+                <a:extLst>
+                  <a:ext uri="{FF2B5EF4-FFF2-40B4-BE49-F238E27FC236}">
+                    <a16:creationId xmlns:a16="http://schemas.microsoft.com/office/drawing/2014/main" id="{D72AF047-6361-3F51-B89D-DA8B28A07C73}"/>
+                  </a:ext>
+                </a:extLst>
+              </p:cNvPr>
+              <p:cNvSpPr/>
+              <p:nvPr/>
+            </p:nvSpPr>
+            <p:spPr>
+              <a:xfrm>
+                <a:off x="4996247" y="2915239"/>
+                <a:ext cx="323575" cy="279919"/>
+              </a:xfrm>
+              <a:prstGeom prst="flowChartOffpageConnector">
+                <a:avLst/>
+              </a:prstGeom>
+              <a:solidFill>
+                <a:schemeClr val="bg1"/>
+              </a:solidFill>
+              <a:ln w="19050">
+                <a:solidFill>
+                  <a:schemeClr val="tx1"/>
+                </a:solidFill>
+              </a:ln>
+            </p:spPr>
+            <p:style>
+              <a:lnRef idx="2">
+                <a:schemeClr val="accent1">
+                  <a:shade val="50000"/>
+                </a:schemeClr>
+              </a:lnRef>
+              <a:fillRef idx="1">
+                <a:schemeClr val="accent1"/>
+              </a:fillRef>
+              <a:effectRef idx="0">
+                <a:schemeClr val="accent1"/>
+              </a:effectRef>
+              <a:fontRef idx="minor">
+                <a:schemeClr val="lt1"/>
+              </a:fontRef>
+            </p:style>
+            <p:txBody>
+              <a:bodyPr tIns="0" rtlCol="0" anchor="t" anchorCtr="0"/>
+              <a:lstStyle/>
+              <a:p>
+                <a:pPr marL="0" marR="0" lvl="0" indent="0" algn="l" defTabSz="914400" rtl="0" eaLnBrk="1" fontAlgn="auto" latinLnBrk="0" hangingPunct="1">
+                  <a:lnSpc>
+                    <a:spcPct val="100000"/>
+                  </a:lnSpc>
+                  <a:spcBef>
+                    <a:spcPts val="0"/>
+                  </a:spcBef>
+                  <a:spcAft>
+                    <a:spcPts val="0"/>
+                  </a:spcAft>
+                  <a:buClrTx/>
+                  <a:buSzTx/>
+                  <a:buFontTx/>
+                  <a:buNone/>
+                  <a:tabLst/>
+                  <a:defRPr/>
+                </a:pPr>
+                <a:endParaRPr kumimoji="0" lang="en-US" sz="1000" b="0" i="0" u="none" strike="noStrike" kern="1200" cap="none" spc="0" normalizeH="0" baseline="0" noProof="0">
+                  <a:ln>
+                    <a:noFill/>
+                  </a:ln>
+                  <a:solidFill>
+                    <a:prstClr val="black"/>
+                  </a:solidFill>
+                  <a:effectLst/>
+                  <a:uLnTx/>
+                  <a:uFillTx/>
+                  <a:ea typeface="+mn-ea"/>
+                  <a:cs typeface="+mn-cs"/>
+                </a:endParaRPr>
+              </a:p>
+            </p:txBody>
+          </p:sp>
+          <p:sp>
+            <p:nvSpPr>
+              <p:cNvPr id="23" name="TextBox 22">
+                <a:extLst>
+                  <a:ext uri="{FF2B5EF4-FFF2-40B4-BE49-F238E27FC236}">
+                    <a16:creationId xmlns:a16="http://schemas.microsoft.com/office/drawing/2014/main" id="{42224FE2-30D1-9035-A3A4-A437C4BF524D}"/>
+                  </a:ext>
+                </a:extLst>
+              </p:cNvPr>
+              <p:cNvSpPr txBox="1"/>
+              <p:nvPr/>
+            </p:nvSpPr>
+            <p:spPr>
+              <a:xfrm>
+                <a:off x="5017146" y="2915239"/>
+                <a:ext cx="285956" cy="230832"/>
+              </a:xfrm>
+              <a:prstGeom prst="rect">
+                <a:avLst/>
+              </a:prstGeom>
+              <a:noFill/>
+            </p:spPr>
+            <p:txBody>
+              <a:bodyPr wrap="square" lIns="0" rIns="0" rtlCol="0">
+                <a:spAutoFit/>
+              </a:bodyPr>
+              <a:lstStyle/>
+              <a:p>
+                <a:pPr marL="0" marR="0" lvl="0" indent="0" algn="ctr" defTabSz="914400" rtl="0" eaLnBrk="1" fontAlgn="auto" latinLnBrk="0" hangingPunct="1">
+                  <a:lnSpc>
+                    <a:spcPct val="100000"/>
+                  </a:lnSpc>
+                  <a:spcBef>
+                    <a:spcPts val="0"/>
+                  </a:spcBef>
+                  <a:spcAft>
+                    <a:spcPts val="0"/>
+                  </a:spcAft>
+                  <a:buClrTx/>
+                  <a:buSzTx/>
+                  <a:buFontTx/>
+                  <a:buNone/>
+                  <a:tabLst/>
+                  <a:defRPr/>
+                </a:pPr>
+                <a:r>
+                  <a:rPr kumimoji="0" lang="en-US" sz="900" b="0" i="0" u="none" strike="noStrike" kern="1200" cap="none" spc="0" normalizeH="0" baseline="0" noProof="0" dirty="0">
+                    <a:ln>
+                      <a:noFill/>
+                    </a:ln>
+                    <a:solidFill>
+                      <a:prstClr val="black"/>
+                    </a:solidFill>
+                    <a:effectLst/>
+                    <a:uLnTx/>
+                    <a:uFillTx/>
+                    <a:ea typeface="+mn-ea"/>
+                    <a:cs typeface="+mn-cs"/>
+                  </a:rPr>
+                  <a:t>host</a:t>
+                </a:r>
+              </a:p>
+            </p:txBody>
+          </p:sp>
+        </p:grpSp>
+      </p:grpSp>
+      <p:cxnSp>
+        <p:nvCxnSpPr>
+          <p:cNvPr id="17" name="Straight Arrow Connector 16">
+            <a:extLst>
+              <a:ext uri="{FF2B5EF4-FFF2-40B4-BE49-F238E27FC236}">
+                <a16:creationId xmlns:a16="http://schemas.microsoft.com/office/drawing/2014/main" id="{E58D11E9-E884-B98D-C7B8-50308964A9BB}"/>
+              </a:ext>
+            </a:extLst>
+          </p:cNvPr>
+          <p:cNvCxnSpPr>
+            <a:cxnSpLocks/>
+            <a:endCxn id="16" idx="2"/>
+          </p:cNvCxnSpPr>
+          <p:nvPr/>
+        </p:nvCxnSpPr>
+        <p:spPr>
+          <a:xfrm flipV="1">
+            <a:off x="6149118" y="3450499"/>
+            <a:ext cx="153590" cy="321432"/>
+          </a:xfrm>
+          <a:prstGeom prst="straightConnector1">
+            <a:avLst/>
+          </a:prstGeom>
+          <a:ln w="12700">
+            <a:solidFill>
+              <a:schemeClr val="tx1"/>
+            </a:solidFill>
+            <a:headEnd type="triangle" w="med" len="med"/>
+            <a:tailEnd type="none" w="med" len="med"/>
+          </a:ln>
+        </p:spPr>
+        <p:style>
+          <a:lnRef idx="1">
+            <a:schemeClr val="accent1"/>
+          </a:lnRef>
+          <a:fillRef idx="0">
+            <a:schemeClr val="accent1"/>
+          </a:fillRef>
+          <a:effectRef idx="0">
+            <a:schemeClr val="accent1"/>
+          </a:effectRef>
+          <a:fontRef idx="minor">
+            <a:schemeClr val="tx1"/>
+          </a:fontRef>
+        </p:style>
+      </p:cxnSp>
+      <p:grpSp>
+        <p:nvGrpSpPr>
+          <p:cNvPr id="18" name="Group 17">
+            <a:extLst>
+              <a:ext uri="{FF2B5EF4-FFF2-40B4-BE49-F238E27FC236}">
+                <a16:creationId xmlns:a16="http://schemas.microsoft.com/office/drawing/2014/main" id="{0965E86A-1C94-A558-145A-CBC2E89E62AD}"/>
+              </a:ext>
+            </a:extLst>
+          </p:cNvPr>
+          <p:cNvGrpSpPr/>
+          <p:nvPr/>
+        </p:nvGrpSpPr>
+        <p:grpSpPr>
+          <a:xfrm>
+            <a:off x="5720229" y="3725747"/>
+            <a:ext cx="771421" cy="991032"/>
+            <a:chOff x="3816079" y="4223863"/>
+            <a:chExt cx="771421" cy="991032"/>
+          </a:xfrm>
+        </p:grpSpPr>
+        <p:sp>
+          <p:nvSpPr>
+            <p:cNvPr id="19" name="Rectangle 18">
+              <a:extLst>
+                <a:ext uri="{FF2B5EF4-FFF2-40B4-BE49-F238E27FC236}">
+                  <a16:creationId xmlns:a16="http://schemas.microsoft.com/office/drawing/2014/main" id="{D1423ABE-B95A-39BF-B25A-51AE295D7BCC}"/>
+                </a:ext>
+              </a:extLst>
+            </p:cNvPr>
+            <p:cNvSpPr/>
+            <p:nvPr/>
+          </p:nvSpPr>
+          <p:spPr>
+            <a:xfrm>
+              <a:off x="3816079" y="4722603"/>
+              <a:ext cx="771421" cy="250978"/>
+            </a:xfrm>
+            <a:prstGeom prst="rect">
+              <a:avLst/>
+            </a:prstGeom>
+            <a:solidFill>
+              <a:schemeClr val="bg1">
+                <a:lumMod val="95000"/>
+              </a:schemeClr>
+            </a:solidFill>
+            <a:ln w="19050">
+              <a:solidFill>
+                <a:schemeClr val="bg2"/>
+              </a:solidFill>
+            </a:ln>
+          </p:spPr>
+          <p:style>
+            <a:lnRef idx="2">
+              <a:schemeClr val="accent1">
+                <a:shade val="50000"/>
+              </a:schemeClr>
+            </a:lnRef>
+            <a:fillRef idx="1">
+              <a:schemeClr val="accent1"/>
+            </a:fillRef>
+            <a:effectRef idx="0">
+              <a:schemeClr val="accent1"/>
+            </a:effectRef>
+            <a:fontRef idx="minor">
+              <a:schemeClr val="lt1"/>
+            </a:fontRef>
+          </p:style>
+          <p:txBody>
+            <a:bodyPr lIns="0" rIns="0" rtlCol="0" anchor="ctr"/>
+            <a:lstStyle/>
+            <a:p>
+              <a:pPr marL="0" marR="0" lvl="0" indent="0" algn="ctr" defTabSz="914400" rtl="0" eaLnBrk="1" fontAlgn="auto" latinLnBrk="0" hangingPunct="1">
+                <a:lnSpc>
+                  <a:spcPct val="100000"/>
+                </a:lnSpc>
+                <a:spcBef>
+                  <a:spcPts val="0"/>
+                </a:spcBef>
+                <a:spcAft>
+                  <a:spcPts val="0"/>
+                </a:spcAft>
+                <a:buClrTx/>
+                <a:buSzTx/>
+                <a:buFontTx/>
+                <a:buNone/>
+                <a:tabLst/>
+                <a:defRPr/>
+              </a:pPr>
+              <a:r>
+                <a:rPr kumimoji="0" lang="en-US" sz="900" b="0" i="0" u="none" strike="noStrike" kern="1200" cap="none" spc="0" normalizeH="0" baseline="0" noProof="0" dirty="0">
+                  <a:ln>
+                    <a:noFill/>
+                  </a:ln>
+                  <a:solidFill>
+                    <a:prstClr val="black"/>
+                  </a:solidFill>
+                  <a:effectLst/>
+                  <a:uLnTx/>
+                  <a:uFillTx/>
+                  <a:ea typeface="+mn-ea"/>
+                  <a:cs typeface="+mn-cs"/>
+                </a:rPr>
+                <a:t>Server</a:t>
+              </a:r>
+            </a:p>
+            <a:p>
+              <a:pPr marL="0" marR="0" lvl="0" indent="0" algn="ctr" defTabSz="914400" rtl="0" eaLnBrk="1" fontAlgn="auto" latinLnBrk="0" hangingPunct="1">
+                <a:lnSpc>
+                  <a:spcPct val="100000"/>
+                </a:lnSpc>
+                <a:spcBef>
+                  <a:spcPts val="0"/>
+                </a:spcBef>
+                <a:spcAft>
+                  <a:spcPts val="0"/>
+                </a:spcAft>
+                <a:buClrTx/>
+                <a:buSzTx/>
+                <a:buFontTx/>
+                <a:buNone/>
+                <a:tabLst/>
+                <a:defRPr/>
+              </a:pPr>
+              <a:r>
+                <a:rPr kumimoji="0" lang="en-US" sz="900" b="0" i="0" u="none" strike="noStrike" kern="1200" cap="none" spc="0" normalizeH="0" baseline="0" noProof="0" dirty="0">
+                  <a:ln>
+                    <a:noFill/>
+                  </a:ln>
+                  <a:solidFill>
+                    <a:prstClr val="black"/>
+                  </a:solidFill>
+                  <a:effectLst/>
+                  <a:uLnTx/>
+                  <a:uFillTx/>
+                  <a:ea typeface="+mn-ea"/>
+                  <a:cs typeface="+mn-cs"/>
+                </a:rPr>
+                <a:t>Platform</a:t>
+              </a:r>
+            </a:p>
+          </p:txBody>
+        </p:sp>
+        <p:sp>
+          <p:nvSpPr>
+            <p:cNvPr id="20" name="Rectangle: Rounded Corners 19">
+              <a:extLst>
+                <a:ext uri="{FF2B5EF4-FFF2-40B4-BE49-F238E27FC236}">
+                  <a16:creationId xmlns:a16="http://schemas.microsoft.com/office/drawing/2014/main" id="{78CF353B-5D46-A40D-867F-63CF5553D636}"/>
+                </a:ext>
+              </a:extLst>
+            </p:cNvPr>
+            <p:cNvSpPr/>
+            <p:nvPr/>
+          </p:nvSpPr>
+          <p:spPr>
+            <a:xfrm>
+              <a:off x="3816080" y="4399416"/>
+              <a:ext cx="771420" cy="815479"/>
+            </a:xfrm>
+            <a:prstGeom prst="roundRect">
+              <a:avLst/>
+            </a:prstGeom>
+            <a:noFill/>
+            <a:ln w="19050">
+              <a:solidFill>
+                <a:schemeClr val="tx1"/>
+              </a:solidFill>
+            </a:ln>
+          </p:spPr>
+          <p:style>
+            <a:lnRef idx="2">
+              <a:schemeClr val="accent1">
+                <a:shade val="50000"/>
+              </a:schemeClr>
+            </a:lnRef>
+            <a:fillRef idx="1">
+              <a:schemeClr val="accent1"/>
+            </a:fillRef>
+            <a:effectRef idx="0">
+              <a:schemeClr val="accent1"/>
+            </a:effectRef>
+            <a:fontRef idx="minor">
+              <a:schemeClr val="lt1"/>
+            </a:fontRef>
+          </p:style>
+          <p:txBody>
+            <a:bodyPr lIns="45720" tIns="0" bIns="9144" rtlCol="0" anchor="b" anchorCtr="0"/>
+            <a:lstStyle/>
+            <a:p>
+              <a:pPr lvl="0">
+                <a:defRPr/>
+              </a:pPr>
+              <a:r>
+                <a:rPr lang="en-US" sz="800" dirty="0">
+                  <a:solidFill>
+                    <a:prstClr val="black"/>
+                  </a:solidFill>
+                </a:rPr>
+                <a:t>Server-2</a:t>
+              </a:r>
+              <a:endParaRPr kumimoji="0" lang="en-US" sz="800" b="0" i="0" u="none" strike="noStrike" kern="1200" cap="none" spc="0" normalizeH="0" baseline="0" noProof="0" dirty="0">
+                <a:ln>
+                  <a:noFill/>
+                </a:ln>
+                <a:solidFill>
+                  <a:prstClr val="black"/>
+                </a:solidFill>
+                <a:effectLst/>
+                <a:uLnTx/>
+                <a:uFillTx/>
+                <a:ea typeface="+mn-ea"/>
+                <a:cs typeface="+mn-cs"/>
+              </a:endParaRPr>
+            </a:p>
+          </p:txBody>
+        </p:sp>
+        <p:sp>
+          <p:nvSpPr>
+            <p:cNvPr id="21" name="Arrow: Chevron 20">
+              <a:extLst>
+                <a:ext uri="{FF2B5EF4-FFF2-40B4-BE49-F238E27FC236}">
+                  <a16:creationId xmlns:a16="http://schemas.microsoft.com/office/drawing/2014/main" id="{C60B1716-C9A4-F253-E974-95F1F394129E}"/>
+                </a:ext>
+              </a:extLst>
+            </p:cNvPr>
+            <p:cNvSpPr/>
+            <p:nvPr/>
+          </p:nvSpPr>
+          <p:spPr>
+            <a:xfrm rot="5400000">
+              <a:off x="4026243" y="4166150"/>
+              <a:ext cx="351106" cy="466531"/>
+            </a:xfrm>
+            <a:prstGeom prst="chevron">
+              <a:avLst>
+                <a:gd name="adj" fmla="val 14000"/>
+              </a:avLst>
+            </a:prstGeom>
+            <a:solidFill>
+              <a:schemeClr val="bg1"/>
+            </a:solidFill>
+            <a:ln w="12700">
+              <a:solidFill>
+                <a:schemeClr val="tx1"/>
+              </a:solidFill>
+            </a:ln>
+          </p:spPr>
+          <p:style>
+            <a:lnRef idx="2">
+              <a:schemeClr val="accent1">
+                <a:shade val="50000"/>
+              </a:schemeClr>
+            </a:lnRef>
+            <a:fillRef idx="1">
+              <a:schemeClr val="accent1"/>
+            </a:fillRef>
+            <a:effectRef idx="0">
+              <a:schemeClr val="accent1"/>
+            </a:effectRef>
+            <a:fontRef idx="minor">
+              <a:schemeClr val="lt1"/>
+            </a:fontRef>
+          </p:style>
+          <p:txBody>
+            <a:bodyPr tIns="0" rtlCol="0" anchor="t" anchorCtr="0"/>
+            <a:lstStyle/>
+            <a:p>
+              <a:pPr marL="0" marR="0" lvl="0" indent="0" algn="l" defTabSz="914400" rtl="0" eaLnBrk="1" fontAlgn="auto" latinLnBrk="0" hangingPunct="1">
+                <a:lnSpc>
+                  <a:spcPct val="100000"/>
+                </a:lnSpc>
+                <a:spcBef>
+                  <a:spcPts val="0"/>
+                </a:spcBef>
+                <a:spcAft>
+                  <a:spcPts val="0"/>
+                </a:spcAft>
+                <a:buClrTx/>
+                <a:buSzTx/>
+                <a:buFontTx/>
+                <a:buNone/>
+                <a:tabLst/>
+                <a:defRPr/>
+              </a:pPr>
+              <a:endParaRPr kumimoji="0" lang="en-US" sz="1000" b="0" i="0" u="none" strike="noStrike" kern="1200" cap="none" spc="0" normalizeH="0" baseline="0" noProof="0">
+                <a:ln>
+                  <a:noFill/>
+                </a:ln>
+                <a:solidFill>
+                  <a:prstClr val="black"/>
+                </a:solidFill>
+                <a:effectLst/>
+                <a:uLnTx/>
+                <a:uFillTx/>
+                <a:ea typeface="+mn-ea"/>
+                <a:cs typeface="+mn-cs"/>
+              </a:endParaRPr>
+            </a:p>
+          </p:txBody>
+        </p:sp>
+        <p:sp>
+          <p:nvSpPr>
+            <p:cNvPr id="22" name="TextBox 21">
+              <a:extLst>
+                <a:ext uri="{FF2B5EF4-FFF2-40B4-BE49-F238E27FC236}">
+                  <a16:creationId xmlns:a16="http://schemas.microsoft.com/office/drawing/2014/main" id="{F268AEC8-6C38-0232-0F56-5A4E5946BD1B}"/>
+                </a:ext>
+              </a:extLst>
+            </p:cNvPr>
+            <p:cNvSpPr txBox="1"/>
+            <p:nvPr/>
+          </p:nvSpPr>
+          <p:spPr>
+            <a:xfrm>
+              <a:off x="3995650" y="4276305"/>
+              <a:ext cx="412292" cy="230832"/>
+            </a:xfrm>
+            <a:prstGeom prst="rect">
+              <a:avLst/>
+            </a:prstGeom>
+            <a:noFill/>
+          </p:spPr>
+          <p:txBody>
+            <a:bodyPr wrap="square" rtlCol="0">
+              <a:spAutoFit/>
+            </a:bodyPr>
+            <a:lstStyle/>
+            <a:p>
+              <a:pPr marL="0" marR="0" lvl="0" indent="0" algn="l" defTabSz="914400" rtl="0" eaLnBrk="1" fontAlgn="auto" latinLnBrk="0" hangingPunct="1">
+                <a:lnSpc>
+                  <a:spcPct val="100000"/>
+                </a:lnSpc>
+                <a:spcBef>
+                  <a:spcPts val="0"/>
+                </a:spcBef>
+                <a:spcAft>
+                  <a:spcPts val="0"/>
+                </a:spcAft>
+                <a:buClrTx/>
+                <a:buSzTx/>
+                <a:buFontTx/>
+                <a:buNone/>
+                <a:tabLst/>
+                <a:defRPr/>
+              </a:pPr>
+              <a:r>
+                <a:rPr kumimoji="0" lang="en-US" sz="900" b="0" i="0" u="none" strike="noStrike" kern="1200" cap="none" spc="0" normalizeH="0" baseline="0" noProof="0" dirty="0">
+                  <a:ln>
+                    <a:noFill/>
+                  </a:ln>
+                  <a:solidFill>
+                    <a:prstClr val="black"/>
+                  </a:solidFill>
+                  <a:effectLst/>
+                  <a:uLnTx/>
+                  <a:uFillTx/>
+                  <a:ea typeface="+mn-ea"/>
+                  <a:cs typeface="+mn-cs"/>
+                </a:rPr>
+                <a:t>host</a:t>
+              </a:r>
+            </a:p>
+          </p:txBody>
+        </p:sp>
+      </p:grpSp>
+      <p:grpSp>
+        <p:nvGrpSpPr>
+          <p:cNvPr id="9" name="Group 8">
+            <a:extLst>
+              <a:ext uri="{FF2B5EF4-FFF2-40B4-BE49-F238E27FC236}">
+                <a16:creationId xmlns:a16="http://schemas.microsoft.com/office/drawing/2014/main" id="{38983788-9062-D8A3-6D54-EADBC6687F98}"/>
+              </a:ext>
+            </a:extLst>
+          </p:cNvPr>
+          <p:cNvGrpSpPr/>
+          <p:nvPr/>
+        </p:nvGrpSpPr>
+        <p:grpSpPr>
+          <a:xfrm>
+            <a:off x="6756131" y="3725747"/>
+            <a:ext cx="771421" cy="991032"/>
+            <a:chOff x="3816079" y="4223863"/>
+            <a:chExt cx="771421" cy="991032"/>
+          </a:xfrm>
+        </p:grpSpPr>
+        <p:sp>
+          <p:nvSpPr>
+            <p:cNvPr id="10" name="Rectangle 9">
+              <a:extLst>
+                <a:ext uri="{FF2B5EF4-FFF2-40B4-BE49-F238E27FC236}">
+                  <a16:creationId xmlns:a16="http://schemas.microsoft.com/office/drawing/2014/main" id="{5F76869A-41B1-B995-EFA4-2EE7542BA307}"/>
+                </a:ext>
+              </a:extLst>
+            </p:cNvPr>
+            <p:cNvSpPr/>
+            <p:nvPr/>
+          </p:nvSpPr>
+          <p:spPr>
+            <a:xfrm>
+              <a:off x="3816079" y="4722603"/>
+              <a:ext cx="771421" cy="250978"/>
+            </a:xfrm>
+            <a:prstGeom prst="rect">
+              <a:avLst/>
+            </a:prstGeom>
+            <a:solidFill>
+              <a:schemeClr val="bg1">
+                <a:lumMod val="95000"/>
+              </a:schemeClr>
+            </a:solidFill>
+            <a:ln w="19050">
+              <a:solidFill>
+                <a:schemeClr val="bg2"/>
+              </a:solidFill>
+            </a:ln>
+          </p:spPr>
+          <p:style>
+            <a:lnRef idx="2">
+              <a:schemeClr val="accent1">
+                <a:shade val="50000"/>
+              </a:schemeClr>
+            </a:lnRef>
+            <a:fillRef idx="1">
+              <a:schemeClr val="accent1"/>
+            </a:fillRef>
+            <a:effectRef idx="0">
+              <a:schemeClr val="accent1"/>
+            </a:effectRef>
+            <a:fontRef idx="minor">
+              <a:schemeClr val="lt1"/>
+            </a:fontRef>
+          </p:style>
+          <p:txBody>
+            <a:bodyPr lIns="0" rIns="0" rtlCol="0" anchor="ctr"/>
+            <a:lstStyle/>
+            <a:p>
+              <a:pPr marL="0" marR="0" lvl="0" indent="0" algn="ctr" defTabSz="914400" rtl="0" eaLnBrk="1" fontAlgn="auto" latinLnBrk="0" hangingPunct="1">
+                <a:lnSpc>
+                  <a:spcPct val="100000"/>
+                </a:lnSpc>
+                <a:spcBef>
+                  <a:spcPts val="0"/>
+                </a:spcBef>
+                <a:spcAft>
+                  <a:spcPts val="0"/>
+                </a:spcAft>
+                <a:buClrTx/>
+                <a:buSzTx/>
+                <a:buFontTx/>
+                <a:buNone/>
+                <a:tabLst/>
+                <a:defRPr/>
+              </a:pPr>
+              <a:r>
+                <a:rPr kumimoji="0" lang="en-US" sz="900" b="0" i="0" u="none" strike="noStrike" kern="1200" cap="none" spc="0" normalizeH="0" baseline="0" noProof="0" dirty="0">
+                  <a:ln>
+                    <a:noFill/>
+                  </a:ln>
+                  <a:solidFill>
+                    <a:prstClr val="black"/>
+                  </a:solidFill>
+                  <a:effectLst/>
+                  <a:uLnTx/>
+                  <a:uFillTx/>
+                  <a:ea typeface="+mn-ea"/>
+                  <a:cs typeface="+mn-cs"/>
+                </a:rPr>
+                <a:t>Server</a:t>
+              </a:r>
+            </a:p>
+            <a:p>
+              <a:pPr marL="0" marR="0" lvl="0" indent="0" algn="ctr" defTabSz="914400" rtl="0" eaLnBrk="1" fontAlgn="auto" latinLnBrk="0" hangingPunct="1">
+                <a:lnSpc>
+                  <a:spcPct val="100000"/>
+                </a:lnSpc>
+                <a:spcBef>
+                  <a:spcPts val="0"/>
+                </a:spcBef>
+                <a:spcAft>
+                  <a:spcPts val="0"/>
+                </a:spcAft>
+                <a:buClrTx/>
+                <a:buSzTx/>
+                <a:buFontTx/>
+                <a:buNone/>
+                <a:tabLst/>
+                <a:defRPr/>
+              </a:pPr>
+              <a:r>
+                <a:rPr kumimoji="0" lang="en-US" sz="900" b="0" i="0" u="none" strike="noStrike" kern="1200" cap="none" spc="0" normalizeH="0" baseline="0" noProof="0" dirty="0">
+                  <a:ln>
+                    <a:noFill/>
+                  </a:ln>
+                  <a:solidFill>
+                    <a:prstClr val="black"/>
+                  </a:solidFill>
+                  <a:effectLst/>
+                  <a:uLnTx/>
+                  <a:uFillTx/>
+                  <a:ea typeface="+mn-ea"/>
+                  <a:cs typeface="+mn-cs"/>
+                </a:rPr>
+                <a:t>Platform</a:t>
+              </a:r>
+            </a:p>
+          </p:txBody>
+        </p:sp>
+        <p:sp>
+          <p:nvSpPr>
+            <p:cNvPr id="11" name="Rectangle: Rounded Corners 10">
+              <a:extLst>
+                <a:ext uri="{FF2B5EF4-FFF2-40B4-BE49-F238E27FC236}">
+                  <a16:creationId xmlns:a16="http://schemas.microsoft.com/office/drawing/2014/main" id="{50C4CF9E-9098-7414-E53A-3622FDF1F2C1}"/>
+                </a:ext>
+              </a:extLst>
+            </p:cNvPr>
+            <p:cNvSpPr/>
+            <p:nvPr/>
+          </p:nvSpPr>
+          <p:spPr>
+            <a:xfrm>
+              <a:off x="3816080" y="4399416"/>
+              <a:ext cx="771420" cy="815479"/>
+            </a:xfrm>
+            <a:prstGeom prst="roundRect">
+              <a:avLst/>
+            </a:prstGeom>
+            <a:noFill/>
+            <a:ln w="19050">
+              <a:solidFill>
+                <a:schemeClr val="tx1"/>
+              </a:solidFill>
+            </a:ln>
+          </p:spPr>
+          <p:style>
+            <a:lnRef idx="2">
+              <a:schemeClr val="accent1">
+                <a:shade val="50000"/>
+              </a:schemeClr>
+            </a:lnRef>
+            <a:fillRef idx="1">
+              <a:schemeClr val="accent1"/>
+            </a:fillRef>
+            <a:effectRef idx="0">
+              <a:schemeClr val="accent1"/>
+            </a:effectRef>
+            <a:fontRef idx="minor">
+              <a:schemeClr val="lt1"/>
+            </a:fontRef>
+          </p:style>
+          <p:txBody>
+            <a:bodyPr lIns="45720" tIns="0" bIns="9144" rtlCol="0" anchor="b" anchorCtr="0"/>
+            <a:lstStyle/>
+            <a:p>
+              <a:pPr lvl="0">
+                <a:defRPr/>
+              </a:pPr>
+              <a:r>
+                <a:rPr lang="en-US" sz="800" dirty="0">
+                  <a:solidFill>
+                    <a:prstClr val="black"/>
+                  </a:solidFill>
+                </a:rPr>
+                <a:t>Server-3</a:t>
+              </a:r>
+              <a:endParaRPr kumimoji="0" lang="en-US" sz="800" b="0" i="0" u="none" strike="noStrike" kern="1200" cap="none" spc="0" normalizeH="0" baseline="0" noProof="0" dirty="0">
+                <a:ln>
+                  <a:noFill/>
+                </a:ln>
+                <a:solidFill>
+                  <a:prstClr val="black"/>
+                </a:solidFill>
+                <a:effectLst/>
+                <a:uLnTx/>
+                <a:uFillTx/>
+                <a:ea typeface="+mn-ea"/>
+                <a:cs typeface="+mn-cs"/>
+              </a:endParaRPr>
+            </a:p>
+          </p:txBody>
+        </p:sp>
+        <p:sp>
+          <p:nvSpPr>
+            <p:cNvPr id="12" name="Arrow: Chevron 11">
+              <a:extLst>
+                <a:ext uri="{FF2B5EF4-FFF2-40B4-BE49-F238E27FC236}">
+                  <a16:creationId xmlns:a16="http://schemas.microsoft.com/office/drawing/2014/main" id="{C6A56CA5-FF15-FDAB-A65C-821691A8EA13}"/>
+                </a:ext>
+              </a:extLst>
+            </p:cNvPr>
+            <p:cNvSpPr/>
+            <p:nvPr/>
+          </p:nvSpPr>
+          <p:spPr>
+            <a:xfrm rot="5400000">
+              <a:off x="4026243" y="4166150"/>
+              <a:ext cx="351106" cy="466531"/>
+            </a:xfrm>
+            <a:prstGeom prst="chevron">
+              <a:avLst>
+                <a:gd name="adj" fmla="val 14000"/>
+              </a:avLst>
+            </a:prstGeom>
+            <a:solidFill>
+              <a:schemeClr val="bg1"/>
+            </a:solidFill>
+            <a:ln w="12700">
+              <a:solidFill>
+                <a:schemeClr val="tx1"/>
+              </a:solidFill>
+            </a:ln>
+          </p:spPr>
+          <p:style>
+            <a:lnRef idx="2">
+              <a:schemeClr val="accent1">
+                <a:shade val="50000"/>
+              </a:schemeClr>
+            </a:lnRef>
+            <a:fillRef idx="1">
+              <a:schemeClr val="accent1"/>
+            </a:fillRef>
+            <a:effectRef idx="0">
+              <a:schemeClr val="accent1"/>
+            </a:effectRef>
+            <a:fontRef idx="minor">
+              <a:schemeClr val="lt1"/>
+            </a:fontRef>
+          </p:style>
+          <p:txBody>
+            <a:bodyPr tIns="0" rtlCol="0" anchor="t" anchorCtr="0"/>
+            <a:lstStyle/>
+            <a:p>
+              <a:pPr marL="0" marR="0" lvl="0" indent="0" algn="l" defTabSz="914400" rtl="0" eaLnBrk="1" fontAlgn="auto" latinLnBrk="0" hangingPunct="1">
+                <a:lnSpc>
+                  <a:spcPct val="100000"/>
+                </a:lnSpc>
+                <a:spcBef>
+                  <a:spcPts val="0"/>
+                </a:spcBef>
+                <a:spcAft>
+                  <a:spcPts val="0"/>
+                </a:spcAft>
+                <a:buClrTx/>
+                <a:buSzTx/>
+                <a:buFontTx/>
+                <a:buNone/>
+                <a:tabLst/>
+                <a:defRPr/>
+              </a:pPr>
+              <a:endParaRPr kumimoji="0" lang="en-US" sz="1000" b="0" i="0" u="none" strike="noStrike" kern="1200" cap="none" spc="0" normalizeH="0" baseline="0" noProof="0">
+                <a:ln>
+                  <a:noFill/>
+                </a:ln>
+                <a:solidFill>
+                  <a:prstClr val="black"/>
+                </a:solidFill>
+                <a:effectLst/>
+                <a:uLnTx/>
+                <a:uFillTx/>
+                <a:ea typeface="+mn-ea"/>
+                <a:cs typeface="+mn-cs"/>
+              </a:endParaRPr>
+            </a:p>
+          </p:txBody>
+        </p:sp>
+        <p:sp>
+          <p:nvSpPr>
+            <p:cNvPr id="13" name="TextBox 12">
+              <a:extLst>
+                <a:ext uri="{FF2B5EF4-FFF2-40B4-BE49-F238E27FC236}">
+                  <a16:creationId xmlns:a16="http://schemas.microsoft.com/office/drawing/2014/main" id="{19BA00EF-8EEE-B0E7-013E-E70BE9F3FCFF}"/>
+                </a:ext>
+              </a:extLst>
+            </p:cNvPr>
+            <p:cNvSpPr txBox="1"/>
+            <p:nvPr/>
+          </p:nvSpPr>
+          <p:spPr>
+            <a:xfrm>
+              <a:off x="3995650" y="4276305"/>
+              <a:ext cx="412292" cy="230832"/>
+            </a:xfrm>
+            <a:prstGeom prst="rect">
+              <a:avLst/>
+            </a:prstGeom>
+            <a:noFill/>
+          </p:spPr>
+          <p:txBody>
+            <a:bodyPr wrap="square" rtlCol="0">
+              <a:spAutoFit/>
+            </a:bodyPr>
+            <a:lstStyle/>
+            <a:p>
+              <a:pPr marL="0" marR="0" lvl="0" indent="0" algn="l" defTabSz="914400" rtl="0" eaLnBrk="1" fontAlgn="auto" latinLnBrk="0" hangingPunct="1">
+                <a:lnSpc>
+                  <a:spcPct val="100000"/>
+                </a:lnSpc>
+                <a:spcBef>
+                  <a:spcPts val="0"/>
+                </a:spcBef>
+                <a:spcAft>
+                  <a:spcPts val="0"/>
+                </a:spcAft>
+                <a:buClrTx/>
+                <a:buSzTx/>
+                <a:buFontTx/>
+                <a:buNone/>
+                <a:tabLst/>
+                <a:defRPr/>
+              </a:pPr>
+              <a:r>
+                <a:rPr kumimoji="0" lang="en-US" sz="900" b="0" i="0" u="none" strike="noStrike" kern="1200" cap="none" spc="0" normalizeH="0" baseline="0" noProof="0" dirty="0">
+                  <a:ln>
+                    <a:noFill/>
+                  </a:ln>
+                  <a:solidFill>
+                    <a:prstClr val="black"/>
+                  </a:solidFill>
+                  <a:effectLst/>
+                  <a:uLnTx/>
+                  <a:uFillTx/>
+                  <a:ea typeface="+mn-ea"/>
+                  <a:cs typeface="+mn-cs"/>
+                </a:rPr>
+                <a:t>host</a:t>
+              </a:r>
+            </a:p>
+          </p:txBody>
+        </p:sp>
+      </p:grpSp>
+      <p:cxnSp>
+        <p:nvCxnSpPr>
+          <p:cNvPr id="25" name="Straight Arrow Connector 24">
+            <a:extLst>
+              <a:ext uri="{FF2B5EF4-FFF2-40B4-BE49-F238E27FC236}">
+                <a16:creationId xmlns:a16="http://schemas.microsoft.com/office/drawing/2014/main" id="{EE661CC2-B4A9-39AC-6DFE-1DFC81B81F03}"/>
+              </a:ext>
+            </a:extLst>
+          </p:cNvPr>
+          <p:cNvCxnSpPr>
+            <a:cxnSpLocks/>
+            <a:stCxn id="12" idx="1"/>
+            <a:endCxn id="16" idx="2"/>
+          </p:cNvCxnSpPr>
+          <p:nvPr/>
+        </p:nvCxnSpPr>
+        <p:spPr>
+          <a:xfrm flipH="1" flipV="1">
+            <a:off x="6302708" y="3450499"/>
+            <a:ext cx="839140" cy="324403"/>
+          </a:xfrm>
+          <a:prstGeom prst="straightConnector1">
+            <a:avLst/>
+          </a:prstGeom>
+          <a:ln w="12700">
+            <a:solidFill>
+              <a:schemeClr val="tx1"/>
+            </a:solidFill>
+            <a:headEnd type="triangle" w="med" len="med"/>
+            <a:tailEnd type="none" w="med" len="med"/>
+          </a:ln>
+        </p:spPr>
+        <p:style>
+          <a:lnRef idx="1">
+            <a:schemeClr val="accent1"/>
+          </a:lnRef>
+          <a:fillRef idx="0">
+            <a:schemeClr val="accent1"/>
+          </a:fillRef>
+          <a:effectRef idx="0">
+            <a:schemeClr val="accent1"/>
+          </a:effectRef>
+          <a:fontRef idx="minor">
+            <a:schemeClr val="tx1"/>
+          </a:fontRef>
+        </p:style>
+      </p:cxnSp>
+      <p:grpSp>
+        <p:nvGrpSpPr>
+          <p:cNvPr id="46" name="Group 45">
+            <a:extLst>
+              <a:ext uri="{FF2B5EF4-FFF2-40B4-BE49-F238E27FC236}">
+                <a16:creationId xmlns:a16="http://schemas.microsoft.com/office/drawing/2014/main" id="{2DF1C4E2-20A7-BDF0-6EB5-2A00CD6A9199}"/>
+              </a:ext>
+            </a:extLst>
+          </p:cNvPr>
+          <p:cNvGrpSpPr/>
+          <p:nvPr/>
+        </p:nvGrpSpPr>
+        <p:grpSpPr>
+          <a:xfrm>
+            <a:off x="4679465" y="3764139"/>
+            <a:ext cx="776284" cy="952640"/>
+            <a:chOff x="4472071" y="3660442"/>
+            <a:chExt cx="776284" cy="952640"/>
+          </a:xfrm>
+        </p:grpSpPr>
+        <p:sp>
+          <p:nvSpPr>
+            <p:cNvPr id="4" name="Rectangle 3">
+              <a:extLst>
+                <a:ext uri="{FF2B5EF4-FFF2-40B4-BE49-F238E27FC236}">
+                  <a16:creationId xmlns:a16="http://schemas.microsoft.com/office/drawing/2014/main" id="{3F6342D2-2BD2-3F2F-12EC-A146021CED14}"/>
+                </a:ext>
+              </a:extLst>
+            </p:cNvPr>
+            <p:cNvSpPr/>
+            <p:nvPr/>
+          </p:nvSpPr>
+          <p:spPr>
+            <a:xfrm>
+              <a:off x="4476934" y="4120790"/>
+              <a:ext cx="771421" cy="250978"/>
+            </a:xfrm>
+            <a:prstGeom prst="rect">
+              <a:avLst/>
+            </a:prstGeom>
+            <a:solidFill>
+              <a:schemeClr val="bg1">
+                <a:lumMod val="95000"/>
+              </a:schemeClr>
+            </a:solidFill>
+            <a:ln w="19050">
+              <a:solidFill>
+                <a:schemeClr val="bg2"/>
+              </a:solidFill>
+            </a:ln>
+          </p:spPr>
+          <p:style>
+            <a:lnRef idx="2">
+              <a:schemeClr val="accent1">
+                <a:shade val="50000"/>
+              </a:schemeClr>
+            </a:lnRef>
+            <a:fillRef idx="1">
+              <a:schemeClr val="accent1"/>
+            </a:fillRef>
+            <a:effectRef idx="0">
+              <a:schemeClr val="accent1"/>
+            </a:effectRef>
+            <a:fontRef idx="minor">
+              <a:schemeClr val="lt1"/>
+            </a:fontRef>
+          </p:style>
+          <p:txBody>
+            <a:bodyPr lIns="0" rIns="0" rtlCol="0" anchor="ctr"/>
+            <a:lstStyle/>
+            <a:p>
+              <a:pPr marL="0" marR="0" lvl="0" indent="0" algn="ctr" defTabSz="914400" rtl="0" eaLnBrk="1" fontAlgn="auto" latinLnBrk="0" hangingPunct="1">
+                <a:lnSpc>
+                  <a:spcPct val="100000"/>
+                </a:lnSpc>
+                <a:spcBef>
+                  <a:spcPts val="0"/>
+                </a:spcBef>
+                <a:spcAft>
+                  <a:spcPts val="0"/>
+                </a:spcAft>
+                <a:buClrTx/>
+                <a:buSzTx/>
+                <a:buFontTx/>
+                <a:buNone/>
+                <a:tabLst/>
+                <a:defRPr/>
+              </a:pPr>
+              <a:r>
+                <a:rPr kumimoji="0" lang="en-US" sz="900" b="0" i="0" u="none" strike="noStrike" kern="1200" cap="none" spc="0" normalizeH="0" baseline="0" noProof="0" dirty="0">
+                  <a:ln>
+                    <a:noFill/>
+                  </a:ln>
+                  <a:solidFill>
+                    <a:prstClr val="black"/>
+                  </a:solidFill>
+                  <a:effectLst/>
+                  <a:uLnTx/>
+                  <a:uFillTx/>
+                  <a:ea typeface="+mn-ea"/>
+                  <a:cs typeface="+mn-cs"/>
+                </a:rPr>
+                <a:t>Server</a:t>
+              </a:r>
+            </a:p>
+            <a:p>
+              <a:pPr marL="0" marR="0" lvl="0" indent="0" algn="ctr" defTabSz="914400" rtl="0" eaLnBrk="1" fontAlgn="auto" latinLnBrk="0" hangingPunct="1">
+                <a:lnSpc>
+                  <a:spcPct val="100000"/>
+                </a:lnSpc>
+                <a:spcBef>
+                  <a:spcPts val="0"/>
+                </a:spcBef>
+                <a:spcAft>
+                  <a:spcPts val="0"/>
+                </a:spcAft>
+                <a:buClrTx/>
+                <a:buSzTx/>
+                <a:buFontTx/>
+                <a:buNone/>
+                <a:tabLst/>
+                <a:defRPr/>
+              </a:pPr>
+              <a:r>
+                <a:rPr kumimoji="0" lang="en-US" sz="900" b="0" i="0" u="none" strike="noStrike" kern="1200" cap="none" spc="0" normalizeH="0" baseline="0" noProof="0" dirty="0">
+                  <a:ln>
+                    <a:noFill/>
+                  </a:ln>
+                  <a:solidFill>
+                    <a:prstClr val="black"/>
+                  </a:solidFill>
+                  <a:effectLst/>
+                  <a:uLnTx/>
+                  <a:uFillTx/>
+                  <a:ea typeface="+mn-ea"/>
+                  <a:cs typeface="+mn-cs"/>
+                </a:rPr>
+                <a:t>Platform</a:t>
+              </a:r>
+            </a:p>
+          </p:txBody>
+        </p:sp>
+        <p:sp>
+          <p:nvSpPr>
+            <p:cNvPr id="5" name="Rectangle: Rounded Corners 4">
+              <a:extLst>
+                <a:ext uri="{FF2B5EF4-FFF2-40B4-BE49-F238E27FC236}">
+                  <a16:creationId xmlns:a16="http://schemas.microsoft.com/office/drawing/2014/main" id="{C2B03128-B2AD-BACE-B928-B415473EEF22}"/>
+                </a:ext>
+              </a:extLst>
+            </p:cNvPr>
+            <p:cNvSpPr/>
+            <p:nvPr/>
+          </p:nvSpPr>
+          <p:spPr>
+            <a:xfrm>
+              <a:off x="4476935" y="3797603"/>
+              <a:ext cx="771420" cy="815479"/>
+            </a:xfrm>
+            <a:prstGeom prst="roundRect">
+              <a:avLst/>
+            </a:prstGeom>
+            <a:noFill/>
+            <a:ln w="19050">
+              <a:solidFill>
+                <a:schemeClr val="tx1"/>
+              </a:solidFill>
+            </a:ln>
+          </p:spPr>
+          <p:style>
+            <a:lnRef idx="2">
+              <a:schemeClr val="accent1">
+                <a:shade val="50000"/>
+              </a:schemeClr>
+            </a:lnRef>
+            <a:fillRef idx="1">
+              <a:schemeClr val="accent1"/>
+            </a:fillRef>
+            <a:effectRef idx="0">
+              <a:schemeClr val="accent1"/>
+            </a:effectRef>
+            <a:fontRef idx="minor">
+              <a:schemeClr val="lt1"/>
+            </a:fontRef>
+          </p:style>
+          <p:txBody>
+            <a:bodyPr lIns="45720" tIns="0" bIns="9144" rtlCol="0" anchor="b" anchorCtr="0"/>
+            <a:lstStyle/>
+            <a:p>
+              <a:pPr lvl="0">
+                <a:defRPr/>
+              </a:pPr>
+              <a:r>
+                <a:rPr lang="en-US" sz="800" dirty="0">
+                  <a:solidFill>
+                    <a:prstClr val="black"/>
+                  </a:solidFill>
+                </a:rPr>
+                <a:t>Server-1</a:t>
+              </a:r>
+              <a:endParaRPr kumimoji="0" lang="en-US" sz="800" b="0" i="0" u="none" strike="noStrike" kern="1200" cap="none" spc="0" normalizeH="0" baseline="0" noProof="0" dirty="0">
+                <a:ln>
+                  <a:noFill/>
+                </a:ln>
+                <a:solidFill>
+                  <a:prstClr val="black"/>
+                </a:solidFill>
+                <a:effectLst/>
+                <a:uLnTx/>
+                <a:uFillTx/>
+                <a:ea typeface="+mn-ea"/>
+                <a:cs typeface="+mn-cs"/>
+              </a:endParaRPr>
+            </a:p>
+          </p:txBody>
+        </p:sp>
+        <p:grpSp>
+          <p:nvGrpSpPr>
+            <p:cNvPr id="43" name="Group 42">
+              <a:extLst>
+                <a:ext uri="{FF2B5EF4-FFF2-40B4-BE49-F238E27FC236}">
+                  <a16:creationId xmlns:a16="http://schemas.microsoft.com/office/drawing/2014/main" id="{75421F49-5858-B04E-3447-24F0CF1D165A}"/>
+                </a:ext>
+              </a:extLst>
+            </p:cNvPr>
+            <p:cNvGrpSpPr/>
+            <p:nvPr/>
+          </p:nvGrpSpPr>
+          <p:grpSpPr>
+            <a:xfrm>
+              <a:off x="4472071" y="3660442"/>
+              <a:ext cx="772086" cy="274320"/>
+              <a:chOff x="2171837" y="2443293"/>
+              <a:chExt cx="772086" cy="274320"/>
+            </a:xfrm>
+          </p:grpSpPr>
+          <p:grpSp>
+            <p:nvGrpSpPr>
+              <p:cNvPr id="41" name="Group 40">
+                <a:extLst>
+                  <a:ext uri="{FF2B5EF4-FFF2-40B4-BE49-F238E27FC236}">
+                    <a16:creationId xmlns:a16="http://schemas.microsoft.com/office/drawing/2014/main" id="{B460EE91-8F4A-C607-FBF9-AEF9F0222ADA}"/>
+                  </a:ext>
+                </a:extLst>
+              </p:cNvPr>
+              <p:cNvGrpSpPr/>
+              <p:nvPr/>
+            </p:nvGrpSpPr>
+            <p:grpSpPr>
+              <a:xfrm>
+                <a:off x="2171837" y="2443293"/>
+                <a:ext cx="412292" cy="274320"/>
+                <a:chOff x="2171837" y="2443293"/>
+                <a:chExt cx="412292" cy="274320"/>
+              </a:xfrm>
+            </p:grpSpPr>
+            <p:sp>
+              <p:nvSpPr>
+                <p:cNvPr id="31" name="Arrow: Chevron 30">
+                  <a:extLst>
+                    <a:ext uri="{FF2B5EF4-FFF2-40B4-BE49-F238E27FC236}">
+                      <a16:creationId xmlns:a16="http://schemas.microsoft.com/office/drawing/2014/main" id="{E33BF713-5749-D825-4DD3-1F73586886D5}"/>
+                    </a:ext>
+                  </a:extLst>
+                </p:cNvPr>
+                <p:cNvSpPr>
+                  <a:spLocks/>
+                </p:cNvSpPr>
+                <p:nvPr/>
+              </p:nvSpPr>
+              <p:spPr>
+                <a:xfrm rot="5400000">
+                  <a:off x="2240823" y="2429577"/>
+                  <a:ext cx="274320" cy="301752"/>
+                </a:xfrm>
+                <a:prstGeom prst="chevron">
+                  <a:avLst>
+                    <a:gd name="adj" fmla="val 14000"/>
+                  </a:avLst>
+                </a:prstGeom>
+                <a:solidFill>
+                  <a:schemeClr val="bg1"/>
+                </a:solidFill>
+                <a:ln w="12700">
+                  <a:solidFill>
+                    <a:schemeClr val="tx1"/>
+                  </a:solidFill>
+                </a:ln>
+              </p:spPr>
+              <p:style>
+                <a:lnRef idx="2">
+                  <a:schemeClr val="accent1">
+                    <a:shade val="50000"/>
+                  </a:schemeClr>
+                </a:lnRef>
+                <a:fillRef idx="1">
+                  <a:schemeClr val="accent1"/>
+                </a:fillRef>
+                <a:effectRef idx="0">
+                  <a:schemeClr val="accent1"/>
+                </a:effectRef>
+                <a:fontRef idx="minor">
+                  <a:schemeClr val="lt1"/>
+                </a:fontRef>
+              </p:style>
+              <p:txBody>
+                <a:bodyPr tIns="0" rtlCol="0" anchor="t" anchorCtr="0"/>
+                <a:lstStyle/>
+                <a:p>
+                  <a:pPr marL="0" marR="0" lvl="0" indent="0" algn="ctr" defTabSz="914400" rtl="0" eaLnBrk="1" fontAlgn="auto" latinLnBrk="0" hangingPunct="1">
+                    <a:lnSpc>
+                      <a:spcPct val="100000"/>
+                    </a:lnSpc>
+                    <a:spcBef>
+                      <a:spcPts val="0"/>
+                    </a:spcBef>
+                    <a:spcAft>
+                      <a:spcPts val="0"/>
+                    </a:spcAft>
+                    <a:buClrTx/>
+                    <a:buSzTx/>
+                    <a:buFontTx/>
+                    <a:buNone/>
+                    <a:tabLst/>
+                    <a:defRPr/>
+                  </a:pPr>
+                  <a:endParaRPr kumimoji="0" lang="en-US" sz="1000" b="0" i="0" u="none" strike="noStrike" kern="1200" cap="none" spc="0" normalizeH="0" baseline="0" noProof="0">
+                    <a:ln>
+                      <a:noFill/>
+                    </a:ln>
+                    <a:solidFill>
+                      <a:prstClr val="black"/>
+                    </a:solidFill>
+                    <a:effectLst/>
+                    <a:uLnTx/>
+                    <a:uFillTx/>
+                    <a:ea typeface="+mn-ea"/>
+                    <a:cs typeface="+mn-cs"/>
+                  </a:endParaRPr>
+                </a:p>
+              </p:txBody>
+            </p:sp>
+            <p:sp>
+              <p:nvSpPr>
+                <p:cNvPr id="32" name="TextBox 31">
+                  <a:extLst>
+                    <a:ext uri="{FF2B5EF4-FFF2-40B4-BE49-F238E27FC236}">
+                      <a16:creationId xmlns:a16="http://schemas.microsoft.com/office/drawing/2014/main" id="{C6E9D265-1678-44B6-6445-581052C2809D}"/>
+                    </a:ext>
+                  </a:extLst>
+                </p:cNvPr>
+                <p:cNvSpPr txBox="1"/>
+                <p:nvPr/>
+              </p:nvSpPr>
+              <p:spPr>
+                <a:xfrm>
+                  <a:off x="2171837" y="2495736"/>
+                  <a:ext cx="412292" cy="138499"/>
+                </a:xfrm>
+                <a:prstGeom prst="rect">
+                  <a:avLst/>
+                </a:prstGeom>
+                <a:noFill/>
+              </p:spPr>
+              <p:txBody>
+                <a:bodyPr wrap="square" lIns="0" tIns="0" rIns="0" bIns="0" rtlCol="0">
+                  <a:spAutoFit/>
+                </a:bodyPr>
+                <a:lstStyle/>
+                <a:p>
+                  <a:pPr marL="0" marR="0" lvl="0" indent="0" algn="ctr" defTabSz="914400" rtl="0" eaLnBrk="1" fontAlgn="auto" latinLnBrk="0" hangingPunct="1">
+                    <a:lnSpc>
+                      <a:spcPct val="100000"/>
+                    </a:lnSpc>
+                    <a:spcBef>
+                      <a:spcPts val="0"/>
+                    </a:spcBef>
+                    <a:spcAft>
+                      <a:spcPts val="0"/>
+                    </a:spcAft>
+                    <a:buClrTx/>
+                    <a:buSzTx/>
+                    <a:buFontTx/>
+                    <a:buNone/>
+                    <a:tabLst/>
+                    <a:defRPr/>
+                  </a:pPr>
+                  <a:r>
+                    <a:rPr kumimoji="0" lang="en-US" sz="900" b="0" i="0" u="none" strike="noStrike" kern="1200" cap="none" spc="0" normalizeH="0" baseline="0" noProof="0" dirty="0">
+                      <a:ln>
+                        <a:noFill/>
+                      </a:ln>
+                      <a:solidFill>
+                        <a:prstClr val="black"/>
+                      </a:solidFill>
+                      <a:effectLst/>
+                      <a:uLnTx/>
+                      <a:uFillTx/>
+                      <a:ea typeface="+mn-ea"/>
+                      <a:cs typeface="+mn-cs"/>
+                    </a:rPr>
+                    <a:t>exec</a:t>
+                  </a:r>
+                </a:p>
+              </p:txBody>
+            </p:sp>
+          </p:grpSp>
+          <p:grpSp>
+            <p:nvGrpSpPr>
+              <p:cNvPr id="42" name="Group 41">
+                <a:extLst>
+                  <a:ext uri="{FF2B5EF4-FFF2-40B4-BE49-F238E27FC236}">
+                    <a16:creationId xmlns:a16="http://schemas.microsoft.com/office/drawing/2014/main" id="{2E810DE2-E4AA-8500-C989-D976B72DAABA}"/>
+                  </a:ext>
+                </a:extLst>
+              </p:cNvPr>
+              <p:cNvGrpSpPr/>
+              <p:nvPr/>
+            </p:nvGrpSpPr>
+            <p:grpSpPr>
+              <a:xfrm>
+                <a:off x="2531631" y="2443293"/>
+                <a:ext cx="412292" cy="274320"/>
+                <a:chOff x="2324237" y="3199009"/>
+                <a:chExt cx="412292" cy="274320"/>
+              </a:xfrm>
+            </p:grpSpPr>
+            <p:sp>
+              <p:nvSpPr>
+                <p:cNvPr id="33" name="Arrow: Chevron 32">
+                  <a:extLst>
+                    <a:ext uri="{FF2B5EF4-FFF2-40B4-BE49-F238E27FC236}">
+                      <a16:creationId xmlns:a16="http://schemas.microsoft.com/office/drawing/2014/main" id="{7D89F4A9-45E3-6D6D-FE5F-2E1F136DA3DE}"/>
+                    </a:ext>
+                  </a:extLst>
+                </p:cNvPr>
+                <p:cNvSpPr>
+                  <a:spLocks/>
+                </p:cNvSpPr>
+                <p:nvPr/>
+              </p:nvSpPr>
+              <p:spPr>
+                <a:xfrm rot="5400000">
+                  <a:off x="2381814" y="3185293"/>
+                  <a:ext cx="274320" cy="301752"/>
+                </a:xfrm>
+                <a:prstGeom prst="chevron">
+                  <a:avLst>
+                    <a:gd name="adj" fmla="val 14000"/>
+                  </a:avLst>
+                </a:prstGeom>
+                <a:solidFill>
+                  <a:schemeClr val="bg1"/>
+                </a:solidFill>
+                <a:ln w="12700">
+                  <a:solidFill>
+                    <a:schemeClr val="tx1"/>
+                  </a:solidFill>
+                </a:ln>
+              </p:spPr>
+              <p:style>
+                <a:lnRef idx="2">
+                  <a:schemeClr val="accent1">
+                    <a:shade val="50000"/>
+                  </a:schemeClr>
+                </a:lnRef>
+                <a:fillRef idx="1">
+                  <a:schemeClr val="accent1"/>
+                </a:fillRef>
+                <a:effectRef idx="0">
+                  <a:schemeClr val="accent1"/>
+                </a:effectRef>
+                <a:fontRef idx="minor">
+                  <a:schemeClr val="lt1"/>
+                </a:fontRef>
+              </p:style>
+              <p:txBody>
+                <a:bodyPr tIns="0" rtlCol="0" anchor="t" anchorCtr="0"/>
+                <a:lstStyle/>
+                <a:p>
+                  <a:pPr marL="0" marR="0" lvl="0" indent="0" algn="l" defTabSz="914400" rtl="0" eaLnBrk="1" fontAlgn="auto" latinLnBrk="0" hangingPunct="1">
+                    <a:lnSpc>
+                      <a:spcPct val="100000"/>
+                    </a:lnSpc>
+                    <a:spcBef>
+                      <a:spcPts val="0"/>
+                    </a:spcBef>
+                    <a:spcAft>
+                      <a:spcPts val="0"/>
+                    </a:spcAft>
+                    <a:buClrTx/>
+                    <a:buSzTx/>
+                    <a:buFontTx/>
+                    <a:buNone/>
+                    <a:tabLst/>
+                    <a:defRPr/>
+                  </a:pPr>
+                  <a:endParaRPr kumimoji="0" lang="en-US" sz="1000" b="0" i="0" u="none" strike="noStrike" kern="1200" cap="none" spc="0" normalizeH="0" baseline="0" noProof="0">
+                    <a:ln>
+                      <a:noFill/>
+                    </a:ln>
+                    <a:solidFill>
+                      <a:prstClr val="black"/>
+                    </a:solidFill>
+                    <a:effectLst/>
+                    <a:uLnTx/>
+                    <a:uFillTx/>
+                    <a:ea typeface="+mn-ea"/>
+                    <a:cs typeface="+mn-cs"/>
+                  </a:endParaRPr>
+                </a:p>
+              </p:txBody>
+            </p:sp>
+            <p:sp>
+              <p:nvSpPr>
+                <p:cNvPr id="38" name="TextBox 37">
+                  <a:extLst>
+                    <a:ext uri="{FF2B5EF4-FFF2-40B4-BE49-F238E27FC236}">
+                      <a16:creationId xmlns:a16="http://schemas.microsoft.com/office/drawing/2014/main" id="{1F6FF579-B0C3-0657-65B8-5326CDA63148}"/>
+                    </a:ext>
+                  </a:extLst>
+                </p:cNvPr>
+                <p:cNvSpPr txBox="1"/>
+                <p:nvPr/>
+              </p:nvSpPr>
+              <p:spPr>
+                <a:xfrm>
+                  <a:off x="2324237" y="3251452"/>
+                  <a:ext cx="412292" cy="138499"/>
+                </a:xfrm>
+                <a:prstGeom prst="rect">
+                  <a:avLst/>
+                </a:prstGeom>
+                <a:noFill/>
+              </p:spPr>
+              <p:txBody>
+                <a:bodyPr wrap="square" lIns="0" tIns="0" rIns="0" bIns="0" rtlCol="0">
+                  <a:spAutoFit/>
+                </a:bodyPr>
+                <a:lstStyle/>
+                <a:p>
+                  <a:pPr marL="0" marR="0" lvl="0" indent="0" algn="ctr" defTabSz="914400" rtl="0" eaLnBrk="1" fontAlgn="auto" latinLnBrk="0" hangingPunct="1">
+                    <a:lnSpc>
+                      <a:spcPct val="100000"/>
+                    </a:lnSpc>
+                    <a:spcBef>
+                      <a:spcPts val="0"/>
+                    </a:spcBef>
+                    <a:spcAft>
+                      <a:spcPts val="0"/>
+                    </a:spcAft>
+                    <a:buClrTx/>
+                    <a:buSzTx/>
+                    <a:buFontTx/>
+                    <a:buNone/>
+                    <a:tabLst/>
+                    <a:defRPr/>
+                  </a:pPr>
+                  <a:r>
+                    <a:rPr kumimoji="0" lang="en-US" sz="900" b="0" i="0" u="none" strike="noStrike" kern="1200" cap="none" spc="0" normalizeH="0" baseline="0" noProof="0" dirty="0">
+                      <a:ln>
+                        <a:noFill/>
+                      </a:ln>
+                      <a:solidFill>
+                        <a:prstClr val="black"/>
+                      </a:solidFill>
+                      <a:effectLst/>
+                      <a:uLnTx/>
+                      <a:uFillTx/>
+                      <a:ea typeface="+mn-ea"/>
+                      <a:cs typeface="+mn-cs"/>
+                    </a:rPr>
+                    <a:t>host</a:t>
+                  </a:r>
+                </a:p>
+              </p:txBody>
+            </p:sp>
+          </p:grpSp>
+        </p:grpSp>
+      </p:grpSp>
+      <p:cxnSp>
+        <p:nvCxnSpPr>
+          <p:cNvPr id="55" name="Straight Arrow Connector 54">
+            <a:extLst>
+              <a:ext uri="{FF2B5EF4-FFF2-40B4-BE49-F238E27FC236}">
+                <a16:creationId xmlns:a16="http://schemas.microsoft.com/office/drawing/2014/main" id="{BF6CA7C1-E4F1-8DA7-FB04-B843FDF689CE}"/>
+              </a:ext>
+            </a:extLst>
+          </p:cNvPr>
+          <p:cNvCxnSpPr>
+            <a:cxnSpLocks/>
+            <a:stCxn id="31" idx="1"/>
+            <a:endCxn id="2" idx="2"/>
+          </p:cNvCxnSpPr>
+          <p:nvPr/>
+        </p:nvCxnSpPr>
+        <p:spPr>
+          <a:xfrm flipV="1">
+            <a:off x="4885611" y="3450499"/>
+            <a:ext cx="1031685" cy="352045"/>
+          </a:xfrm>
+          <a:prstGeom prst="straightConnector1">
+            <a:avLst/>
+          </a:prstGeom>
+          <a:ln w="12700">
+            <a:solidFill>
+              <a:schemeClr val="tx1"/>
+            </a:solidFill>
+            <a:headEnd type="triangle" w="med" len="med"/>
+            <a:tailEnd type="none" w="med" len="med"/>
+          </a:ln>
+        </p:spPr>
+        <p:style>
+          <a:lnRef idx="1">
+            <a:schemeClr val="accent1"/>
+          </a:lnRef>
+          <a:fillRef idx="0">
+            <a:schemeClr val="accent1"/>
+          </a:fillRef>
+          <a:effectRef idx="0">
+            <a:schemeClr val="accent1"/>
+          </a:effectRef>
+          <a:fontRef idx="minor">
+            <a:schemeClr val="tx1"/>
+          </a:fontRef>
+        </p:style>
+      </p:cxnSp>
+    </p:spTree>
+    <p:extLst>
+      <p:ext uri="{BB962C8B-B14F-4D97-AF65-F5344CB8AC3E}">
+        <p14:creationId xmlns:p14="http://schemas.microsoft.com/office/powerpoint/2010/main" val="4009720585"/>
+      </p:ext>
+    </p:extLst>
+  </p:cSld>
+  <p:clrMapOvr>
+    <a:masterClrMapping/>
+  </p:clrMapOvr>
+</p:sld>
+</file>
+
+<file path=ppt/slides/slide9.xml><?xml version="1.0" encoding="utf-8"?>
+<p:sld xmlns:a="http://schemas.openxmlformats.org/drawingml/2006/main" xmlns:r="http://schemas.openxmlformats.org/officeDocument/2006/relationships" xmlns:p="http://schemas.openxmlformats.org/presentationml/2006/main">
+  <p:cSld>
+    <p:spTree>
+      <p:nvGrpSpPr>
+        <p:cNvPr id="1" name=""/>
+        <p:cNvGrpSpPr/>
+        <p:nvPr/>
+      </p:nvGrpSpPr>
+      <p:grpSpPr>
+        <a:xfrm>
+          <a:off x="0" y="0"/>
+          <a:ext cx="0" cy="0"/>
+          <a:chOff x="0" y="0"/>
+          <a:chExt cx="0" cy="0"/>
+        </a:xfrm>
+      </p:grpSpPr>
+      <p:grpSp>
+        <p:nvGrpSpPr>
+          <p:cNvPr id="48" name="Group 47">
+            <a:extLst>
+              <a:ext uri="{FF2B5EF4-FFF2-40B4-BE49-F238E27FC236}">
+                <a16:creationId xmlns:a16="http://schemas.microsoft.com/office/drawing/2014/main" id="{FED66C52-1B56-6179-741E-A80C19EA644A}"/>
+              </a:ext>
+            </a:extLst>
+          </p:cNvPr>
+          <p:cNvGrpSpPr/>
+          <p:nvPr/>
+        </p:nvGrpSpPr>
+        <p:grpSpPr>
+          <a:xfrm>
+            <a:off x="5717798" y="2244919"/>
+            <a:ext cx="771421" cy="1205580"/>
+            <a:chOff x="5762648" y="2244919"/>
+            <a:chExt cx="771421" cy="1205580"/>
+          </a:xfrm>
+        </p:grpSpPr>
+        <p:grpSp>
+          <p:nvGrpSpPr>
+            <p:cNvPr id="146" name="Group 145">
+              <a:extLst>
+                <a:ext uri="{FF2B5EF4-FFF2-40B4-BE49-F238E27FC236}">
+                  <a16:creationId xmlns:a16="http://schemas.microsoft.com/office/drawing/2014/main" id="{21372C5F-6019-6E0C-9508-4E8A358AF2EE}"/>
+                </a:ext>
+              </a:extLst>
+            </p:cNvPr>
+            <p:cNvGrpSpPr/>
+            <p:nvPr/>
+          </p:nvGrpSpPr>
+          <p:grpSpPr>
+            <a:xfrm>
+              <a:off x="5762648" y="2447989"/>
+              <a:ext cx="771421" cy="815478"/>
+              <a:chOff x="4115528" y="2823110"/>
+              <a:chExt cx="771421" cy="815478"/>
+            </a:xfrm>
+          </p:grpSpPr>
+          <p:sp>
+            <p:nvSpPr>
+              <p:cNvPr id="34" name="Rectangle 33">
+                <a:extLst>
+                  <a:ext uri="{FF2B5EF4-FFF2-40B4-BE49-F238E27FC236}">
+                    <a16:creationId xmlns:a16="http://schemas.microsoft.com/office/drawing/2014/main" id="{AC8C008F-40AE-7B56-066D-358A9B134B49}"/>
+                  </a:ext>
+                </a:extLst>
+              </p:cNvPr>
+              <p:cNvSpPr/>
+              <p:nvPr/>
+            </p:nvSpPr>
+            <p:spPr>
+              <a:xfrm>
+                <a:off x="4115528" y="3145212"/>
+                <a:ext cx="771421" cy="279919"/>
+              </a:xfrm>
+              <a:prstGeom prst="rect">
+                <a:avLst/>
+              </a:prstGeom>
+              <a:solidFill>
+                <a:schemeClr val="bg1">
+                  <a:lumMod val="95000"/>
+                </a:schemeClr>
+              </a:solidFill>
+              <a:ln w="19050">
+                <a:solidFill>
+                  <a:schemeClr val="bg2"/>
+                </a:solidFill>
+              </a:ln>
+            </p:spPr>
+            <p:style>
+              <a:lnRef idx="2">
+                <a:schemeClr val="accent1">
+                  <a:shade val="50000"/>
+                </a:schemeClr>
+              </a:lnRef>
+              <a:fillRef idx="1">
+                <a:schemeClr val="accent1"/>
+              </a:fillRef>
+              <a:effectRef idx="0">
+                <a:schemeClr val="accent1"/>
+              </a:effectRef>
+              <a:fontRef idx="minor">
+                <a:schemeClr val="lt1"/>
+              </a:fontRef>
+            </p:style>
+            <p:txBody>
+              <a:bodyPr lIns="0" rIns="0" rtlCol="0" anchor="ctr"/>
+              <a:lstStyle/>
+              <a:p>
+                <a:pPr marL="0" marR="0" lvl="0" indent="0" algn="ctr" defTabSz="914400" rtl="0" eaLnBrk="1" fontAlgn="auto" latinLnBrk="0" hangingPunct="1">
+                  <a:lnSpc>
+                    <a:spcPct val="100000"/>
+                  </a:lnSpc>
+                  <a:spcBef>
+                    <a:spcPts val="0"/>
+                  </a:spcBef>
+                  <a:spcAft>
+                    <a:spcPts val="0"/>
+                  </a:spcAft>
+                  <a:buClrTx/>
+                  <a:buSzTx/>
+                  <a:buFontTx/>
+                  <a:buNone/>
+                  <a:tabLst/>
+                  <a:defRPr/>
+                </a:pPr>
+                <a:r>
+                  <a:rPr kumimoji="0" lang="en-US" sz="900" b="0" i="0" u="none" strike="noStrike" kern="1200" cap="none" spc="0" normalizeH="0" baseline="0" noProof="0" dirty="0">
+                    <a:ln>
+                      <a:noFill/>
+                    </a:ln>
+                    <a:solidFill>
+                      <a:prstClr val="black"/>
+                    </a:solidFill>
+                    <a:effectLst/>
+                    <a:uLnTx/>
+                    <a:uFillTx/>
+                    <a:ea typeface="+mn-ea"/>
+                    <a:cs typeface="+mn-cs"/>
+                  </a:rPr>
+                  <a:t>Container Platform</a:t>
+                </a:r>
+              </a:p>
+            </p:txBody>
+          </p:sp>
+          <p:sp>
+            <p:nvSpPr>
+              <p:cNvPr id="35" name="Rectangle: Rounded Corners 34">
+                <a:extLst>
+                  <a:ext uri="{FF2B5EF4-FFF2-40B4-BE49-F238E27FC236}">
+                    <a16:creationId xmlns:a16="http://schemas.microsoft.com/office/drawing/2014/main" id="{DFBFC135-6FE4-4904-9572-E0043D70EBD6}"/>
+                  </a:ext>
+                </a:extLst>
+              </p:cNvPr>
+              <p:cNvSpPr/>
+              <p:nvPr/>
+            </p:nvSpPr>
+            <p:spPr>
+              <a:xfrm>
+                <a:off x="4115528" y="2823110"/>
+                <a:ext cx="771420" cy="815478"/>
+              </a:xfrm>
+              <a:prstGeom prst="roundRect">
+                <a:avLst/>
+              </a:prstGeom>
+              <a:noFill/>
+              <a:ln w="19050">
+                <a:solidFill>
+                  <a:schemeClr val="tx1"/>
+                </a:solidFill>
+              </a:ln>
+            </p:spPr>
+            <p:style>
+              <a:lnRef idx="2">
+                <a:schemeClr val="accent1">
+                  <a:shade val="50000"/>
+                </a:schemeClr>
+              </a:lnRef>
+              <a:fillRef idx="1">
+                <a:schemeClr val="accent1"/>
+              </a:fillRef>
+              <a:effectRef idx="0">
+                <a:schemeClr val="accent1"/>
+              </a:effectRef>
+              <a:fontRef idx="minor">
+                <a:schemeClr val="lt1"/>
+              </a:fontRef>
+            </p:style>
+            <p:txBody>
+              <a:bodyPr lIns="45720" tIns="118872" rtlCol="0" anchor="t" anchorCtr="0"/>
+              <a:lstStyle/>
+              <a:p>
+                <a:pPr marL="0" marR="0" lvl="0" indent="0" algn="l" defTabSz="914400" rtl="0" eaLnBrk="1" fontAlgn="auto" latinLnBrk="0" hangingPunct="1">
+                  <a:lnSpc>
+                    <a:spcPct val="100000"/>
+                  </a:lnSpc>
+                  <a:spcBef>
+                    <a:spcPts val="0"/>
+                  </a:spcBef>
+                  <a:spcAft>
+                    <a:spcPts val="0"/>
+                  </a:spcAft>
+                  <a:buClrTx/>
+                  <a:buSzTx/>
+                  <a:buFontTx/>
+                  <a:buNone/>
+                  <a:tabLst/>
+                  <a:defRPr/>
+                </a:pPr>
+                <a:r>
+                  <a:rPr lang="en-US" sz="800" dirty="0">
+                    <a:solidFill>
+                      <a:prstClr val="black"/>
+                    </a:solidFill>
+                  </a:rPr>
+                  <a:t>cluster-1</a:t>
+                </a:r>
+                <a:endParaRPr kumimoji="0" lang="en-US" sz="800" b="0" i="0" u="none" strike="noStrike" kern="1200" cap="none" spc="0" normalizeH="0" baseline="0" noProof="0" dirty="0">
+                  <a:ln>
+                    <a:noFill/>
+                  </a:ln>
+                  <a:solidFill>
+                    <a:prstClr val="black"/>
+                  </a:solidFill>
+                  <a:effectLst/>
+                  <a:uLnTx/>
+                  <a:uFillTx/>
+                  <a:ea typeface="+mn-ea"/>
+                  <a:cs typeface="+mn-cs"/>
+                </a:endParaRPr>
+              </a:p>
+            </p:txBody>
+          </p:sp>
+        </p:grpSp>
+        <p:grpSp>
+          <p:nvGrpSpPr>
+            <p:cNvPr id="58" name="Group 57">
+              <a:extLst>
+                <a:ext uri="{FF2B5EF4-FFF2-40B4-BE49-F238E27FC236}">
+                  <a16:creationId xmlns:a16="http://schemas.microsoft.com/office/drawing/2014/main" id="{F6FF56A3-16B1-831C-57CE-9919876BB236}"/>
+                </a:ext>
+              </a:extLst>
+            </p:cNvPr>
+            <p:cNvGrpSpPr/>
+            <p:nvPr/>
+          </p:nvGrpSpPr>
+          <p:grpSpPr>
+            <a:xfrm>
+              <a:off x="5915093" y="2244919"/>
+              <a:ext cx="466531" cy="351106"/>
+              <a:chOff x="6810318" y="4284899"/>
+              <a:chExt cx="466531" cy="351106"/>
+            </a:xfrm>
+          </p:grpSpPr>
+          <p:sp>
+            <p:nvSpPr>
+              <p:cNvPr id="54" name="Arrow: Chevron 53">
+                <a:extLst>
+                  <a:ext uri="{FF2B5EF4-FFF2-40B4-BE49-F238E27FC236}">
+                    <a16:creationId xmlns:a16="http://schemas.microsoft.com/office/drawing/2014/main" id="{20E00F62-D32A-8FB7-5FEB-5D3162EC33D3}"/>
+                  </a:ext>
+                </a:extLst>
+              </p:cNvPr>
+              <p:cNvSpPr/>
+              <p:nvPr/>
+            </p:nvSpPr>
+            <p:spPr>
+              <a:xfrm rot="5400000">
+                <a:off x="6868031" y="4227186"/>
+                <a:ext cx="351106" cy="466531"/>
+              </a:xfrm>
+              <a:prstGeom prst="chevron">
+                <a:avLst>
+                  <a:gd name="adj" fmla="val 14000"/>
+                </a:avLst>
+              </a:prstGeom>
+              <a:solidFill>
+                <a:schemeClr val="bg1"/>
+              </a:solidFill>
+              <a:ln w="12700">
+                <a:solidFill>
+                  <a:schemeClr val="tx1"/>
+                </a:solidFill>
+              </a:ln>
+            </p:spPr>
+            <p:style>
+              <a:lnRef idx="2">
+                <a:schemeClr val="accent1">
+                  <a:shade val="50000"/>
+                </a:schemeClr>
+              </a:lnRef>
+              <a:fillRef idx="1">
+                <a:schemeClr val="accent1"/>
+              </a:fillRef>
+              <a:effectRef idx="0">
+                <a:schemeClr val="accent1"/>
+              </a:effectRef>
+              <a:fontRef idx="minor">
+                <a:schemeClr val="lt1"/>
+              </a:fontRef>
+            </p:style>
+            <p:txBody>
+              <a:bodyPr tIns="0" rtlCol="0" anchor="t" anchorCtr="0"/>
+              <a:lstStyle/>
+              <a:p>
+                <a:pPr marL="0" marR="0" lvl="0" indent="0" algn="l" defTabSz="914400" rtl="0" eaLnBrk="1" fontAlgn="auto" latinLnBrk="0" hangingPunct="1">
+                  <a:lnSpc>
+                    <a:spcPct val="100000"/>
+                  </a:lnSpc>
+                  <a:spcBef>
+                    <a:spcPts val="0"/>
+                  </a:spcBef>
+                  <a:spcAft>
+                    <a:spcPts val="0"/>
+                  </a:spcAft>
+                  <a:buClrTx/>
+                  <a:buSzTx/>
+                  <a:buFontTx/>
+                  <a:buNone/>
+                  <a:tabLst/>
+                  <a:defRPr/>
+                </a:pPr>
+                <a:endParaRPr kumimoji="0" lang="en-US" sz="1000" b="0" i="0" u="none" strike="noStrike" kern="1200" cap="none" spc="0" normalizeH="0" baseline="0" noProof="0">
+                  <a:ln>
+                    <a:noFill/>
+                  </a:ln>
+                  <a:solidFill>
+                    <a:prstClr val="black"/>
+                  </a:solidFill>
+                  <a:effectLst/>
+                  <a:uLnTx/>
+                  <a:uFillTx/>
+                  <a:ea typeface="+mn-ea"/>
+                  <a:cs typeface="+mn-cs"/>
+                </a:endParaRPr>
+              </a:p>
+            </p:txBody>
+          </p:sp>
+          <p:sp>
+            <p:nvSpPr>
+              <p:cNvPr id="57" name="TextBox 56">
+                <a:extLst>
+                  <a:ext uri="{FF2B5EF4-FFF2-40B4-BE49-F238E27FC236}">
+                    <a16:creationId xmlns:a16="http://schemas.microsoft.com/office/drawing/2014/main" id="{430F5921-AE55-FC29-BAE4-5A0B0592787C}"/>
+                  </a:ext>
+                </a:extLst>
+              </p:cNvPr>
+              <p:cNvSpPr txBox="1"/>
+              <p:nvPr/>
+            </p:nvSpPr>
+            <p:spPr>
+              <a:xfrm>
+                <a:off x="6837438" y="4337341"/>
+                <a:ext cx="412292" cy="230832"/>
+              </a:xfrm>
+              <a:prstGeom prst="rect">
+                <a:avLst/>
+              </a:prstGeom>
+              <a:noFill/>
+            </p:spPr>
+            <p:txBody>
+              <a:bodyPr wrap="square" rtlCol="0">
+                <a:spAutoFit/>
+              </a:bodyPr>
+              <a:lstStyle/>
+              <a:p>
+                <a:pPr marL="0" marR="0" lvl="0" indent="0" algn="l" defTabSz="914400" rtl="0" eaLnBrk="1" fontAlgn="auto" latinLnBrk="0" hangingPunct="1">
+                  <a:lnSpc>
+                    <a:spcPct val="100000"/>
+                  </a:lnSpc>
+                  <a:spcBef>
+                    <a:spcPts val="0"/>
+                  </a:spcBef>
+                  <a:spcAft>
+                    <a:spcPts val="0"/>
+                  </a:spcAft>
+                  <a:buClrTx/>
+                  <a:buSzTx/>
+                  <a:buFontTx/>
+                  <a:buNone/>
+                  <a:tabLst/>
+                  <a:defRPr/>
+                </a:pPr>
+                <a:r>
+                  <a:rPr kumimoji="0" lang="en-US" sz="900" b="0" i="0" u="none" strike="noStrike" kern="1200" cap="none" spc="0" normalizeH="0" baseline="0" noProof="0" dirty="0">
+                    <a:ln>
+                      <a:noFill/>
+                    </a:ln>
+                    <a:solidFill>
+                      <a:prstClr val="black"/>
+                    </a:solidFill>
+                    <a:effectLst/>
+                    <a:uLnTx/>
+                    <a:uFillTx/>
+                    <a:ea typeface="+mn-ea"/>
+                    <a:cs typeface="+mn-cs"/>
+                  </a:rPr>
+                  <a:t>host</a:t>
+                </a:r>
+              </a:p>
+            </p:txBody>
+          </p:sp>
+        </p:grpSp>
+        <p:grpSp>
+          <p:nvGrpSpPr>
+            <p:cNvPr id="24" name="Group 23">
+              <a:extLst>
+                <a:ext uri="{FF2B5EF4-FFF2-40B4-BE49-F238E27FC236}">
+                  <a16:creationId xmlns:a16="http://schemas.microsoft.com/office/drawing/2014/main" id="{03F61A79-2B14-4689-A373-1B6C8A8BF00D}"/>
+                </a:ext>
+              </a:extLst>
+            </p:cNvPr>
+            <p:cNvGrpSpPr/>
+            <p:nvPr/>
+          </p:nvGrpSpPr>
+          <p:grpSpPr>
+            <a:xfrm>
+              <a:off x="5800358" y="3170580"/>
+              <a:ext cx="708987" cy="279919"/>
+              <a:chOff x="4610835" y="2915239"/>
+              <a:chExt cx="708987" cy="279919"/>
+            </a:xfrm>
+          </p:grpSpPr>
+          <p:sp>
+            <p:nvSpPr>
+              <p:cNvPr id="2" name="Flowchart: Off-page Connector 1">
+                <a:extLst>
+                  <a:ext uri="{FF2B5EF4-FFF2-40B4-BE49-F238E27FC236}">
+                    <a16:creationId xmlns:a16="http://schemas.microsoft.com/office/drawing/2014/main" id="{D2DBAF6C-1A9D-A2B7-54F2-9B06CDF54057}"/>
+                  </a:ext>
+                </a:extLst>
+              </p:cNvPr>
+              <p:cNvSpPr/>
+              <p:nvPr/>
+            </p:nvSpPr>
+            <p:spPr>
+              <a:xfrm>
+                <a:off x="4610835" y="2915239"/>
+                <a:ext cx="323575" cy="279919"/>
+              </a:xfrm>
+              <a:prstGeom prst="flowChartOffpageConnector">
+                <a:avLst/>
+              </a:prstGeom>
+              <a:solidFill>
+                <a:schemeClr val="bg1"/>
+              </a:solidFill>
+              <a:ln w="19050">
+                <a:solidFill>
+                  <a:schemeClr val="tx1"/>
+                </a:solidFill>
+              </a:ln>
+            </p:spPr>
+            <p:style>
+              <a:lnRef idx="2">
+                <a:schemeClr val="accent1">
+                  <a:shade val="50000"/>
+                </a:schemeClr>
+              </a:lnRef>
+              <a:fillRef idx="1">
+                <a:schemeClr val="accent1"/>
+              </a:fillRef>
+              <a:effectRef idx="0">
+                <a:schemeClr val="accent1"/>
+              </a:effectRef>
+              <a:fontRef idx="minor">
+                <a:schemeClr val="lt1"/>
+              </a:fontRef>
+            </p:style>
+            <p:txBody>
+              <a:bodyPr tIns="0" rtlCol="0" anchor="t" anchorCtr="0"/>
+              <a:lstStyle/>
+              <a:p>
+                <a:pPr marL="0" marR="0" lvl="0" indent="0" algn="l" defTabSz="914400" rtl="0" eaLnBrk="1" fontAlgn="auto" latinLnBrk="0" hangingPunct="1">
+                  <a:lnSpc>
+                    <a:spcPct val="100000"/>
+                  </a:lnSpc>
+                  <a:spcBef>
+                    <a:spcPts val="0"/>
+                  </a:spcBef>
+                  <a:spcAft>
+                    <a:spcPts val="0"/>
+                  </a:spcAft>
+                  <a:buClrTx/>
+                  <a:buSzTx/>
+                  <a:buFontTx/>
+                  <a:buNone/>
+                  <a:tabLst/>
+                  <a:defRPr/>
+                </a:pPr>
+                <a:endParaRPr kumimoji="0" lang="en-US" sz="1000" b="0" i="0" u="none" strike="noStrike" kern="1200" cap="none" spc="0" normalizeH="0" baseline="0" noProof="0">
+                  <a:ln>
+                    <a:noFill/>
+                  </a:ln>
+                  <a:solidFill>
+                    <a:prstClr val="black"/>
+                  </a:solidFill>
+                  <a:effectLst/>
+                  <a:uLnTx/>
+                  <a:uFillTx/>
+                  <a:ea typeface="+mn-ea"/>
+                  <a:cs typeface="+mn-cs"/>
+                </a:endParaRPr>
+              </a:p>
+            </p:txBody>
+          </p:sp>
+          <p:sp>
+            <p:nvSpPr>
+              <p:cNvPr id="6" name="TextBox 5">
+                <a:extLst>
+                  <a:ext uri="{FF2B5EF4-FFF2-40B4-BE49-F238E27FC236}">
+                    <a16:creationId xmlns:a16="http://schemas.microsoft.com/office/drawing/2014/main" id="{7C552AEA-8D5A-DF05-C663-F088491F3B22}"/>
+                  </a:ext>
+                </a:extLst>
+              </p:cNvPr>
+              <p:cNvSpPr txBox="1"/>
+              <p:nvPr/>
+            </p:nvSpPr>
+            <p:spPr>
+              <a:xfrm>
+                <a:off x="4631734" y="2915239"/>
+                <a:ext cx="285956" cy="230832"/>
+              </a:xfrm>
+              <a:prstGeom prst="rect">
+                <a:avLst/>
+              </a:prstGeom>
+              <a:noFill/>
+            </p:spPr>
+            <p:txBody>
+              <a:bodyPr wrap="square" lIns="0" rIns="0" rtlCol="0">
+                <a:spAutoFit/>
+              </a:bodyPr>
+              <a:lstStyle/>
+              <a:p>
+                <a:pPr marL="0" marR="0" lvl="0" indent="0" algn="ctr" defTabSz="914400" rtl="0" eaLnBrk="1" fontAlgn="auto" latinLnBrk="0" hangingPunct="1">
+                  <a:lnSpc>
+                    <a:spcPct val="100000"/>
+                  </a:lnSpc>
+                  <a:spcBef>
+                    <a:spcPts val="0"/>
+                  </a:spcBef>
+                  <a:spcAft>
+                    <a:spcPts val="0"/>
+                  </a:spcAft>
+                  <a:buClrTx/>
+                  <a:buSzTx/>
+                  <a:buFontTx/>
+                  <a:buNone/>
+                  <a:tabLst/>
+                  <a:defRPr/>
+                </a:pPr>
+                <a:r>
+                  <a:rPr kumimoji="0" lang="en-US" sz="900" b="0" i="0" u="none" strike="noStrike" kern="1200" cap="none" spc="0" normalizeH="0" baseline="0" noProof="0" dirty="0">
+                    <a:ln>
+                      <a:noFill/>
+                    </a:ln>
+                    <a:solidFill>
+                      <a:prstClr val="black"/>
+                    </a:solidFill>
+                    <a:effectLst/>
+                    <a:uLnTx/>
+                    <a:uFillTx/>
+                    <a:ea typeface="+mn-ea"/>
+                    <a:cs typeface="+mn-cs"/>
+                  </a:rPr>
+                  <a:t>runs</a:t>
+                </a:r>
+              </a:p>
+            </p:txBody>
+          </p:sp>
+          <p:sp>
+            <p:nvSpPr>
+              <p:cNvPr id="16" name="Flowchart: Off-page Connector 15">
+                <a:extLst>
+                  <a:ext uri="{FF2B5EF4-FFF2-40B4-BE49-F238E27FC236}">
+                    <a16:creationId xmlns:a16="http://schemas.microsoft.com/office/drawing/2014/main" id="{D72AF047-6361-3F51-B89D-DA8B28A07C73}"/>
+                  </a:ext>
+                </a:extLst>
+              </p:cNvPr>
+              <p:cNvSpPr/>
+              <p:nvPr/>
+            </p:nvSpPr>
+            <p:spPr>
+              <a:xfrm>
+                <a:off x="4996247" y="2915239"/>
+                <a:ext cx="323575" cy="279919"/>
+              </a:xfrm>
+              <a:prstGeom prst="flowChartOffpageConnector">
+                <a:avLst/>
+              </a:prstGeom>
+              <a:solidFill>
+                <a:schemeClr val="bg1"/>
+              </a:solidFill>
+              <a:ln w="19050">
+                <a:solidFill>
+                  <a:schemeClr val="tx1"/>
+                </a:solidFill>
+              </a:ln>
+            </p:spPr>
+            <p:style>
+              <a:lnRef idx="2">
+                <a:schemeClr val="accent1">
+                  <a:shade val="50000"/>
+                </a:schemeClr>
+              </a:lnRef>
+              <a:fillRef idx="1">
+                <a:schemeClr val="accent1"/>
+              </a:fillRef>
+              <a:effectRef idx="0">
+                <a:schemeClr val="accent1"/>
+              </a:effectRef>
+              <a:fontRef idx="minor">
+                <a:schemeClr val="lt1"/>
+              </a:fontRef>
+            </p:style>
+            <p:txBody>
+              <a:bodyPr tIns="0" rtlCol="0" anchor="t" anchorCtr="0"/>
+              <a:lstStyle/>
+              <a:p>
+                <a:pPr marL="0" marR="0" lvl="0" indent="0" algn="l" defTabSz="914400" rtl="0" eaLnBrk="1" fontAlgn="auto" latinLnBrk="0" hangingPunct="1">
+                  <a:lnSpc>
+                    <a:spcPct val="100000"/>
+                  </a:lnSpc>
+                  <a:spcBef>
+                    <a:spcPts val="0"/>
+                  </a:spcBef>
+                  <a:spcAft>
+                    <a:spcPts val="0"/>
+                  </a:spcAft>
+                  <a:buClrTx/>
+                  <a:buSzTx/>
+                  <a:buFontTx/>
+                  <a:buNone/>
+                  <a:tabLst/>
+                  <a:defRPr/>
+                </a:pPr>
+                <a:endParaRPr kumimoji="0" lang="en-US" sz="1000" b="0" i="0" u="none" strike="noStrike" kern="1200" cap="none" spc="0" normalizeH="0" baseline="0" noProof="0">
+                  <a:ln>
+                    <a:noFill/>
+                  </a:ln>
+                  <a:solidFill>
+                    <a:prstClr val="black"/>
+                  </a:solidFill>
+                  <a:effectLst/>
+                  <a:uLnTx/>
+                  <a:uFillTx/>
+                  <a:ea typeface="+mn-ea"/>
+                  <a:cs typeface="+mn-cs"/>
+                </a:endParaRPr>
+              </a:p>
+            </p:txBody>
+          </p:sp>
+          <p:sp>
+            <p:nvSpPr>
+              <p:cNvPr id="23" name="TextBox 22">
+                <a:extLst>
+                  <a:ext uri="{FF2B5EF4-FFF2-40B4-BE49-F238E27FC236}">
+                    <a16:creationId xmlns:a16="http://schemas.microsoft.com/office/drawing/2014/main" id="{42224FE2-30D1-9035-A3A4-A437C4BF524D}"/>
+                  </a:ext>
+                </a:extLst>
+              </p:cNvPr>
+              <p:cNvSpPr txBox="1"/>
+              <p:nvPr/>
+            </p:nvSpPr>
+            <p:spPr>
+              <a:xfrm>
+                <a:off x="5017146" y="2915239"/>
+                <a:ext cx="285956" cy="230832"/>
+              </a:xfrm>
+              <a:prstGeom prst="rect">
+                <a:avLst/>
+              </a:prstGeom>
+              <a:noFill/>
+            </p:spPr>
+            <p:txBody>
+              <a:bodyPr wrap="square" lIns="0" rIns="0" rtlCol="0">
+                <a:spAutoFit/>
+              </a:bodyPr>
+              <a:lstStyle/>
+              <a:p>
+                <a:pPr marL="0" marR="0" lvl="0" indent="0" algn="ctr" defTabSz="914400" rtl="0" eaLnBrk="1" fontAlgn="auto" latinLnBrk="0" hangingPunct="1">
+                  <a:lnSpc>
+                    <a:spcPct val="100000"/>
+                  </a:lnSpc>
+                  <a:spcBef>
+                    <a:spcPts val="0"/>
+                  </a:spcBef>
+                  <a:spcAft>
+                    <a:spcPts val="0"/>
+                  </a:spcAft>
+                  <a:buClrTx/>
+                  <a:buSzTx/>
+                  <a:buFontTx/>
+                  <a:buNone/>
+                  <a:tabLst/>
+                  <a:defRPr/>
+                </a:pPr>
+                <a:r>
+                  <a:rPr kumimoji="0" lang="en-US" sz="900" b="0" i="0" u="none" strike="noStrike" kern="1200" cap="none" spc="0" normalizeH="0" baseline="0" noProof="0" dirty="0">
+                    <a:ln>
+                      <a:noFill/>
+                    </a:ln>
+                    <a:solidFill>
+                      <a:prstClr val="black"/>
+                    </a:solidFill>
+                    <a:effectLst/>
+                    <a:uLnTx/>
+                    <a:uFillTx/>
+                    <a:ea typeface="+mn-ea"/>
+                    <a:cs typeface="+mn-cs"/>
+                  </a:rPr>
+                  <a:t>host</a:t>
+                </a:r>
+              </a:p>
+            </p:txBody>
+          </p:sp>
+        </p:grpSp>
+      </p:grpSp>
+      <p:cxnSp>
+        <p:nvCxnSpPr>
+          <p:cNvPr id="17" name="Straight Arrow Connector 16">
+            <a:extLst>
+              <a:ext uri="{FF2B5EF4-FFF2-40B4-BE49-F238E27FC236}">
+                <a16:creationId xmlns:a16="http://schemas.microsoft.com/office/drawing/2014/main" id="{E58D11E9-E884-B98D-C7B8-50308964A9BB}"/>
+              </a:ext>
+            </a:extLst>
+          </p:cNvPr>
+          <p:cNvCxnSpPr>
+            <a:cxnSpLocks/>
+            <a:endCxn id="16" idx="2"/>
+          </p:cNvCxnSpPr>
+          <p:nvPr/>
+        </p:nvCxnSpPr>
+        <p:spPr>
+          <a:xfrm flipV="1">
+            <a:off x="6149118" y="3450499"/>
+            <a:ext cx="153590" cy="321432"/>
+          </a:xfrm>
+          <a:prstGeom prst="straightConnector1">
+            <a:avLst/>
+          </a:prstGeom>
+          <a:ln w="12700">
+            <a:solidFill>
+              <a:schemeClr val="tx1"/>
+            </a:solidFill>
+            <a:headEnd type="triangle" w="med" len="med"/>
+            <a:tailEnd type="none" w="med" len="med"/>
+          </a:ln>
+        </p:spPr>
+        <p:style>
+          <a:lnRef idx="1">
+            <a:schemeClr val="accent1"/>
+          </a:lnRef>
+          <a:fillRef idx="0">
+            <a:schemeClr val="accent1"/>
+          </a:fillRef>
+          <a:effectRef idx="0">
+            <a:schemeClr val="accent1"/>
+          </a:effectRef>
+          <a:fontRef idx="minor">
+            <a:schemeClr val="tx1"/>
+          </a:fontRef>
+        </p:style>
+      </p:cxnSp>
+      <p:grpSp>
+        <p:nvGrpSpPr>
+          <p:cNvPr id="18" name="Group 17">
+            <a:extLst>
+              <a:ext uri="{FF2B5EF4-FFF2-40B4-BE49-F238E27FC236}">
+                <a16:creationId xmlns:a16="http://schemas.microsoft.com/office/drawing/2014/main" id="{0965E86A-1C94-A558-145A-CBC2E89E62AD}"/>
+              </a:ext>
+            </a:extLst>
+          </p:cNvPr>
+          <p:cNvGrpSpPr/>
+          <p:nvPr/>
+        </p:nvGrpSpPr>
+        <p:grpSpPr>
+          <a:xfrm>
+            <a:off x="5712722" y="3733539"/>
+            <a:ext cx="771421" cy="991032"/>
+            <a:chOff x="3816079" y="4223863"/>
+            <a:chExt cx="771421" cy="991032"/>
+          </a:xfrm>
+        </p:grpSpPr>
+        <p:sp>
+          <p:nvSpPr>
+            <p:cNvPr id="19" name="Rectangle 18">
+              <a:extLst>
+                <a:ext uri="{FF2B5EF4-FFF2-40B4-BE49-F238E27FC236}">
+                  <a16:creationId xmlns:a16="http://schemas.microsoft.com/office/drawing/2014/main" id="{D1423ABE-B95A-39BF-B25A-51AE295D7BCC}"/>
+                </a:ext>
+              </a:extLst>
+            </p:cNvPr>
+            <p:cNvSpPr/>
+            <p:nvPr/>
+          </p:nvSpPr>
+          <p:spPr>
+            <a:xfrm>
+              <a:off x="3816079" y="4722603"/>
+              <a:ext cx="771421" cy="250978"/>
+            </a:xfrm>
+            <a:prstGeom prst="rect">
+              <a:avLst/>
+            </a:prstGeom>
+            <a:solidFill>
+              <a:schemeClr val="bg1">
+                <a:lumMod val="95000"/>
+              </a:schemeClr>
+            </a:solidFill>
+            <a:ln w="19050">
+              <a:solidFill>
+                <a:schemeClr val="bg2"/>
+              </a:solidFill>
+            </a:ln>
+          </p:spPr>
+          <p:style>
+            <a:lnRef idx="2">
+              <a:schemeClr val="accent1">
+                <a:shade val="50000"/>
+              </a:schemeClr>
+            </a:lnRef>
+            <a:fillRef idx="1">
+              <a:schemeClr val="accent1"/>
+            </a:fillRef>
+            <a:effectRef idx="0">
+              <a:schemeClr val="accent1"/>
+            </a:effectRef>
+            <a:fontRef idx="minor">
+              <a:schemeClr val="lt1"/>
+            </a:fontRef>
+          </p:style>
+          <p:txBody>
+            <a:bodyPr lIns="0" rIns="0" rtlCol="0" anchor="ctr"/>
+            <a:lstStyle/>
+            <a:p>
+              <a:pPr marL="0" marR="0" lvl="0" indent="0" algn="ctr" defTabSz="914400" rtl="0" eaLnBrk="1" fontAlgn="auto" latinLnBrk="0" hangingPunct="1">
+                <a:lnSpc>
+                  <a:spcPct val="100000"/>
+                </a:lnSpc>
+                <a:spcBef>
+                  <a:spcPts val="0"/>
+                </a:spcBef>
+                <a:spcAft>
+                  <a:spcPts val="0"/>
+                </a:spcAft>
+                <a:buClrTx/>
+                <a:buSzTx/>
+                <a:buFontTx/>
+                <a:buNone/>
+                <a:tabLst/>
+                <a:defRPr/>
+              </a:pPr>
+              <a:r>
+                <a:rPr kumimoji="0" lang="en-US" sz="900" b="0" i="0" u="none" strike="noStrike" kern="1200" cap="none" spc="0" normalizeH="0" baseline="0" noProof="0" dirty="0">
+                  <a:ln>
+                    <a:noFill/>
+                  </a:ln>
+                  <a:solidFill>
+                    <a:prstClr val="black"/>
+                  </a:solidFill>
+                  <a:effectLst/>
+                  <a:uLnTx/>
+                  <a:uFillTx/>
+                  <a:ea typeface="+mn-ea"/>
+                  <a:cs typeface="+mn-cs"/>
+                </a:rPr>
+                <a:t>Server</a:t>
+              </a:r>
+            </a:p>
+            <a:p>
+              <a:pPr marL="0" marR="0" lvl="0" indent="0" algn="ctr" defTabSz="914400" rtl="0" eaLnBrk="1" fontAlgn="auto" latinLnBrk="0" hangingPunct="1">
+                <a:lnSpc>
+                  <a:spcPct val="100000"/>
+                </a:lnSpc>
+                <a:spcBef>
+                  <a:spcPts val="0"/>
+                </a:spcBef>
+                <a:spcAft>
+                  <a:spcPts val="0"/>
+                </a:spcAft>
+                <a:buClrTx/>
+                <a:buSzTx/>
+                <a:buFontTx/>
+                <a:buNone/>
+                <a:tabLst/>
+                <a:defRPr/>
+              </a:pPr>
+              <a:r>
+                <a:rPr kumimoji="0" lang="en-US" sz="900" b="0" i="0" u="none" strike="noStrike" kern="1200" cap="none" spc="0" normalizeH="0" baseline="0" noProof="0" dirty="0">
+                  <a:ln>
+                    <a:noFill/>
+                  </a:ln>
+                  <a:solidFill>
+                    <a:prstClr val="black"/>
+                  </a:solidFill>
+                  <a:effectLst/>
+                  <a:uLnTx/>
+                  <a:uFillTx/>
+                  <a:ea typeface="+mn-ea"/>
+                  <a:cs typeface="+mn-cs"/>
+                </a:rPr>
+                <a:t>Platform</a:t>
+              </a:r>
+            </a:p>
+          </p:txBody>
+        </p:sp>
+        <p:sp>
+          <p:nvSpPr>
+            <p:cNvPr id="20" name="Rectangle: Rounded Corners 19">
+              <a:extLst>
+                <a:ext uri="{FF2B5EF4-FFF2-40B4-BE49-F238E27FC236}">
+                  <a16:creationId xmlns:a16="http://schemas.microsoft.com/office/drawing/2014/main" id="{78CF353B-5D46-A40D-867F-63CF5553D636}"/>
+                </a:ext>
+              </a:extLst>
+            </p:cNvPr>
+            <p:cNvSpPr/>
+            <p:nvPr/>
+          </p:nvSpPr>
+          <p:spPr>
+            <a:xfrm>
+              <a:off x="3816080" y="4399416"/>
+              <a:ext cx="771420" cy="815479"/>
+            </a:xfrm>
+            <a:prstGeom prst="roundRect">
+              <a:avLst/>
+            </a:prstGeom>
+            <a:noFill/>
+            <a:ln w="19050">
+              <a:solidFill>
+                <a:schemeClr val="tx1"/>
+              </a:solidFill>
+            </a:ln>
+          </p:spPr>
+          <p:style>
+            <a:lnRef idx="2">
+              <a:schemeClr val="accent1">
+                <a:shade val="50000"/>
+              </a:schemeClr>
+            </a:lnRef>
+            <a:fillRef idx="1">
+              <a:schemeClr val="accent1"/>
+            </a:fillRef>
+            <a:effectRef idx="0">
+              <a:schemeClr val="accent1"/>
+            </a:effectRef>
+            <a:fontRef idx="minor">
+              <a:schemeClr val="lt1"/>
+            </a:fontRef>
+          </p:style>
+          <p:txBody>
+            <a:bodyPr lIns="45720" tIns="0" bIns="9144" rtlCol="0" anchor="b" anchorCtr="0"/>
+            <a:lstStyle/>
+            <a:p>
+              <a:pPr lvl="0">
+                <a:defRPr/>
+              </a:pPr>
+              <a:r>
+                <a:rPr lang="en-US" sz="800" dirty="0">
+                  <a:solidFill>
+                    <a:prstClr val="black"/>
+                  </a:solidFill>
+                </a:rPr>
+                <a:t>Server-2</a:t>
+              </a:r>
+              <a:endParaRPr kumimoji="0" lang="en-US" sz="800" b="0" i="0" u="none" strike="noStrike" kern="1200" cap="none" spc="0" normalizeH="0" baseline="0" noProof="0" dirty="0">
+                <a:ln>
+                  <a:noFill/>
+                </a:ln>
+                <a:solidFill>
+                  <a:prstClr val="black"/>
+                </a:solidFill>
+                <a:effectLst/>
+                <a:uLnTx/>
+                <a:uFillTx/>
+                <a:ea typeface="+mn-ea"/>
+                <a:cs typeface="+mn-cs"/>
+              </a:endParaRPr>
+            </a:p>
+          </p:txBody>
+        </p:sp>
+        <p:sp>
+          <p:nvSpPr>
+            <p:cNvPr id="21" name="Arrow: Chevron 20">
+              <a:extLst>
+                <a:ext uri="{FF2B5EF4-FFF2-40B4-BE49-F238E27FC236}">
+                  <a16:creationId xmlns:a16="http://schemas.microsoft.com/office/drawing/2014/main" id="{C60B1716-C9A4-F253-E974-95F1F394129E}"/>
+                </a:ext>
+              </a:extLst>
+            </p:cNvPr>
+            <p:cNvSpPr/>
+            <p:nvPr/>
+          </p:nvSpPr>
+          <p:spPr>
+            <a:xfrm rot="5400000">
+              <a:off x="4026243" y="4166150"/>
+              <a:ext cx="351106" cy="466531"/>
+            </a:xfrm>
+            <a:prstGeom prst="chevron">
+              <a:avLst>
+                <a:gd name="adj" fmla="val 14000"/>
+              </a:avLst>
+            </a:prstGeom>
+            <a:solidFill>
+              <a:schemeClr val="bg1"/>
+            </a:solidFill>
+            <a:ln w="12700">
+              <a:solidFill>
+                <a:schemeClr val="tx1"/>
+              </a:solidFill>
+            </a:ln>
+          </p:spPr>
+          <p:style>
+            <a:lnRef idx="2">
+              <a:schemeClr val="accent1">
+                <a:shade val="50000"/>
+              </a:schemeClr>
+            </a:lnRef>
+            <a:fillRef idx="1">
+              <a:schemeClr val="accent1"/>
+            </a:fillRef>
+            <a:effectRef idx="0">
+              <a:schemeClr val="accent1"/>
+            </a:effectRef>
+            <a:fontRef idx="minor">
+              <a:schemeClr val="lt1"/>
+            </a:fontRef>
+          </p:style>
+          <p:txBody>
+            <a:bodyPr tIns="0" rtlCol="0" anchor="t" anchorCtr="0"/>
+            <a:lstStyle/>
+            <a:p>
+              <a:pPr marL="0" marR="0" lvl="0" indent="0" algn="l" defTabSz="914400" rtl="0" eaLnBrk="1" fontAlgn="auto" latinLnBrk="0" hangingPunct="1">
+                <a:lnSpc>
+                  <a:spcPct val="100000"/>
+                </a:lnSpc>
+                <a:spcBef>
+                  <a:spcPts val="0"/>
+                </a:spcBef>
+                <a:spcAft>
+                  <a:spcPts val="0"/>
+                </a:spcAft>
+                <a:buClrTx/>
+                <a:buSzTx/>
+                <a:buFontTx/>
+                <a:buNone/>
+                <a:tabLst/>
+                <a:defRPr/>
+              </a:pPr>
+              <a:endParaRPr kumimoji="0" lang="en-US" sz="1000" b="0" i="0" u="none" strike="noStrike" kern="1200" cap="none" spc="0" normalizeH="0" baseline="0" noProof="0">
+                <a:ln>
+                  <a:noFill/>
+                </a:ln>
+                <a:solidFill>
+                  <a:prstClr val="black"/>
+                </a:solidFill>
+                <a:effectLst/>
+                <a:uLnTx/>
+                <a:uFillTx/>
+                <a:ea typeface="+mn-ea"/>
+                <a:cs typeface="+mn-cs"/>
+              </a:endParaRPr>
+            </a:p>
+          </p:txBody>
+        </p:sp>
+        <p:sp>
+          <p:nvSpPr>
+            <p:cNvPr id="22" name="TextBox 21">
+              <a:extLst>
+                <a:ext uri="{FF2B5EF4-FFF2-40B4-BE49-F238E27FC236}">
+                  <a16:creationId xmlns:a16="http://schemas.microsoft.com/office/drawing/2014/main" id="{F268AEC8-6C38-0232-0F56-5A4E5946BD1B}"/>
+                </a:ext>
+              </a:extLst>
+            </p:cNvPr>
+            <p:cNvSpPr txBox="1"/>
+            <p:nvPr/>
+          </p:nvSpPr>
+          <p:spPr>
+            <a:xfrm>
+              <a:off x="3995650" y="4276305"/>
+              <a:ext cx="412292" cy="230832"/>
+            </a:xfrm>
+            <a:prstGeom prst="rect">
+              <a:avLst/>
+            </a:prstGeom>
+            <a:noFill/>
+          </p:spPr>
+          <p:txBody>
+            <a:bodyPr wrap="square" rtlCol="0">
+              <a:spAutoFit/>
+            </a:bodyPr>
+            <a:lstStyle/>
+            <a:p>
+              <a:pPr marL="0" marR="0" lvl="0" indent="0" algn="l" defTabSz="914400" rtl="0" eaLnBrk="1" fontAlgn="auto" latinLnBrk="0" hangingPunct="1">
+                <a:lnSpc>
+                  <a:spcPct val="100000"/>
+                </a:lnSpc>
+                <a:spcBef>
+                  <a:spcPts val="0"/>
+                </a:spcBef>
+                <a:spcAft>
+                  <a:spcPts val="0"/>
+                </a:spcAft>
+                <a:buClrTx/>
+                <a:buSzTx/>
+                <a:buFontTx/>
+                <a:buNone/>
+                <a:tabLst/>
+                <a:defRPr/>
+              </a:pPr>
+              <a:r>
+                <a:rPr kumimoji="0" lang="en-US" sz="900" b="0" i="0" u="none" strike="noStrike" kern="1200" cap="none" spc="0" normalizeH="0" baseline="0" noProof="0" dirty="0">
+                  <a:ln>
+                    <a:noFill/>
+                  </a:ln>
+                  <a:solidFill>
+                    <a:prstClr val="black"/>
+                  </a:solidFill>
+                  <a:effectLst/>
+                  <a:uLnTx/>
+                  <a:uFillTx/>
+                  <a:ea typeface="+mn-ea"/>
+                  <a:cs typeface="+mn-cs"/>
+                </a:rPr>
+                <a:t>host</a:t>
+              </a:r>
+            </a:p>
+          </p:txBody>
+        </p:sp>
+      </p:grpSp>
+      <p:grpSp>
+        <p:nvGrpSpPr>
+          <p:cNvPr id="9" name="Group 8">
+            <a:extLst>
+              <a:ext uri="{FF2B5EF4-FFF2-40B4-BE49-F238E27FC236}">
+                <a16:creationId xmlns:a16="http://schemas.microsoft.com/office/drawing/2014/main" id="{38983788-9062-D8A3-6D54-EADBC6687F98}"/>
+              </a:ext>
+            </a:extLst>
+          </p:cNvPr>
+          <p:cNvGrpSpPr/>
+          <p:nvPr/>
+        </p:nvGrpSpPr>
+        <p:grpSpPr>
+          <a:xfrm>
+            <a:off x="6690276" y="3733539"/>
+            <a:ext cx="771421" cy="991032"/>
+            <a:chOff x="3816079" y="4223863"/>
+            <a:chExt cx="771421" cy="991032"/>
+          </a:xfrm>
+        </p:grpSpPr>
+        <p:sp>
+          <p:nvSpPr>
+            <p:cNvPr id="10" name="Rectangle 9">
+              <a:extLst>
+                <a:ext uri="{FF2B5EF4-FFF2-40B4-BE49-F238E27FC236}">
+                  <a16:creationId xmlns:a16="http://schemas.microsoft.com/office/drawing/2014/main" id="{5F76869A-41B1-B995-EFA4-2EE7542BA307}"/>
+                </a:ext>
+              </a:extLst>
+            </p:cNvPr>
+            <p:cNvSpPr/>
+            <p:nvPr/>
+          </p:nvSpPr>
+          <p:spPr>
+            <a:xfrm>
+              <a:off x="3816079" y="4722603"/>
+              <a:ext cx="771421" cy="250978"/>
+            </a:xfrm>
+            <a:prstGeom prst="rect">
+              <a:avLst/>
+            </a:prstGeom>
+            <a:solidFill>
+              <a:schemeClr val="bg1">
+                <a:lumMod val="95000"/>
+              </a:schemeClr>
+            </a:solidFill>
+            <a:ln w="19050">
+              <a:solidFill>
+                <a:schemeClr val="bg2"/>
+              </a:solidFill>
+            </a:ln>
+          </p:spPr>
+          <p:style>
+            <a:lnRef idx="2">
+              <a:schemeClr val="accent1">
+                <a:shade val="50000"/>
+              </a:schemeClr>
+            </a:lnRef>
+            <a:fillRef idx="1">
+              <a:schemeClr val="accent1"/>
+            </a:fillRef>
+            <a:effectRef idx="0">
+              <a:schemeClr val="accent1"/>
+            </a:effectRef>
+            <a:fontRef idx="minor">
+              <a:schemeClr val="lt1"/>
+            </a:fontRef>
+          </p:style>
+          <p:txBody>
+            <a:bodyPr lIns="0" rIns="0" rtlCol="0" anchor="ctr"/>
+            <a:lstStyle/>
+            <a:p>
+              <a:pPr marL="0" marR="0" lvl="0" indent="0" algn="ctr" defTabSz="914400" rtl="0" eaLnBrk="1" fontAlgn="auto" latinLnBrk="0" hangingPunct="1">
+                <a:lnSpc>
+                  <a:spcPct val="100000"/>
+                </a:lnSpc>
+                <a:spcBef>
+                  <a:spcPts val="0"/>
+                </a:spcBef>
+                <a:spcAft>
+                  <a:spcPts val="0"/>
+                </a:spcAft>
+                <a:buClrTx/>
+                <a:buSzTx/>
+                <a:buFontTx/>
+                <a:buNone/>
+                <a:tabLst/>
+                <a:defRPr/>
+              </a:pPr>
+              <a:r>
+                <a:rPr kumimoji="0" lang="en-US" sz="900" b="0" i="0" u="none" strike="noStrike" kern="1200" cap="none" spc="0" normalizeH="0" baseline="0" noProof="0" dirty="0">
+                  <a:ln>
+                    <a:noFill/>
+                  </a:ln>
+                  <a:solidFill>
+                    <a:prstClr val="black"/>
+                  </a:solidFill>
+                  <a:effectLst/>
+                  <a:uLnTx/>
+                  <a:uFillTx/>
+                  <a:ea typeface="+mn-ea"/>
+                  <a:cs typeface="+mn-cs"/>
+                </a:rPr>
+                <a:t>Server</a:t>
+              </a:r>
+            </a:p>
+            <a:p>
+              <a:pPr marL="0" marR="0" lvl="0" indent="0" algn="ctr" defTabSz="914400" rtl="0" eaLnBrk="1" fontAlgn="auto" latinLnBrk="0" hangingPunct="1">
+                <a:lnSpc>
+                  <a:spcPct val="100000"/>
+                </a:lnSpc>
+                <a:spcBef>
+                  <a:spcPts val="0"/>
+                </a:spcBef>
+                <a:spcAft>
+                  <a:spcPts val="0"/>
+                </a:spcAft>
+                <a:buClrTx/>
+                <a:buSzTx/>
+                <a:buFontTx/>
+                <a:buNone/>
+                <a:tabLst/>
+                <a:defRPr/>
+              </a:pPr>
+              <a:r>
+                <a:rPr kumimoji="0" lang="en-US" sz="900" b="0" i="0" u="none" strike="noStrike" kern="1200" cap="none" spc="0" normalizeH="0" baseline="0" noProof="0" dirty="0">
+                  <a:ln>
+                    <a:noFill/>
+                  </a:ln>
+                  <a:solidFill>
+                    <a:prstClr val="black"/>
+                  </a:solidFill>
+                  <a:effectLst/>
+                  <a:uLnTx/>
+                  <a:uFillTx/>
+                  <a:ea typeface="+mn-ea"/>
+                  <a:cs typeface="+mn-cs"/>
+                </a:rPr>
+                <a:t>Platform</a:t>
+              </a:r>
+            </a:p>
+          </p:txBody>
+        </p:sp>
+        <p:sp>
+          <p:nvSpPr>
+            <p:cNvPr id="11" name="Rectangle: Rounded Corners 10">
+              <a:extLst>
+                <a:ext uri="{FF2B5EF4-FFF2-40B4-BE49-F238E27FC236}">
+                  <a16:creationId xmlns:a16="http://schemas.microsoft.com/office/drawing/2014/main" id="{50C4CF9E-9098-7414-E53A-3622FDF1F2C1}"/>
+                </a:ext>
+              </a:extLst>
+            </p:cNvPr>
+            <p:cNvSpPr/>
+            <p:nvPr/>
+          </p:nvSpPr>
+          <p:spPr>
+            <a:xfrm>
+              <a:off x="3816080" y="4399416"/>
+              <a:ext cx="771420" cy="815479"/>
+            </a:xfrm>
+            <a:prstGeom prst="roundRect">
+              <a:avLst/>
+            </a:prstGeom>
+            <a:noFill/>
+            <a:ln w="19050">
+              <a:solidFill>
+                <a:schemeClr val="tx1"/>
+              </a:solidFill>
+            </a:ln>
+          </p:spPr>
+          <p:style>
+            <a:lnRef idx="2">
+              <a:schemeClr val="accent1">
+                <a:shade val="50000"/>
+              </a:schemeClr>
+            </a:lnRef>
+            <a:fillRef idx="1">
+              <a:schemeClr val="accent1"/>
+            </a:fillRef>
+            <a:effectRef idx="0">
+              <a:schemeClr val="accent1"/>
+            </a:effectRef>
+            <a:fontRef idx="minor">
+              <a:schemeClr val="lt1"/>
+            </a:fontRef>
+          </p:style>
+          <p:txBody>
+            <a:bodyPr lIns="45720" tIns="0" bIns="9144" rtlCol="0" anchor="b" anchorCtr="0"/>
+            <a:lstStyle/>
+            <a:p>
+              <a:pPr lvl="0">
+                <a:defRPr/>
+              </a:pPr>
+              <a:r>
+                <a:rPr lang="en-US" sz="800" dirty="0">
+                  <a:solidFill>
+                    <a:prstClr val="black"/>
+                  </a:solidFill>
+                </a:rPr>
+                <a:t>Server-3</a:t>
+              </a:r>
+              <a:endParaRPr kumimoji="0" lang="en-US" sz="800" b="0" i="0" u="none" strike="noStrike" kern="1200" cap="none" spc="0" normalizeH="0" baseline="0" noProof="0" dirty="0">
+                <a:ln>
+                  <a:noFill/>
+                </a:ln>
+                <a:solidFill>
+                  <a:prstClr val="black"/>
+                </a:solidFill>
+                <a:effectLst/>
+                <a:uLnTx/>
+                <a:uFillTx/>
+                <a:ea typeface="+mn-ea"/>
+                <a:cs typeface="+mn-cs"/>
+              </a:endParaRPr>
+            </a:p>
+          </p:txBody>
+        </p:sp>
+        <p:sp>
+          <p:nvSpPr>
+            <p:cNvPr id="12" name="Arrow: Chevron 11">
+              <a:extLst>
+                <a:ext uri="{FF2B5EF4-FFF2-40B4-BE49-F238E27FC236}">
+                  <a16:creationId xmlns:a16="http://schemas.microsoft.com/office/drawing/2014/main" id="{C6A56CA5-FF15-FDAB-A65C-821691A8EA13}"/>
+                </a:ext>
+              </a:extLst>
+            </p:cNvPr>
+            <p:cNvSpPr/>
+            <p:nvPr/>
+          </p:nvSpPr>
+          <p:spPr>
+            <a:xfrm rot="5400000">
+              <a:off x="4026243" y="4166150"/>
+              <a:ext cx="351106" cy="466531"/>
+            </a:xfrm>
+            <a:prstGeom prst="chevron">
+              <a:avLst>
+                <a:gd name="adj" fmla="val 14000"/>
+              </a:avLst>
+            </a:prstGeom>
+            <a:solidFill>
+              <a:schemeClr val="bg1"/>
+            </a:solidFill>
+            <a:ln w="12700">
+              <a:solidFill>
+                <a:schemeClr val="tx1"/>
+              </a:solidFill>
+            </a:ln>
+          </p:spPr>
+          <p:style>
+            <a:lnRef idx="2">
+              <a:schemeClr val="accent1">
+                <a:shade val="50000"/>
+              </a:schemeClr>
+            </a:lnRef>
+            <a:fillRef idx="1">
+              <a:schemeClr val="accent1"/>
+            </a:fillRef>
+            <a:effectRef idx="0">
+              <a:schemeClr val="accent1"/>
+            </a:effectRef>
+            <a:fontRef idx="minor">
+              <a:schemeClr val="lt1"/>
+            </a:fontRef>
+          </p:style>
+          <p:txBody>
+            <a:bodyPr tIns="0" rtlCol="0" anchor="t" anchorCtr="0"/>
+            <a:lstStyle/>
+            <a:p>
+              <a:pPr marL="0" marR="0" lvl="0" indent="0" algn="l" defTabSz="914400" rtl="0" eaLnBrk="1" fontAlgn="auto" latinLnBrk="0" hangingPunct="1">
+                <a:lnSpc>
+                  <a:spcPct val="100000"/>
+                </a:lnSpc>
+                <a:spcBef>
+                  <a:spcPts val="0"/>
+                </a:spcBef>
+                <a:spcAft>
+                  <a:spcPts val="0"/>
+                </a:spcAft>
+                <a:buClrTx/>
+                <a:buSzTx/>
+                <a:buFontTx/>
+                <a:buNone/>
+                <a:tabLst/>
+                <a:defRPr/>
+              </a:pPr>
+              <a:endParaRPr kumimoji="0" lang="en-US" sz="1000" b="0" i="0" u="none" strike="noStrike" kern="1200" cap="none" spc="0" normalizeH="0" baseline="0" noProof="0">
+                <a:ln>
+                  <a:noFill/>
+                </a:ln>
+                <a:solidFill>
+                  <a:prstClr val="black"/>
+                </a:solidFill>
+                <a:effectLst/>
+                <a:uLnTx/>
+                <a:uFillTx/>
+                <a:ea typeface="+mn-ea"/>
+                <a:cs typeface="+mn-cs"/>
+              </a:endParaRPr>
+            </a:p>
+          </p:txBody>
+        </p:sp>
+        <p:sp>
+          <p:nvSpPr>
+            <p:cNvPr id="13" name="TextBox 12">
+              <a:extLst>
+                <a:ext uri="{FF2B5EF4-FFF2-40B4-BE49-F238E27FC236}">
+                  <a16:creationId xmlns:a16="http://schemas.microsoft.com/office/drawing/2014/main" id="{19BA00EF-8EEE-B0E7-013E-E70BE9F3FCFF}"/>
+                </a:ext>
+              </a:extLst>
+            </p:cNvPr>
+            <p:cNvSpPr txBox="1"/>
+            <p:nvPr/>
+          </p:nvSpPr>
+          <p:spPr>
+            <a:xfrm>
+              <a:off x="3995650" y="4276305"/>
+              <a:ext cx="412292" cy="230832"/>
+            </a:xfrm>
+            <a:prstGeom prst="rect">
+              <a:avLst/>
+            </a:prstGeom>
+            <a:noFill/>
+          </p:spPr>
+          <p:txBody>
+            <a:bodyPr wrap="square" rtlCol="0">
+              <a:spAutoFit/>
+            </a:bodyPr>
+            <a:lstStyle/>
+            <a:p>
+              <a:pPr marL="0" marR="0" lvl="0" indent="0" algn="l" defTabSz="914400" rtl="0" eaLnBrk="1" fontAlgn="auto" latinLnBrk="0" hangingPunct="1">
+                <a:lnSpc>
+                  <a:spcPct val="100000"/>
+                </a:lnSpc>
+                <a:spcBef>
+                  <a:spcPts val="0"/>
+                </a:spcBef>
+                <a:spcAft>
+                  <a:spcPts val="0"/>
+                </a:spcAft>
+                <a:buClrTx/>
+                <a:buSzTx/>
+                <a:buFontTx/>
+                <a:buNone/>
+                <a:tabLst/>
+                <a:defRPr/>
+              </a:pPr>
+              <a:r>
+                <a:rPr kumimoji="0" lang="en-US" sz="900" b="0" i="0" u="none" strike="noStrike" kern="1200" cap="none" spc="0" normalizeH="0" baseline="0" noProof="0" dirty="0">
+                  <a:ln>
+                    <a:noFill/>
+                  </a:ln>
+                  <a:solidFill>
+                    <a:prstClr val="black"/>
+                  </a:solidFill>
+                  <a:effectLst/>
+                  <a:uLnTx/>
+                  <a:uFillTx/>
+                  <a:ea typeface="+mn-ea"/>
+                  <a:cs typeface="+mn-cs"/>
+                </a:rPr>
+                <a:t>host</a:t>
+              </a:r>
+            </a:p>
+          </p:txBody>
+        </p:sp>
+      </p:grpSp>
+      <p:cxnSp>
+        <p:nvCxnSpPr>
+          <p:cNvPr id="25" name="Straight Arrow Connector 24">
+            <a:extLst>
+              <a:ext uri="{FF2B5EF4-FFF2-40B4-BE49-F238E27FC236}">
+                <a16:creationId xmlns:a16="http://schemas.microsoft.com/office/drawing/2014/main" id="{EE661CC2-B4A9-39AC-6DFE-1DFC81B81F03}"/>
+              </a:ext>
+            </a:extLst>
+          </p:cNvPr>
+          <p:cNvCxnSpPr>
+            <a:cxnSpLocks/>
+            <a:stCxn id="12" idx="1"/>
+            <a:endCxn id="16" idx="2"/>
+          </p:cNvCxnSpPr>
+          <p:nvPr/>
+        </p:nvCxnSpPr>
+        <p:spPr>
+          <a:xfrm flipH="1" flipV="1">
+            <a:off x="6302708" y="3450499"/>
+            <a:ext cx="773285" cy="332195"/>
+          </a:xfrm>
+          <a:prstGeom prst="straightConnector1">
+            <a:avLst/>
+          </a:prstGeom>
+          <a:ln w="12700">
+            <a:solidFill>
+              <a:schemeClr val="tx1"/>
+            </a:solidFill>
+            <a:headEnd type="triangle" w="med" len="med"/>
+            <a:tailEnd type="none" w="med" len="med"/>
+          </a:ln>
+        </p:spPr>
+        <p:style>
+          <a:lnRef idx="1">
+            <a:schemeClr val="accent1"/>
+          </a:lnRef>
+          <a:fillRef idx="0">
+            <a:schemeClr val="accent1"/>
+          </a:fillRef>
+          <a:effectRef idx="0">
+            <a:schemeClr val="accent1"/>
+          </a:effectRef>
+          <a:fontRef idx="minor">
+            <a:schemeClr val="tx1"/>
+          </a:fontRef>
+        </p:style>
+      </p:cxnSp>
+      <p:grpSp>
+        <p:nvGrpSpPr>
+          <p:cNvPr id="46" name="Group 45">
+            <a:extLst>
+              <a:ext uri="{FF2B5EF4-FFF2-40B4-BE49-F238E27FC236}">
+                <a16:creationId xmlns:a16="http://schemas.microsoft.com/office/drawing/2014/main" id="{2DF1C4E2-20A7-BDF0-6EB5-2A00CD6A9199}"/>
+              </a:ext>
+            </a:extLst>
+          </p:cNvPr>
+          <p:cNvGrpSpPr/>
+          <p:nvPr/>
+        </p:nvGrpSpPr>
+        <p:grpSpPr>
+          <a:xfrm>
+            <a:off x="4730305" y="3771931"/>
+            <a:ext cx="776284" cy="952640"/>
+            <a:chOff x="4472071" y="3660442"/>
+            <a:chExt cx="776284" cy="952640"/>
+          </a:xfrm>
+        </p:grpSpPr>
+        <p:sp>
+          <p:nvSpPr>
+            <p:cNvPr id="4" name="Rectangle 3">
+              <a:extLst>
+                <a:ext uri="{FF2B5EF4-FFF2-40B4-BE49-F238E27FC236}">
+                  <a16:creationId xmlns:a16="http://schemas.microsoft.com/office/drawing/2014/main" id="{3F6342D2-2BD2-3F2F-12EC-A146021CED14}"/>
+                </a:ext>
+              </a:extLst>
+            </p:cNvPr>
+            <p:cNvSpPr/>
+            <p:nvPr/>
+          </p:nvSpPr>
+          <p:spPr>
+            <a:xfrm>
+              <a:off x="4476934" y="4120790"/>
+              <a:ext cx="771421" cy="250978"/>
+            </a:xfrm>
+            <a:prstGeom prst="rect">
+              <a:avLst/>
+            </a:prstGeom>
+            <a:solidFill>
+              <a:schemeClr val="bg1">
+                <a:lumMod val="95000"/>
+              </a:schemeClr>
+            </a:solidFill>
+            <a:ln w="19050">
+              <a:solidFill>
+                <a:schemeClr val="bg2"/>
+              </a:solidFill>
+            </a:ln>
+          </p:spPr>
+          <p:style>
+            <a:lnRef idx="2">
+              <a:schemeClr val="accent1">
+                <a:shade val="50000"/>
+              </a:schemeClr>
+            </a:lnRef>
+            <a:fillRef idx="1">
+              <a:schemeClr val="accent1"/>
+            </a:fillRef>
+            <a:effectRef idx="0">
+              <a:schemeClr val="accent1"/>
+            </a:effectRef>
+            <a:fontRef idx="minor">
+              <a:schemeClr val="lt1"/>
+            </a:fontRef>
+          </p:style>
+          <p:txBody>
+            <a:bodyPr lIns="0" rIns="0" rtlCol="0" anchor="ctr"/>
+            <a:lstStyle/>
+            <a:p>
+              <a:pPr marL="0" marR="0" lvl="0" indent="0" algn="ctr" defTabSz="914400" rtl="0" eaLnBrk="1" fontAlgn="auto" latinLnBrk="0" hangingPunct="1">
+                <a:lnSpc>
+                  <a:spcPct val="100000"/>
+                </a:lnSpc>
+                <a:spcBef>
+                  <a:spcPts val="0"/>
+                </a:spcBef>
+                <a:spcAft>
+                  <a:spcPts val="0"/>
+                </a:spcAft>
+                <a:buClrTx/>
+                <a:buSzTx/>
+                <a:buFontTx/>
+                <a:buNone/>
+                <a:tabLst/>
+                <a:defRPr/>
+              </a:pPr>
+              <a:r>
+                <a:rPr kumimoji="0" lang="en-US" sz="900" b="0" i="0" u="none" strike="noStrike" kern="1200" cap="none" spc="0" normalizeH="0" baseline="0" noProof="0" dirty="0">
+                  <a:ln>
+                    <a:noFill/>
+                  </a:ln>
+                  <a:solidFill>
+                    <a:prstClr val="black"/>
+                  </a:solidFill>
+                  <a:effectLst/>
+                  <a:uLnTx/>
+                  <a:uFillTx/>
+                  <a:ea typeface="+mn-ea"/>
+                  <a:cs typeface="+mn-cs"/>
+                </a:rPr>
+                <a:t>Server</a:t>
+              </a:r>
+            </a:p>
+            <a:p>
+              <a:pPr marL="0" marR="0" lvl="0" indent="0" algn="ctr" defTabSz="914400" rtl="0" eaLnBrk="1" fontAlgn="auto" latinLnBrk="0" hangingPunct="1">
+                <a:lnSpc>
+                  <a:spcPct val="100000"/>
+                </a:lnSpc>
+                <a:spcBef>
+                  <a:spcPts val="0"/>
+                </a:spcBef>
+                <a:spcAft>
+                  <a:spcPts val="0"/>
+                </a:spcAft>
+                <a:buClrTx/>
+                <a:buSzTx/>
+                <a:buFontTx/>
+                <a:buNone/>
+                <a:tabLst/>
+                <a:defRPr/>
+              </a:pPr>
+              <a:r>
+                <a:rPr kumimoji="0" lang="en-US" sz="900" b="0" i="0" u="none" strike="noStrike" kern="1200" cap="none" spc="0" normalizeH="0" baseline="0" noProof="0" dirty="0">
+                  <a:ln>
+                    <a:noFill/>
+                  </a:ln>
+                  <a:solidFill>
+                    <a:prstClr val="black"/>
+                  </a:solidFill>
+                  <a:effectLst/>
+                  <a:uLnTx/>
+                  <a:uFillTx/>
+                  <a:ea typeface="+mn-ea"/>
+                  <a:cs typeface="+mn-cs"/>
+                </a:rPr>
+                <a:t>Platform</a:t>
+              </a:r>
+            </a:p>
+          </p:txBody>
+        </p:sp>
+        <p:sp>
+          <p:nvSpPr>
+            <p:cNvPr id="5" name="Rectangle: Rounded Corners 4">
+              <a:extLst>
+                <a:ext uri="{FF2B5EF4-FFF2-40B4-BE49-F238E27FC236}">
+                  <a16:creationId xmlns:a16="http://schemas.microsoft.com/office/drawing/2014/main" id="{C2B03128-B2AD-BACE-B928-B415473EEF22}"/>
+                </a:ext>
+              </a:extLst>
+            </p:cNvPr>
+            <p:cNvSpPr/>
+            <p:nvPr/>
+          </p:nvSpPr>
+          <p:spPr>
+            <a:xfrm>
+              <a:off x="4476935" y="3797603"/>
+              <a:ext cx="771420" cy="815479"/>
+            </a:xfrm>
+            <a:prstGeom prst="roundRect">
+              <a:avLst/>
+            </a:prstGeom>
+            <a:noFill/>
+            <a:ln w="19050">
+              <a:solidFill>
+                <a:schemeClr val="tx1"/>
+              </a:solidFill>
+            </a:ln>
+          </p:spPr>
+          <p:style>
+            <a:lnRef idx="2">
+              <a:schemeClr val="accent1">
+                <a:shade val="50000"/>
+              </a:schemeClr>
+            </a:lnRef>
+            <a:fillRef idx="1">
+              <a:schemeClr val="accent1"/>
+            </a:fillRef>
+            <a:effectRef idx="0">
+              <a:schemeClr val="accent1"/>
+            </a:effectRef>
+            <a:fontRef idx="minor">
+              <a:schemeClr val="lt1"/>
+            </a:fontRef>
+          </p:style>
+          <p:txBody>
+            <a:bodyPr lIns="45720" tIns="0" bIns="9144" rtlCol="0" anchor="b" anchorCtr="0"/>
+            <a:lstStyle/>
+            <a:p>
+              <a:pPr lvl="0">
+                <a:defRPr/>
+              </a:pPr>
+              <a:r>
+                <a:rPr lang="en-US" sz="800" dirty="0">
+                  <a:solidFill>
+                    <a:prstClr val="black"/>
+                  </a:solidFill>
+                </a:rPr>
+                <a:t>Server-1</a:t>
+              </a:r>
+              <a:endParaRPr kumimoji="0" lang="en-US" sz="800" b="0" i="0" u="none" strike="noStrike" kern="1200" cap="none" spc="0" normalizeH="0" baseline="0" noProof="0" dirty="0">
+                <a:ln>
+                  <a:noFill/>
+                </a:ln>
+                <a:solidFill>
+                  <a:prstClr val="black"/>
+                </a:solidFill>
+                <a:effectLst/>
+                <a:uLnTx/>
+                <a:uFillTx/>
+                <a:ea typeface="+mn-ea"/>
+                <a:cs typeface="+mn-cs"/>
+              </a:endParaRPr>
+            </a:p>
+          </p:txBody>
+        </p:sp>
+        <p:grpSp>
+          <p:nvGrpSpPr>
+            <p:cNvPr id="43" name="Group 42">
+              <a:extLst>
+                <a:ext uri="{FF2B5EF4-FFF2-40B4-BE49-F238E27FC236}">
+                  <a16:creationId xmlns:a16="http://schemas.microsoft.com/office/drawing/2014/main" id="{75421F49-5858-B04E-3447-24F0CF1D165A}"/>
+                </a:ext>
+              </a:extLst>
+            </p:cNvPr>
+            <p:cNvGrpSpPr/>
+            <p:nvPr/>
+          </p:nvGrpSpPr>
+          <p:grpSpPr>
+            <a:xfrm>
+              <a:off x="4472071" y="3660442"/>
+              <a:ext cx="772086" cy="274320"/>
+              <a:chOff x="2171837" y="2443293"/>
+              <a:chExt cx="772086" cy="274320"/>
+            </a:xfrm>
+          </p:grpSpPr>
+          <p:grpSp>
+            <p:nvGrpSpPr>
+              <p:cNvPr id="41" name="Group 40">
+                <a:extLst>
+                  <a:ext uri="{FF2B5EF4-FFF2-40B4-BE49-F238E27FC236}">
+                    <a16:creationId xmlns:a16="http://schemas.microsoft.com/office/drawing/2014/main" id="{B460EE91-8F4A-C607-FBF9-AEF9F0222ADA}"/>
+                  </a:ext>
+                </a:extLst>
+              </p:cNvPr>
+              <p:cNvGrpSpPr/>
+              <p:nvPr/>
+            </p:nvGrpSpPr>
+            <p:grpSpPr>
+              <a:xfrm>
+                <a:off x="2171837" y="2443293"/>
+                <a:ext cx="412292" cy="274320"/>
+                <a:chOff x="2171837" y="2443293"/>
+                <a:chExt cx="412292" cy="274320"/>
+              </a:xfrm>
+            </p:grpSpPr>
+            <p:sp>
+              <p:nvSpPr>
+                <p:cNvPr id="31" name="Arrow: Chevron 30">
+                  <a:extLst>
+                    <a:ext uri="{FF2B5EF4-FFF2-40B4-BE49-F238E27FC236}">
+                      <a16:creationId xmlns:a16="http://schemas.microsoft.com/office/drawing/2014/main" id="{E33BF713-5749-D825-4DD3-1F73586886D5}"/>
+                    </a:ext>
+                  </a:extLst>
+                </p:cNvPr>
+                <p:cNvSpPr>
+                  <a:spLocks/>
+                </p:cNvSpPr>
+                <p:nvPr/>
+              </p:nvSpPr>
+              <p:spPr>
+                <a:xfrm rot="5400000">
+                  <a:off x="2240823" y="2429577"/>
+                  <a:ext cx="274320" cy="301752"/>
+                </a:xfrm>
+                <a:prstGeom prst="chevron">
+                  <a:avLst>
+                    <a:gd name="adj" fmla="val 14000"/>
+                  </a:avLst>
+                </a:prstGeom>
+                <a:solidFill>
+                  <a:schemeClr val="bg1"/>
+                </a:solidFill>
+                <a:ln w="12700">
+                  <a:solidFill>
+                    <a:schemeClr val="tx1"/>
+                  </a:solidFill>
+                </a:ln>
+              </p:spPr>
+              <p:style>
+                <a:lnRef idx="2">
+                  <a:schemeClr val="accent1">
+                    <a:shade val="50000"/>
+                  </a:schemeClr>
+                </a:lnRef>
+                <a:fillRef idx="1">
+                  <a:schemeClr val="accent1"/>
+                </a:fillRef>
+                <a:effectRef idx="0">
+                  <a:schemeClr val="accent1"/>
+                </a:effectRef>
+                <a:fontRef idx="minor">
+                  <a:schemeClr val="lt1"/>
+                </a:fontRef>
+              </p:style>
+              <p:txBody>
+                <a:bodyPr tIns="0" rtlCol="0" anchor="t" anchorCtr="0"/>
+                <a:lstStyle/>
+                <a:p>
+                  <a:pPr marL="0" marR="0" lvl="0" indent="0" algn="ctr" defTabSz="914400" rtl="0" eaLnBrk="1" fontAlgn="auto" latinLnBrk="0" hangingPunct="1">
+                    <a:lnSpc>
+                      <a:spcPct val="100000"/>
+                    </a:lnSpc>
+                    <a:spcBef>
+                      <a:spcPts val="0"/>
+                    </a:spcBef>
+                    <a:spcAft>
+                      <a:spcPts val="0"/>
+                    </a:spcAft>
+                    <a:buClrTx/>
+                    <a:buSzTx/>
+                    <a:buFontTx/>
+                    <a:buNone/>
+                    <a:tabLst/>
+                    <a:defRPr/>
+                  </a:pPr>
+                  <a:endParaRPr kumimoji="0" lang="en-US" sz="1000" b="0" i="0" u="none" strike="noStrike" kern="1200" cap="none" spc="0" normalizeH="0" baseline="0" noProof="0">
+                    <a:ln>
+                      <a:noFill/>
+                    </a:ln>
+                    <a:solidFill>
+                      <a:prstClr val="black"/>
+                    </a:solidFill>
+                    <a:effectLst/>
+                    <a:uLnTx/>
+                    <a:uFillTx/>
+                    <a:ea typeface="+mn-ea"/>
+                    <a:cs typeface="+mn-cs"/>
+                  </a:endParaRPr>
+                </a:p>
+              </p:txBody>
+            </p:sp>
+            <p:sp>
+              <p:nvSpPr>
+                <p:cNvPr id="32" name="TextBox 31">
+                  <a:extLst>
+                    <a:ext uri="{FF2B5EF4-FFF2-40B4-BE49-F238E27FC236}">
+                      <a16:creationId xmlns:a16="http://schemas.microsoft.com/office/drawing/2014/main" id="{C6E9D265-1678-44B6-6445-581052C2809D}"/>
+                    </a:ext>
+                  </a:extLst>
+                </p:cNvPr>
+                <p:cNvSpPr txBox="1"/>
+                <p:nvPr/>
+              </p:nvSpPr>
+              <p:spPr>
+                <a:xfrm>
+                  <a:off x="2171837" y="2495736"/>
+                  <a:ext cx="412292" cy="138499"/>
+                </a:xfrm>
+                <a:prstGeom prst="rect">
+                  <a:avLst/>
+                </a:prstGeom>
+                <a:noFill/>
+              </p:spPr>
+              <p:txBody>
+                <a:bodyPr wrap="square" lIns="0" tIns="0" rIns="0" bIns="0" rtlCol="0">
+                  <a:spAutoFit/>
+                </a:bodyPr>
+                <a:lstStyle/>
+                <a:p>
+                  <a:pPr marL="0" marR="0" lvl="0" indent="0" algn="ctr" defTabSz="914400" rtl="0" eaLnBrk="1" fontAlgn="auto" latinLnBrk="0" hangingPunct="1">
+                    <a:lnSpc>
+                      <a:spcPct val="100000"/>
+                    </a:lnSpc>
+                    <a:spcBef>
+                      <a:spcPts val="0"/>
+                    </a:spcBef>
+                    <a:spcAft>
+                      <a:spcPts val="0"/>
+                    </a:spcAft>
+                    <a:buClrTx/>
+                    <a:buSzTx/>
+                    <a:buFontTx/>
+                    <a:buNone/>
+                    <a:tabLst/>
+                    <a:defRPr/>
+                  </a:pPr>
+                  <a:r>
+                    <a:rPr kumimoji="0" lang="en-US" sz="900" b="0" i="0" u="none" strike="noStrike" kern="1200" cap="none" spc="0" normalizeH="0" baseline="0" noProof="0" dirty="0">
+                      <a:ln>
+                        <a:noFill/>
+                      </a:ln>
+                      <a:solidFill>
+                        <a:prstClr val="black"/>
+                      </a:solidFill>
+                      <a:effectLst/>
+                      <a:uLnTx/>
+                      <a:uFillTx/>
+                      <a:ea typeface="+mn-ea"/>
+                      <a:cs typeface="+mn-cs"/>
+                    </a:rPr>
+                    <a:t>exec</a:t>
+                  </a:r>
+                </a:p>
+              </p:txBody>
+            </p:sp>
+          </p:grpSp>
+          <p:grpSp>
+            <p:nvGrpSpPr>
+              <p:cNvPr id="42" name="Group 41">
+                <a:extLst>
+                  <a:ext uri="{FF2B5EF4-FFF2-40B4-BE49-F238E27FC236}">
+                    <a16:creationId xmlns:a16="http://schemas.microsoft.com/office/drawing/2014/main" id="{2E810DE2-E4AA-8500-C989-D976B72DAABA}"/>
+                  </a:ext>
+                </a:extLst>
+              </p:cNvPr>
+              <p:cNvGrpSpPr/>
+              <p:nvPr/>
+            </p:nvGrpSpPr>
+            <p:grpSpPr>
+              <a:xfrm>
+                <a:off x="2531631" y="2443293"/>
+                <a:ext cx="412292" cy="274320"/>
+                <a:chOff x="2324237" y="3199009"/>
+                <a:chExt cx="412292" cy="274320"/>
+              </a:xfrm>
+            </p:grpSpPr>
+            <p:sp>
+              <p:nvSpPr>
+                <p:cNvPr id="33" name="Arrow: Chevron 32">
+                  <a:extLst>
+                    <a:ext uri="{FF2B5EF4-FFF2-40B4-BE49-F238E27FC236}">
+                      <a16:creationId xmlns:a16="http://schemas.microsoft.com/office/drawing/2014/main" id="{7D89F4A9-45E3-6D6D-FE5F-2E1F136DA3DE}"/>
+                    </a:ext>
+                  </a:extLst>
+                </p:cNvPr>
+                <p:cNvSpPr>
+                  <a:spLocks/>
+                </p:cNvSpPr>
+                <p:nvPr/>
+              </p:nvSpPr>
+              <p:spPr>
+                <a:xfrm rot="5400000">
+                  <a:off x="2381814" y="3185293"/>
+                  <a:ext cx="274320" cy="301752"/>
+                </a:xfrm>
+                <a:prstGeom prst="chevron">
+                  <a:avLst>
+                    <a:gd name="adj" fmla="val 14000"/>
+                  </a:avLst>
+                </a:prstGeom>
+                <a:solidFill>
+                  <a:schemeClr val="bg1"/>
+                </a:solidFill>
+                <a:ln w="12700">
+                  <a:solidFill>
+                    <a:schemeClr val="tx1"/>
+                  </a:solidFill>
+                </a:ln>
+              </p:spPr>
+              <p:style>
+                <a:lnRef idx="2">
+                  <a:schemeClr val="accent1">
+                    <a:shade val="50000"/>
+                  </a:schemeClr>
+                </a:lnRef>
+                <a:fillRef idx="1">
+                  <a:schemeClr val="accent1"/>
+                </a:fillRef>
+                <a:effectRef idx="0">
+                  <a:schemeClr val="accent1"/>
+                </a:effectRef>
+                <a:fontRef idx="minor">
+                  <a:schemeClr val="lt1"/>
+                </a:fontRef>
+              </p:style>
+              <p:txBody>
+                <a:bodyPr tIns="0" rtlCol="0" anchor="t" anchorCtr="0"/>
+                <a:lstStyle/>
+                <a:p>
+                  <a:pPr marL="0" marR="0" lvl="0" indent="0" algn="l" defTabSz="914400" rtl="0" eaLnBrk="1" fontAlgn="auto" latinLnBrk="0" hangingPunct="1">
+                    <a:lnSpc>
+                      <a:spcPct val="100000"/>
+                    </a:lnSpc>
+                    <a:spcBef>
+                      <a:spcPts val="0"/>
+                    </a:spcBef>
+                    <a:spcAft>
+                      <a:spcPts val="0"/>
+                    </a:spcAft>
+                    <a:buClrTx/>
+                    <a:buSzTx/>
+                    <a:buFontTx/>
+                    <a:buNone/>
+                    <a:tabLst/>
+                    <a:defRPr/>
+                  </a:pPr>
+                  <a:endParaRPr kumimoji="0" lang="en-US" sz="1000" b="0" i="0" u="none" strike="noStrike" kern="1200" cap="none" spc="0" normalizeH="0" baseline="0" noProof="0">
+                    <a:ln>
+                      <a:noFill/>
+                    </a:ln>
+                    <a:solidFill>
+                      <a:prstClr val="black"/>
+                    </a:solidFill>
+                    <a:effectLst/>
+                    <a:uLnTx/>
+                    <a:uFillTx/>
+                    <a:ea typeface="+mn-ea"/>
+                    <a:cs typeface="+mn-cs"/>
+                  </a:endParaRPr>
+                </a:p>
+              </p:txBody>
+            </p:sp>
+            <p:sp>
+              <p:nvSpPr>
+                <p:cNvPr id="38" name="TextBox 37">
+                  <a:extLst>
+                    <a:ext uri="{FF2B5EF4-FFF2-40B4-BE49-F238E27FC236}">
+                      <a16:creationId xmlns:a16="http://schemas.microsoft.com/office/drawing/2014/main" id="{1F6FF579-B0C3-0657-65B8-5326CDA63148}"/>
+                    </a:ext>
+                  </a:extLst>
+                </p:cNvPr>
+                <p:cNvSpPr txBox="1"/>
+                <p:nvPr/>
+              </p:nvSpPr>
+              <p:spPr>
+                <a:xfrm>
+                  <a:off x="2324237" y="3251452"/>
+                  <a:ext cx="412292" cy="138499"/>
+                </a:xfrm>
+                <a:prstGeom prst="rect">
+                  <a:avLst/>
+                </a:prstGeom>
+                <a:noFill/>
+              </p:spPr>
+              <p:txBody>
+                <a:bodyPr wrap="square" lIns="0" tIns="0" rIns="0" bIns="0" rtlCol="0">
+                  <a:spAutoFit/>
+                </a:bodyPr>
+                <a:lstStyle/>
+                <a:p>
+                  <a:pPr marL="0" marR="0" lvl="0" indent="0" algn="ctr" defTabSz="914400" rtl="0" eaLnBrk="1" fontAlgn="auto" latinLnBrk="0" hangingPunct="1">
+                    <a:lnSpc>
+                      <a:spcPct val="100000"/>
+                    </a:lnSpc>
+                    <a:spcBef>
+                      <a:spcPts val="0"/>
+                    </a:spcBef>
+                    <a:spcAft>
+                      <a:spcPts val="0"/>
+                    </a:spcAft>
+                    <a:buClrTx/>
+                    <a:buSzTx/>
+                    <a:buFontTx/>
+                    <a:buNone/>
+                    <a:tabLst/>
+                    <a:defRPr/>
+                  </a:pPr>
+                  <a:r>
+                    <a:rPr kumimoji="0" lang="en-US" sz="900" b="0" i="0" u="none" strike="noStrike" kern="1200" cap="none" spc="0" normalizeH="0" baseline="0" noProof="0" dirty="0">
+                      <a:ln>
+                        <a:noFill/>
+                      </a:ln>
+                      <a:solidFill>
+                        <a:prstClr val="black"/>
+                      </a:solidFill>
+                      <a:effectLst/>
+                      <a:uLnTx/>
+                      <a:uFillTx/>
+                      <a:ea typeface="+mn-ea"/>
+                      <a:cs typeface="+mn-cs"/>
+                    </a:rPr>
+                    <a:t>host</a:t>
+                  </a:r>
+                </a:p>
+              </p:txBody>
+            </p:sp>
+          </p:grpSp>
+        </p:grpSp>
+      </p:grpSp>
+      <p:cxnSp>
+        <p:nvCxnSpPr>
+          <p:cNvPr id="55" name="Straight Arrow Connector 54">
+            <a:extLst>
+              <a:ext uri="{FF2B5EF4-FFF2-40B4-BE49-F238E27FC236}">
+                <a16:creationId xmlns:a16="http://schemas.microsoft.com/office/drawing/2014/main" id="{BF6CA7C1-E4F1-8DA7-FB04-B843FDF689CE}"/>
+              </a:ext>
+            </a:extLst>
+          </p:cNvPr>
+          <p:cNvCxnSpPr>
+            <a:cxnSpLocks/>
+            <a:stCxn id="31" idx="1"/>
+            <a:endCxn id="2" idx="2"/>
+          </p:cNvCxnSpPr>
+          <p:nvPr/>
+        </p:nvCxnSpPr>
+        <p:spPr>
+          <a:xfrm flipV="1">
+            <a:off x="4936451" y="3450499"/>
+            <a:ext cx="980845" cy="359837"/>
+          </a:xfrm>
+          <a:prstGeom prst="straightConnector1">
+            <a:avLst/>
+          </a:prstGeom>
+          <a:ln w="12700">
+            <a:solidFill>
+              <a:schemeClr val="tx1"/>
+            </a:solidFill>
+            <a:headEnd type="triangle" w="med" len="med"/>
+            <a:tailEnd type="none" w="med" len="med"/>
+          </a:ln>
+        </p:spPr>
+        <p:style>
+          <a:lnRef idx="1">
+            <a:schemeClr val="accent1"/>
+          </a:lnRef>
+          <a:fillRef idx="0">
+            <a:schemeClr val="accent1"/>
+          </a:fillRef>
+          <a:effectRef idx="0">
+            <a:schemeClr val="accent1"/>
+          </a:effectRef>
+          <a:fontRef idx="minor">
+            <a:schemeClr val="tx1"/>
+          </a:fontRef>
+        </p:style>
+      </p:cxnSp>
+      <p:grpSp>
+        <p:nvGrpSpPr>
+          <p:cNvPr id="62" name="Group 61">
+            <a:extLst>
+              <a:ext uri="{FF2B5EF4-FFF2-40B4-BE49-F238E27FC236}">
+                <a16:creationId xmlns:a16="http://schemas.microsoft.com/office/drawing/2014/main" id="{2D0335D8-28D5-EB3D-514A-63BECBBC70FA}"/>
+              </a:ext>
+            </a:extLst>
+          </p:cNvPr>
+          <p:cNvGrpSpPr/>
+          <p:nvPr/>
+        </p:nvGrpSpPr>
+        <p:grpSpPr>
+          <a:xfrm>
+            <a:off x="3747887" y="3771931"/>
+            <a:ext cx="776284" cy="952640"/>
+            <a:chOff x="4472071" y="3660442"/>
+            <a:chExt cx="776284" cy="952640"/>
+          </a:xfrm>
+        </p:grpSpPr>
+        <p:sp>
+          <p:nvSpPr>
+            <p:cNvPr id="63" name="Rectangle 62">
+              <a:extLst>
+                <a:ext uri="{FF2B5EF4-FFF2-40B4-BE49-F238E27FC236}">
+                  <a16:creationId xmlns:a16="http://schemas.microsoft.com/office/drawing/2014/main" id="{242ED90D-B916-C3BC-8334-F54F60B76183}"/>
+                </a:ext>
+              </a:extLst>
+            </p:cNvPr>
+            <p:cNvSpPr/>
+            <p:nvPr/>
+          </p:nvSpPr>
+          <p:spPr>
+            <a:xfrm>
+              <a:off x="4476934" y="4120790"/>
+              <a:ext cx="771421" cy="250978"/>
+            </a:xfrm>
+            <a:prstGeom prst="rect">
+              <a:avLst/>
+            </a:prstGeom>
+            <a:solidFill>
+              <a:schemeClr val="bg1">
+                <a:lumMod val="95000"/>
+              </a:schemeClr>
+            </a:solidFill>
+            <a:ln w="19050">
+              <a:solidFill>
+                <a:schemeClr val="bg2"/>
+              </a:solidFill>
+            </a:ln>
+          </p:spPr>
+          <p:style>
+            <a:lnRef idx="2">
+              <a:schemeClr val="accent1">
+                <a:shade val="50000"/>
+              </a:schemeClr>
+            </a:lnRef>
+            <a:fillRef idx="1">
+              <a:schemeClr val="accent1"/>
+            </a:fillRef>
+            <a:effectRef idx="0">
+              <a:schemeClr val="accent1"/>
+            </a:effectRef>
+            <a:fontRef idx="minor">
+              <a:schemeClr val="lt1"/>
+            </a:fontRef>
+          </p:style>
+          <p:txBody>
+            <a:bodyPr lIns="0" rIns="0" rtlCol="0" anchor="ctr"/>
+            <a:lstStyle/>
+            <a:p>
+              <a:pPr marL="0" marR="0" lvl="0" indent="0" algn="ctr" defTabSz="914400" rtl="0" eaLnBrk="1" fontAlgn="auto" latinLnBrk="0" hangingPunct="1">
+                <a:lnSpc>
+                  <a:spcPct val="100000"/>
+                </a:lnSpc>
+                <a:spcBef>
+                  <a:spcPts val="0"/>
+                </a:spcBef>
+                <a:spcAft>
+                  <a:spcPts val="0"/>
+                </a:spcAft>
+                <a:buClrTx/>
+                <a:buSzTx/>
+                <a:buFontTx/>
+                <a:buNone/>
+                <a:tabLst/>
+                <a:defRPr/>
+              </a:pPr>
+              <a:r>
+                <a:rPr kumimoji="0" lang="en-US" sz="900" b="0" i="0" u="none" strike="noStrike" kern="1200" cap="none" spc="0" normalizeH="0" baseline="0" noProof="0" dirty="0">
+                  <a:ln>
+                    <a:noFill/>
+                  </a:ln>
+                  <a:solidFill>
+                    <a:prstClr val="black"/>
+                  </a:solidFill>
+                  <a:effectLst/>
+                  <a:uLnTx/>
+                  <a:uFillTx/>
+                  <a:ea typeface="+mn-ea"/>
+                  <a:cs typeface="+mn-cs"/>
+                </a:rPr>
+                <a:t>Server</a:t>
+              </a:r>
+            </a:p>
+            <a:p>
+              <a:pPr marL="0" marR="0" lvl="0" indent="0" algn="ctr" defTabSz="914400" rtl="0" eaLnBrk="1" fontAlgn="auto" latinLnBrk="0" hangingPunct="1">
+                <a:lnSpc>
+                  <a:spcPct val="100000"/>
+                </a:lnSpc>
+                <a:spcBef>
+                  <a:spcPts val="0"/>
+                </a:spcBef>
+                <a:spcAft>
+                  <a:spcPts val="0"/>
+                </a:spcAft>
+                <a:buClrTx/>
+                <a:buSzTx/>
+                <a:buFontTx/>
+                <a:buNone/>
+                <a:tabLst/>
+                <a:defRPr/>
+              </a:pPr>
+              <a:r>
+                <a:rPr kumimoji="0" lang="en-US" sz="900" b="0" i="0" u="none" strike="noStrike" kern="1200" cap="none" spc="0" normalizeH="0" baseline="0" noProof="0" dirty="0">
+                  <a:ln>
+                    <a:noFill/>
+                  </a:ln>
+                  <a:solidFill>
+                    <a:prstClr val="black"/>
+                  </a:solidFill>
+                  <a:effectLst/>
+                  <a:uLnTx/>
+                  <a:uFillTx/>
+                  <a:ea typeface="+mn-ea"/>
+                  <a:cs typeface="+mn-cs"/>
+                </a:rPr>
+                <a:t>Platform</a:t>
+              </a:r>
+            </a:p>
+          </p:txBody>
+        </p:sp>
+        <p:sp>
+          <p:nvSpPr>
+            <p:cNvPr id="128" name="Rectangle: Rounded Corners 127">
+              <a:extLst>
+                <a:ext uri="{FF2B5EF4-FFF2-40B4-BE49-F238E27FC236}">
+                  <a16:creationId xmlns:a16="http://schemas.microsoft.com/office/drawing/2014/main" id="{D7A55294-4672-FA18-1699-30C46F5F8F85}"/>
+                </a:ext>
+              </a:extLst>
+            </p:cNvPr>
+            <p:cNvSpPr/>
+            <p:nvPr/>
+          </p:nvSpPr>
+          <p:spPr>
+            <a:xfrm>
+              <a:off x="4476935" y="3797603"/>
+              <a:ext cx="771420" cy="815479"/>
+            </a:xfrm>
+            <a:prstGeom prst="roundRect">
+              <a:avLst/>
+            </a:prstGeom>
+            <a:noFill/>
+            <a:ln w="19050">
+              <a:solidFill>
+                <a:schemeClr val="tx1"/>
+              </a:solidFill>
+            </a:ln>
+          </p:spPr>
+          <p:style>
+            <a:lnRef idx="2">
+              <a:schemeClr val="accent1">
+                <a:shade val="50000"/>
+              </a:schemeClr>
+            </a:lnRef>
+            <a:fillRef idx="1">
+              <a:schemeClr val="accent1"/>
+            </a:fillRef>
+            <a:effectRef idx="0">
+              <a:schemeClr val="accent1"/>
+            </a:effectRef>
+            <a:fontRef idx="minor">
+              <a:schemeClr val="lt1"/>
+            </a:fontRef>
+          </p:style>
+          <p:txBody>
+            <a:bodyPr lIns="45720" tIns="0" bIns="9144" rtlCol="0" anchor="b" anchorCtr="0"/>
+            <a:lstStyle/>
+            <a:p>
+              <a:pPr lvl="0">
+                <a:defRPr/>
+              </a:pPr>
+              <a:r>
+                <a:rPr lang="en-US" sz="800" dirty="0">
+                  <a:solidFill>
+                    <a:prstClr val="black"/>
+                  </a:solidFill>
+                </a:rPr>
+                <a:t>Server-0</a:t>
+              </a:r>
+              <a:endParaRPr kumimoji="0" lang="en-US" sz="800" b="0" i="0" u="none" strike="noStrike" kern="1200" cap="none" spc="0" normalizeH="0" baseline="0" noProof="0" dirty="0">
+                <a:ln>
+                  <a:noFill/>
+                </a:ln>
+                <a:solidFill>
+                  <a:prstClr val="black"/>
+                </a:solidFill>
+                <a:effectLst/>
+                <a:uLnTx/>
+                <a:uFillTx/>
+                <a:ea typeface="+mn-ea"/>
+                <a:cs typeface="+mn-cs"/>
+              </a:endParaRPr>
+            </a:p>
+          </p:txBody>
+        </p:sp>
+        <p:grpSp>
+          <p:nvGrpSpPr>
+            <p:cNvPr id="129" name="Group 128">
+              <a:extLst>
+                <a:ext uri="{FF2B5EF4-FFF2-40B4-BE49-F238E27FC236}">
+                  <a16:creationId xmlns:a16="http://schemas.microsoft.com/office/drawing/2014/main" id="{E507320F-B357-0056-9FD7-E50F2B98AFBE}"/>
+                </a:ext>
+              </a:extLst>
+            </p:cNvPr>
+            <p:cNvGrpSpPr/>
+            <p:nvPr/>
+          </p:nvGrpSpPr>
+          <p:grpSpPr>
+            <a:xfrm>
+              <a:off x="4472071" y="3660442"/>
+              <a:ext cx="772086" cy="274320"/>
+              <a:chOff x="2171837" y="2443293"/>
+              <a:chExt cx="772086" cy="274320"/>
+            </a:xfrm>
+          </p:grpSpPr>
+          <p:grpSp>
+            <p:nvGrpSpPr>
+              <p:cNvPr id="130" name="Group 129">
+                <a:extLst>
+                  <a:ext uri="{FF2B5EF4-FFF2-40B4-BE49-F238E27FC236}">
+                    <a16:creationId xmlns:a16="http://schemas.microsoft.com/office/drawing/2014/main" id="{A344EDB6-48D5-0119-D751-0E5CC92AD895}"/>
+                  </a:ext>
+                </a:extLst>
+              </p:cNvPr>
+              <p:cNvGrpSpPr/>
+              <p:nvPr/>
+            </p:nvGrpSpPr>
+            <p:grpSpPr>
+              <a:xfrm>
+                <a:off x="2171837" y="2443293"/>
+                <a:ext cx="412292" cy="274320"/>
+                <a:chOff x="2171837" y="2443293"/>
+                <a:chExt cx="412292" cy="274320"/>
+              </a:xfrm>
+            </p:grpSpPr>
+            <p:sp>
+              <p:nvSpPr>
+                <p:cNvPr id="134" name="Arrow: Chevron 133">
+                  <a:extLst>
+                    <a:ext uri="{FF2B5EF4-FFF2-40B4-BE49-F238E27FC236}">
+                      <a16:creationId xmlns:a16="http://schemas.microsoft.com/office/drawing/2014/main" id="{053B2D09-80AF-0B3D-75BD-556AC800E76B}"/>
+                    </a:ext>
+                  </a:extLst>
+                </p:cNvPr>
+                <p:cNvSpPr>
+                  <a:spLocks/>
+                </p:cNvSpPr>
+                <p:nvPr/>
+              </p:nvSpPr>
+              <p:spPr>
+                <a:xfrm rot="5400000">
+                  <a:off x="2240823" y="2429577"/>
+                  <a:ext cx="274320" cy="301752"/>
+                </a:xfrm>
+                <a:prstGeom prst="chevron">
+                  <a:avLst>
+                    <a:gd name="adj" fmla="val 14000"/>
+                  </a:avLst>
+                </a:prstGeom>
+                <a:solidFill>
+                  <a:schemeClr val="bg1"/>
+                </a:solidFill>
+                <a:ln w="12700">
+                  <a:solidFill>
+                    <a:schemeClr val="tx1"/>
+                  </a:solidFill>
+                </a:ln>
+              </p:spPr>
+              <p:style>
+                <a:lnRef idx="2">
+                  <a:schemeClr val="accent1">
+                    <a:shade val="50000"/>
+                  </a:schemeClr>
+                </a:lnRef>
+                <a:fillRef idx="1">
+                  <a:schemeClr val="accent1"/>
+                </a:fillRef>
+                <a:effectRef idx="0">
+                  <a:schemeClr val="accent1"/>
+                </a:effectRef>
+                <a:fontRef idx="minor">
+                  <a:schemeClr val="lt1"/>
+                </a:fontRef>
+              </p:style>
+              <p:txBody>
+                <a:bodyPr tIns="0" rtlCol="0" anchor="t" anchorCtr="0"/>
+                <a:lstStyle/>
+                <a:p>
+                  <a:pPr marL="0" marR="0" lvl="0" indent="0" algn="ctr" defTabSz="914400" rtl="0" eaLnBrk="1" fontAlgn="auto" latinLnBrk="0" hangingPunct="1">
+                    <a:lnSpc>
+                      <a:spcPct val="100000"/>
+                    </a:lnSpc>
+                    <a:spcBef>
+                      <a:spcPts val="0"/>
+                    </a:spcBef>
+                    <a:spcAft>
+                      <a:spcPts val="0"/>
+                    </a:spcAft>
+                    <a:buClrTx/>
+                    <a:buSzTx/>
+                    <a:buFontTx/>
+                    <a:buNone/>
+                    <a:tabLst/>
+                    <a:defRPr/>
+                  </a:pPr>
+                  <a:endParaRPr kumimoji="0" lang="en-US" sz="1000" b="0" i="0" u="none" strike="noStrike" kern="1200" cap="none" spc="0" normalizeH="0" baseline="0" noProof="0">
+                    <a:ln>
+                      <a:noFill/>
+                    </a:ln>
+                    <a:solidFill>
+                      <a:prstClr val="black"/>
+                    </a:solidFill>
+                    <a:effectLst/>
+                    <a:uLnTx/>
+                    <a:uFillTx/>
+                    <a:ea typeface="+mn-ea"/>
+                    <a:cs typeface="+mn-cs"/>
+                  </a:endParaRPr>
+                </a:p>
+              </p:txBody>
+            </p:sp>
+            <p:sp>
+              <p:nvSpPr>
+                <p:cNvPr id="135" name="TextBox 134">
+                  <a:extLst>
+                    <a:ext uri="{FF2B5EF4-FFF2-40B4-BE49-F238E27FC236}">
+                      <a16:creationId xmlns:a16="http://schemas.microsoft.com/office/drawing/2014/main" id="{1F69B523-6974-83D6-881F-5522CB0677B1}"/>
+                    </a:ext>
+                  </a:extLst>
+                </p:cNvPr>
+                <p:cNvSpPr txBox="1"/>
+                <p:nvPr/>
+              </p:nvSpPr>
+              <p:spPr>
+                <a:xfrm>
+                  <a:off x="2171837" y="2495736"/>
+                  <a:ext cx="412292" cy="138499"/>
+                </a:xfrm>
+                <a:prstGeom prst="rect">
+                  <a:avLst/>
+                </a:prstGeom>
+                <a:noFill/>
+              </p:spPr>
+              <p:txBody>
+                <a:bodyPr wrap="square" lIns="0" tIns="0" rIns="0" bIns="0" rtlCol="0">
+                  <a:spAutoFit/>
+                </a:bodyPr>
+                <a:lstStyle/>
+                <a:p>
+                  <a:pPr marL="0" marR="0" lvl="0" indent="0" algn="ctr" defTabSz="914400" rtl="0" eaLnBrk="1" fontAlgn="auto" latinLnBrk="0" hangingPunct="1">
+                    <a:lnSpc>
+                      <a:spcPct val="100000"/>
+                    </a:lnSpc>
+                    <a:spcBef>
+                      <a:spcPts val="0"/>
+                    </a:spcBef>
+                    <a:spcAft>
+                      <a:spcPts val="0"/>
+                    </a:spcAft>
+                    <a:buClrTx/>
+                    <a:buSzTx/>
+                    <a:buFontTx/>
+                    <a:buNone/>
+                    <a:tabLst/>
+                    <a:defRPr/>
+                  </a:pPr>
+                  <a:r>
+                    <a:rPr kumimoji="0" lang="en-US" sz="900" b="0" i="0" u="none" strike="noStrike" kern="1200" cap="none" spc="0" normalizeH="0" baseline="0" noProof="0" dirty="0">
+                      <a:ln>
+                        <a:noFill/>
+                      </a:ln>
+                      <a:solidFill>
+                        <a:prstClr val="black"/>
+                      </a:solidFill>
+                      <a:effectLst/>
+                      <a:uLnTx/>
+                      <a:uFillTx/>
+                      <a:ea typeface="+mn-ea"/>
+                      <a:cs typeface="+mn-cs"/>
+                    </a:rPr>
+                    <a:t>exec</a:t>
+                  </a:r>
+                </a:p>
+              </p:txBody>
+            </p:sp>
+          </p:grpSp>
+          <p:grpSp>
+            <p:nvGrpSpPr>
+              <p:cNvPr id="131" name="Group 130">
+                <a:extLst>
+                  <a:ext uri="{FF2B5EF4-FFF2-40B4-BE49-F238E27FC236}">
+                    <a16:creationId xmlns:a16="http://schemas.microsoft.com/office/drawing/2014/main" id="{5E5FF740-906E-022D-9F23-5752A21693EF}"/>
+                  </a:ext>
+                </a:extLst>
+              </p:cNvPr>
+              <p:cNvGrpSpPr/>
+              <p:nvPr/>
+            </p:nvGrpSpPr>
+            <p:grpSpPr>
+              <a:xfrm>
+                <a:off x="2531631" y="2443293"/>
+                <a:ext cx="412292" cy="274320"/>
+                <a:chOff x="2324237" y="3199009"/>
+                <a:chExt cx="412292" cy="274320"/>
+              </a:xfrm>
+            </p:grpSpPr>
+            <p:sp>
+              <p:nvSpPr>
+                <p:cNvPr id="132" name="Arrow: Chevron 131">
+                  <a:extLst>
+                    <a:ext uri="{FF2B5EF4-FFF2-40B4-BE49-F238E27FC236}">
+                      <a16:creationId xmlns:a16="http://schemas.microsoft.com/office/drawing/2014/main" id="{1D5E3FBA-3084-B796-7015-2D44A698F100}"/>
+                    </a:ext>
+                  </a:extLst>
+                </p:cNvPr>
+                <p:cNvSpPr>
+                  <a:spLocks/>
+                </p:cNvSpPr>
+                <p:nvPr/>
+              </p:nvSpPr>
+              <p:spPr>
+                <a:xfrm rot="5400000">
+                  <a:off x="2381814" y="3185293"/>
+                  <a:ext cx="274320" cy="301752"/>
+                </a:xfrm>
+                <a:prstGeom prst="chevron">
+                  <a:avLst>
+                    <a:gd name="adj" fmla="val 14000"/>
+                  </a:avLst>
+                </a:prstGeom>
+                <a:solidFill>
+                  <a:schemeClr val="bg1"/>
+                </a:solidFill>
+                <a:ln w="12700">
+                  <a:solidFill>
+                    <a:schemeClr val="tx1"/>
+                  </a:solidFill>
+                </a:ln>
+              </p:spPr>
+              <p:style>
+                <a:lnRef idx="2">
+                  <a:schemeClr val="accent1">
+                    <a:shade val="50000"/>
+                  </a:schemeClr>
+                </a:lnRef>
+                <a:fillRef idx="1">
+                  <a:schemeClr val="accent1"/>
+                </a:fillRef>
+                <a:effectRef idx="0">
+                  <a:schemeClr val="accent1"/>
+                </a:effectRef>
+                <a:fontRef idx="minor">
+                  <a:schemeClr val="lt1"/>
+                </a:fontRef>
+              </p:style>
+              <p:txBody>
+                <a:bodyPr tIns="0" rtlCol="0" anchor="t" anchorCtr="0"/>
+                <a:lstStyle/>
+                <a:p>
+                  <a:pPr marL="0" marR="0" lvl="0" indent="0" algn="l" defTabSz="914400" rtl="0" eaLnBrk="1" fontAlgn="auto" latinLnBrk="0" hangingPunct="1">
+                    <a:lnSpc>
+                      <a:spcPct val="100000"/>
+                    </a:lnSpc>
+                    <a:spcBef>
+                      <a:spcPts val="0"/>
+                    </a:spcBef>
+                    <a:spcAft>
+                      <a:spcPts val="0"/>
+                    </a:spcAft>
+                    <a:buClrTx/>
+                    <a:buSzTx/>
+                    <a:buFontTx/>
+                    <a:buNone/>
+                    <a:tabLst/>
+                    <a:defRPr/>
+                  </a:pPr>
+                  <a:endParaRPr kumimoji="0" lang="en-US" sz="1000" b="0" i="0" u="none" strike="noStrike" kern="1200" cap="none" spc="0" normalizeH="0" baseline="0" noProof="0">
+                    <a:ln>
+                      <a:noFill/>
+                    </a:ln>
+                    <a:solidFill>
+                      <a:prstClr val="black"/>
+                    </a:solidFill>
+                    <a:effectLst/>
+                    <a:uLnTx/>
+                    <a:uFillTx/>
+                    <a:ea typeface="+mn-ea"/>
+                    <a:cs typeface="+mn-cs"/>
+                  </a:endParaRPr>
+                </a:p>
+              </p:txBody>
+            </p:sp>
+            <p:sp>
+              <p:nvSpPr>
+                <p:cNvPr id="133" name="TextBox 132">
+                  <a:extLst>
+                    <a:ext uri="{FF2B5EF4-FFF2-40B4-BE49-F238E27FC236}">
+                      <a16:creationId xmlns:a16="http://schemas.microsoft.com/office/drawing/2014/main" id="{D95DD3A8-4F66-A799-B6AB-9D9FCB487B6A}"/>
+                    </a:ext>
+                  </a:extLst>
+                </p:cNvPr>
+                <p:cNvSpPr txBox="1"/>
+                <p:nvPr/>
+              </p:nvSpPr>
+              <p:spPr>
+                <a:xfrm>
+                  <a:off x="2324237" y="3251452"/>
+                  <a:ext cx="412292" cy="138499"/>
+                </a:xfrm>
+                <a:prstGeom prst="rect">
+                  <a:avLst/>
+                </a:prstGeom>
+                <a:noFill/>
+              </p:spPr>
+              <p:txBody>
+                <a:bodyPr wrap="square" lIns="0" tIns="0" rIns="0" bIns="0" rtlCol="0">
+                  <a:spAutoFit/>
+                </a:bodyPr>
+                <a:lstStyle/>
+                <a:p>
+                  <a:pPr marL="0" marR="0" lvl="0" indent="0" algn="ctr" defTabSz="914400" rtl="0" eaLnBrk="1" fontAlgn="auto" latinLnBrk="0" hangingPunct="1">
+                    <a:lnSpc>
+                      <a:spcPct val="100000"/>
+                    </a:lnSpc>
+                    <a:spcBef>
+                      <a:spcPts val="0"/>
+                    </a:spcBef>
+                    <a:spcAft>
+                      <a:spcPts val="0"/>
+                    </a:spcAft>
+                    <a:buClrTx/>
+                    <a:buSzTx/>
+                    <a:buFontTx/>
+                    <a:buNone/>
+                    <a:tabLst/>
+                    <a:defRPr/>
+                  </a:pPr>
+                  <a:r>
+                    <a:rPr kumimoji="0" lang="en-US" sz="900" b="0" i="0" u="none" strike="noStrike" kern="1200" cap="none" spc="0" normalizeH="0" baseline="0" noProof="0" dirty="0">
+                      <a:ln>
+                        <a:noFill/>
+                      </a:ln>
+                      <a:solidFill>
+                        <a:prstClr val="black"/>
+                      </a:solidFill>
+                      <a:effectLst/>
+                      <a:uLnTx/>
+                      <a:uFillTx/>
+                      <a:ea typeface="+mn-ea"/>
+                      <a:cs typeface="+mn-cs"/>
+                    </a:rPr>
+                    <a:t>host</a:t>
+                  </a:r>
+                </a:p>
+              </p:txBody>
+            </p:sp>
+          </p:grpSp>
+        </p:grpSp>
+      </p:grpSp>
+      <p:grpSp>
+        <p:nvGrpSpPr>
+          <p:cNvPr id="136" name="Group 135">
+            <a:extLst>
+              <a:ext uri="{FF2B5EF4-FFF2-40B4-BE49-F238E27FC236}">
+                <a16:creationId xmlns:a16="http://schemas.microsoft.com/office/drawing/2014/main" id="{DADEFF59-683A-F639-1281-B7D6CBA56BFB}"/>
+              </a:ext>
+            </a:extLst>
+          </p:cNvPr>
+          <p:cNvGrpSpPr/>
+          <p:nvPr/>
+        </p:nvGrpSpPr>
+        <p:grpSpPr>
+          <a:xfrm>
+            <a:off x="7667831" y="3733539"/>
+            <a:ext cx="771421" cy="991032"/>
+            <a:chOff x="3816079" y="4223863"/>
+            <a:chExt cx="771421" cy="991032"/>
+          </a:xfrm>
+        </p:grpSpPr>
+        <p:sp>
+          <p:nvSpPr>
+            <p:cNvPr id="137" name="Rectangle 136">
+              <a:extLst>
+                <a:ext uri="{FF2B5EF4-FFF2-40B4-BE49-F238E27FC236}">
+                  <a16:creationId xmlns:a16="http://schemas.microsoft.com/office/drawing/2014/main" id="{58B15C53-19B5-7FCE-91C6-320E8D372497}"/>
+                </a:ext>
+              </a:extLst>
+            </p:cNvPr>
+            <p:cNvSpPr/>
+            <p:nvPr/>
+          </p:nvSpPr>
+          <p:spPr>
+            <a:xfrm>
+              <a:off x="3816079" y="4722603"/>
+              <a:ext cx="771421" cy="250978"/>
+            </a:xfrm>
+            <a:prstGeom prst="rect">
+              <a:avLst/>
+            </a:prstGeom>
+            <a:solidFill>
+              <a:schemeClr val="bg1">
+                <a:lumMod val="95000"/>
+              </a:schemeClr>
+            </a:solidFill>
+            <a:ln w="19050">
+              <a:solidFill>
+                <a:schemeClr val="bg2"/>
+              </a:solidFill>
+            </a:ln>
+          </p:spPr>
+          <p:style>
+            <a:lnRef idx="2">
+              <a:schemeClr val="accent1">
+                <a:shade val="50000"/>
+              </a:schemeClr>
+            </a:lnRef>
+            <a:fillRef idx="1">
+              <a:schemeClr val="accent1"/>
+            </a:fillRef>
+            <a:effectRef idx="0">
+              <a:schemeClr val="accent1"/>
+            </a:effectRef>
+            <a:fontRef idx="minor">
+              <a:schemeClr val="lt1"/>
+            </a:fontRef>
+          </p:style>
+          <p:txBody>
+            <a:bodyPr lIns="0" rIns="0" rtlCol="0" anchor="ctr"/>
+            <a:lstStyle/>
+            <a:p>
+              <a:pPr marL="0" marR="0" lvl="0" indent="0" algn="ctr" defTabSz="914400" rtl="0" eaLnBrk="1" fontAlgn="auto" latinLnBrk="0" hangingPunct="1">
+                <a:lnSpc>
+                  <a:spcPct val="100000"/>
+                </a:lnSpc>
+                <a:spcBef>
+                  <a:spcPts val="0"/>
+                </a:spcBef>
+                <a:spcAft>
+                  <a:spcPts val="0"/>
+                </a:spcAft>
+                <a:buClrTx/>
+                <a:buSzTx/>
+                <a:buFontTx/>
+                <a:buNone/>
+                <a:tabLst/>
+                <a:defRPr/>
+              </a:pPr>
+              <a:r>
+                <a:rPr kumimoji="0" lang="en-US" sz="900" b="0" i="0" u="none" strike="noStrike" kern="1200" cap="none" spc="0" normalizeH="0" baseline="0" noProof="0" dirty="0">
+                  <a:ln>
+                    <a:noFill/>
+                  </a:ln>
+                  <a:solidFill>
+                    <a:prstClr val="black"/>
+                  </a:solidFill>
+                  <a:effectLst/>
+                  <a:uLnTx/>
+                  <a:uFillTx/>
+                  <a:ea typeface="+mn-ea"/>
+                  <a:cs typeface="+mn-cs"/>
+                </a:rPr>
+                <a:t>Server</a:t>
+              </a:r>
+            </a:p>
+            <a:p>
+              <a:pPr marL="0" marR="0" lvl="0" indent="0" algn="ctr" defTabSz="914400" rtl="0" eaLnBrk="1" fontAlgn="auto" latinLnBrk="0" hangingPunct="1">
+                <a:lnSpc>
+                  <a:spcPct val="100000"/>
+                </a:lnSpc>
+                <a:spcBef>
+                  <a:spcPts val="0"/>
+                </a:spcBef>
+                <a:spcAft>
+                  <a:spcPts val="0"/>
+                </a:spcAft>
+                <a:buClrTx/>
+                <a:buSzTx/>
+                <a:buFontTx/>
+                <a:buNone/>
+                <a:tabLst/>
+                <a:defRPr/>
+              </a:pPr>
+              <a:r>
+                <a:rPr kumimoji="0" lang="en-US" sz="900" b="0" i="0" u="none" strike="noStrike" kern="1200" cap="none" spc="0" normalizeH="0" baseline="0" noProof="0" dirty="0">
+                  <a:ln>
+                    <a:noFill/>
+                  </a:ln>
+                  <a:solidFill>
+                    <a:prstClr val="black"/>
+                  </a:solidFill>
+                  <a:effectLst/>
+                  <a:uLnTx/>
+                  <a:uFillTx/>
+                  <a:ea typeface="+mn-ea"/>
+                  <a:cs typeface="+mn-cs"/>
+                </a:rPr>
+                <a:t>Platform</a:t>
+              </a:r>
+            </a:p>
+          </p:txBody>
+        </p:sp>
+        <p:sp>
+          <p:nvSpPr>
+            <p:cNvPr id="138" name="Rectangle: Rounded Corners 137">
+              <a:extLst>
+                <a:ext uri="{FF2B5EF4-FFF2-40B4-BE49-F238E27FC236}">
+                  <a16:creationId xmlns:a16="http://schemas.microsoft.com/office/drawing/2014/main" id="{317B3CD7-532F-E49A-FCB9-4F327FF0C529}"/>
+                </a:ext>
+              </a:extLst>
+            </p:cNvPr>
+            <p:cNvSpPr/>
+            <p:nvPr/>
+          </p:nvSpPr>
+          <p:spPr>
+            <a:xfrm>
+              <a:off x="3816080" y="4399416"/>
+              <a:ext cx="771420" cy="815479"/>
+            </a:xfrm>
+            <a:prstGeom prst="roundRect">
+              <a:avLst/>
+            </a:prstGeom>
+            <a:noFill/>
+            <a:ln w="19050">
+              <a:solidFill>
+                <a:schemeClr val="tx1"/>
+              </a:solidFill>
+            </a:ln>
+          </p:spPr>
+          <p:style>
+            <a:lnRef idx="2">
+              <a:schemeClr val="accent1">
+                <a:shade val="50000"/>
+              </a:schemeClr>
+            </a:lnRef>
+            <a:fillRef idx="1">
+              <a:schemeClr val="accent1"/>
+            </a:fillRef>
+            <a:effectRef idx="0">
+              <a:schemeClr val="accent1"/>
+            </a:effectRef>
+            <a:fontRef idx="minor">
+              <a:schemeClr val="lt1"/>
+            </a:fontRef>
+          </p:style>
+          <p:txBody>
+            <a:bodyPr lIns="45720" tIns="0" bIns="9144" rtlCol="0" anchor="b" anchorCtr="0"/>
+            <a:lstStyle/>
+            <a:p>
+              <a:pPr lvl="0">
+                <a:defRPr/>
+              </a:pPr>
+              <a:r>
+                <a:rPr lang="en-US" sz="800" dirty="0">
+                  <a:solidFill>
+                    <a:prstClr val="black"/>
+                  </a:solidFill>
+                </a:rPr>
+                <a:t>Server-4</a:t>
+              </a:r>
+              <a:endParaRPr kumimoji="0" lang="en-US" sz="800" b="0" i="0" u="none" strike="noStrike" kern="1200" cap="none" spc="0" normalizeH="0" baseline="0" noProof="0" dirty="0">
+                <a:ln>
+                  <a:noFill/>
+                </a:ln>
+                <a:solidFill>
+                  <a:prstClr val="black"/>
+                </a:solidFill>
+                <a:effectLst/>
+                <a:uLnTx/>
+                <a:uFillTx/>
+                <a:ea typeface="+mn-ea"/>
+                <a:cs typeface="+mn-cs"/>
+              </a:endParaRPr>
+            </a:p>
+          </p:txBody>
+        </p:sp>
+        <p:sp>
+          <p:nvSpPr>
+            <p:cNvPr id="139" name="Arrow: Chevron 138">
+              <a:extLst>
+                <a:ext uri="{FF2B5EF4-FFF2-40B4-BE49-F238E27FC236}">
+                  <a16:creationId xmlns:a16="http://schemas.microsoft.com/office/drawing/2014/main" id="{39347010-0F94-97D3-0216-51D4F24BD161}"/>
+                </a:ext>
+              </a:extLst>
+            </p:cNvPr>
+            <p:cNvSpPr/>
+            <p:nvPr/>
+          </p:nvSpPr>
+          <p:spPr>
+            <a:xfrm rot="5400000">
+              <a:off x="4026243" y="4166150"/>
+              <a:ext cx="351106" cy="466531"/>
+            </a:xfrm>
+            <a:prstGeom prst="chevron">
+              <a:avLst>
+                <a:gd name="adj" fmla="val 14000"/>
+              </a:avLst>
+            </a:prstGeom>
+            <a:solidFill>
+              <a:schemeClr val="bg1"/>
+            </a:solidFill>
+            <a:ln w="12700">
+              <a:solidFill>
+                <a:schemeClr val="tx1"/>
+              </a:solidFill>
+            </a:ln>
+          </p:spPr>
+          <p:style>
+            <a:lnRef idx="2">
+              <a:schemeClr val="accent1">
+                <a:shade val="50000"/>
+              </a:schemeClr>
+            </a:lnRef>
+            <a:fillRef idx="1">
+              <a:schemeClr val="accent1"/>
+            </a:fillRef>
+            <a:effectRef idx="0">
+              <a:schemeClr val="accent1"/>
+            </a:effectRef>
+            <a:fontRef idx="minor">
+              <a:schemeClr val="lt1"/>
+            </a:fontRef>
+          </p:style>
+          <p:txBody>
+            <a:bodyPr tIns="0" rtlCol="0" anchor="t" anchorCtr="0"/>
+            <a:lstStyle/>
+            <a:p>
+              <a:pPr marL="0" marR="0" lvl="0" indent="0" algn="l" defTabSz="914400" rtl="0" eaLnBrk="1" fontAlgn="auto" latinLnBrk="0" hangingPunct="1">
+                <a:lnSpc>
+                  <a:spcPct val="100000"/>
+                </a:lnSpc>
+                <a:spcBef>
+                  <a:spcPts val="0"/>
+                </a:spcBef>
+                <a:spcAft>
+                  <a:spcPts val="0"/>
+                </a:spcAft>
+                <a:buClrTx/>
+                <a:buSzTx/>
+                <a:buFontTx/>
+                <a:buNone/>
+                <a:tabLst/>
+                <a:defRPr/>
+              </a:pPr>
+              <a:endParaRPr kumimoji="0" lang="en-US" sz="1000" b="0" i="0" u="none" strike="noStrike" kern="1200" cap="none" spc="0" normalizeH="0" baseline="0" noProof="0">
+                <a:ln>
+                  <a:noFill/>
+                </a:ln>
+                <a:solidFill>
+                  <a:prstClr val="black"/>
+                </a:solidFill>
+                <a:effectLst/>
+                <a:uLnTx/>
+                <a:uFillTx/>
+                <a:ea typeface="+mn-ea"/>
+                <a:cs typeface="+mn-cs"/>
+              </a:endParaRPr>
+            </a:p>
+          </p:txBody>
+        </p:sp>
+        <p:sp>
+          <p:nvSpPr>
+            <p:cNvPr id="140" name="TextBox 139">
+              <a:extLst>
+                <a:ext uri="{FF2B5EF4-FFF2-40B4-BE49-F238E27FC236}">
+                  <a16:creationId xmlns:a16="http://schemas.microsoft.com/office/drawing/2014/main" id="{4ED1317F-8D10-1F22-4D38-01FF860FBD7A}"/>
+                </a:ext>
+              </a:extLst>
+            </p:cNvPr>
+            <p:cNvSpPr txBox="1"/>
+            <p:nvPr/>
+          </p:nvSpPr>
+          <p:spPr>
+            <a:xfrm>
+              <a:off x="3995650" y="4276305"/>
+              <a:ext cx="412292" cy="230832"/>
+            </a:xfrm>
+            <a:prstGeom prst="rect">
+              <a:avLst/>
+            </a:prstGeom>
+            <a:noFill/>
+          </p:spPr>
+          <p:txBody>
+            <a:bodyPr wrap="square" rtlCol="0">
+              <a:spAutoFit/>
+            </a:bodyPr>
+            <a:lstStyle/>
+            <a:p>
+              <a:pPr marL="0" marR="0" lvl="0" indent="0" algn="l" defTabSz="914400" rtl="0" eaLnBrk="1" fontAlgn="auto" latinLnBrk="0" hangingPunct="1">
+                <a:lnSpc>
+                  <a:spcPct val="100000"/>
+                </a:lnSpc>
+                <a:spcBef>
+                  <a:spcPts val="0"/>
+                </a:spcBef>
+                <a:spcAft>
+                  <a:spcPts val="0"/>
+                </a:spcAft>
+                <a:buClrTx/>
+                <a:buSzTx/>
+                <a:buFontTx/>
+                <a:buNone/>
+                <a:tabLst/>
+                <a:defRPr/>
+              </a:pPr>
+              <a:r>
+                <a:rPr kumimoji="0" lang="en-US" sz="900" b="0" i="0" u="none" strike="noStrike" kern="1200" cap="none" spc="0" normalizeH="0" baseline="0" noProof="0" dirty="0">
+                  <a:ln>
+                    <a:noFill/>
+                  </a:ln>
+                  <a:solidFill>
+                    <a:prstClr val="black"/>
+                  </a:solidFill>
+                  <a:effectLst/>
+                  <a:uLnTx/>
+                  <a:uFillTx/>
+                  <a:ea typeface="+mn-ea"/>
+                  <a:cs typeface="+mn-cs"/>
+                </a:rPr>
+                <a:t>host</a:t>
+              </a:r>
+            </a:p>
+          </p:txBody>
+        </p:sp>
+      </p:grpSp>
+      <p:cxnSp>
+        <p:nvCxnSpPr>
+          <p:cNvPr id="141" name="Straight Arrow Connector 140">
+            <a:extLst>
+              <a:ext uri="{FF2B5EF4-FFF2-40B4-BE49-F238E27FC236}">
+                <a16:creationId xmlns:a16="http://schemas.microsoft.com/office/drawing/2014/main" id="{79F3AD47-312F-65D6-D4EB-02E50FE65593}"/>
+              </a:ext>
+            </a:extLst>
+          </p:cNvPr>
+          <p:cNvCxnSpPr>
+            <a:cxnSpLocks/>
+            <a:endCxn id="16" idx="2"/>
+          </p:cNvCxnSpPr>
+          <p:nvPr/>
+        </p:nvCxnSpPr>
+        <p:spPr>
+          <a:xfrm flipH="1" flipV="1">
+            <a:off x="6302708" y="3450499"/>
+            <a:ext cx="1544694" cy="319898"/>
+          </a:xfrm>
+          <a:prstGeom prst="straightConnector1">
+            <a:avLst/>
+          </a:prstGeom>
+          <a:ln w="12700">
+            <a:solidFill>
+              <a:schemeClr val="tx1"/>
+            </a:solidFill>
+            <a:headEnd type="triangle" w="med" len="med"/>
+            <a:tailEnd type="none" w="med" len="med"/>
+          </a:ln>
+        </p:spPr>
+        <p:style>
+          <a:lnRef idx="1">
+            <a:schemeClr val="accent1"/>
+          </a:lnRef>
+          <a:fillRef idx="0">
+            <a:schemeClr val="accent1"/>
+          </a:fillRef>
+          <a:effectRef idx="0">
+            <a:schemeClr val="accent1"/>
+          </a:effectRef>
+          <a:fontRef idx="minor">
+            <a:schemeClr val="tx1"/>
+          </a:fontRef>
+        </p:style>
+      </p:cxnSp>
+      <p:cxnSp>
+        <p:nvCxnSpPr>
+          <p:cNvPr id="144" name="Straight Arrow Connector 143">
+            <a:extLst>
+              <a:ext uri="{FF2B5EF4-FFF2-40B4-BE49-F238E27FC236}">
+                <a16:creationId xmlns:a16="http://schemas.microsoft.com/office/drawing/2014/main" id="{B86B00AA-36C8-30B0-1E26-40516F865687}"/>
+              </a:ext>
+            </a:extLst>
+          </p:cNvPr>
+          <p:cNvCxnSpPr>
+            <a:cxnSpLocks/>
+            <a:endCxn id="2" idx="2"/>
+          </p:cNvCxnSpPr>
+          <p:nvPr/>
+        </p:nvCxnSpPr>
+        <p:spPr>
+          <a:xfrm flipV="1">
+            <a:off x="4065356" y="3450499"/>
+            <a:ext cx="1851940" cy="283039"/>
+          </a:xfrm>
+          <a:prstGeom prst="straightConnector1">
+            <a:avLst/>
+          </a:prstGeom>
+          <a:ln w="12700">
+            <a:solidFill>
+              <a:schemeClr val="tx1"/>
+            </a:solidFill>
+            <a:headEnd type="triangle" w="med" len="med"/>
+            <a:tailEnd type="none" w="med" len="med"/>
+          </a:ln>
+        </p:spPr>
+        <p:style>
+          <a:lnRef idx="1">
+            <a:schemeClr val="accent1"/>
+          </a:lnRef>
+          <a:fillRef idx="0">
+            <a:schemeClr val="accent1"/>
+          </a:fillRef>
+          <a:effectRef idx="0">
+            <a:schemeClr val="accent1"/>
+          </a:effectRef>
+          <a:fontRef idx="minor">
+            <a:schemeClr val="tx1"/>
+          </a:fontRef>
+        </p:style>
+      </p:cxnSp>
+    </p:spTree>
+    <p:extLst>
+      <p:ext uri="{BB962C8B-B14F-4D97-AF65-F5344CB8AC3E}">
+        <p14:creationId xmlns:p14="http://schemas.microsoft.com/office/powerpoint/2010/main" val="3881308953"/>
       </p:ext>
     </p:extLst>
   </p:cSld>
